--- a/docs/Foresight-RM-Pitch.pptx
+++ b/docs/Foresight-RM-Pitch.pptx
@@ -15,9 +15,10 @@
     <p:sldId id="263" r:id="rId9"/>
     <p:sldId id="264" r:id="rId10"/>
     <p:sldId id="265" r:id="rId11"/>
+    <p:sldId id="266" r:id="rId12"/>
   </p:sldIdLst>
   <p:notesMasterIdLst>
-    <p:notesMasterId r:id="rId12"/>
+    <p:notesMasterId r:id="rId13"/>
   </p:notesMasterIdLst>
   <p:sldSz cx="12192000" cy="6858000"/>
   <p:notesSz cx="6858000" cy="12192000"/>
@@ -599,7 +600,7 @@
           <a:p>
             <a:r>
               <a:rPr lang="en-US" dirty="0"/>
-              <a:t>Close on these three sentences. Then hand over to the demo.</a:t>
+              <a:t>If asked about the recorder: consent capture is built, the analysis is built and running on written notes today. The audio input is the piece we did not wire, deliberately, because there is no transcript in the dataset and we were not going to fake one.</a:t>
             </a:r>
             <a:endParaRPr lang="en-US" dirty="0"/>
           </a:p>
@@ -623,6 +624,94 @@
             <a:fld id="{F7021451-1387-4CA6-816F-3879F97B5CBC}" type="slidenum">
               <a:rPr lang="en-US"/>
               <a:t>10</a:t>
+            </a:fld>
+            <a:endParaRPr lang="en-US"/>
+          </a:p>
+        </p:txBody>
+      </p:sp>
+    </p:spTree>
+    <p:extLst>
+      <p:ext uri="{BB962C8B-B14F-4D97-AF65-F5344CB8AC3E}">
+        <p14:creationId xmlns:p14="http://schemas.microsoft.com/office/powerpoint/2010/main" val="1024086991"/>
+      </p:ext>
+    </p:extLst>
+  </p:cSld>
+  <p:clrMapOvr>
+    <a:masterClrMapping/>
+  </p:clrMapOvr>
+</p:notes>
+</file>
+
+<file path=ppt/notesSlides/notesSlide11.xml><?xml version="1.0" encoding="utf-8"?>
+<p:notes xmlns:a="http://schemas.openxmlformats.org/drawingml/2006/main" xmlns:r="http://schemas.openxmlformats.org/officeDocument/2006/relationships" xmlns:p="http://schemas.openxmlformats.org/presentationml/2006/main">
+  <p:cSld>
+    <p:spTree>
+      <p:nvGrpSpPr>
+        <p:cNvPr id="1" name=""/>
+        <p:cNvGrpSpPr/>
+        <p:nvPr/>
+      </p:nvGrpSpPr>
+      <p:grpSpPr>
+        <a:xfrm>
+          <a:off x="0" y="0"/>
+          <a:ext cx="0" cy="0"/>
+          <a:chOff x="0" y="0"/>
+          <a:chExt cx="0" cy="0"/>
+        </a:xfrm>
+      </p:grpSpPr>
+      <p:sp>
+        <p:nvSpPr>
+          <p:cNvPr id="2" name="Slide Image Placeholder 1"/>
+          <p:cNvSpPr>
+            <a:spLocks noGrp="1" noRot="1" noChangeAspect="1"/>
+          </p:cNvSpPr>
+          <p:nvPr>
+            <p:ph type="sldImg"/>
+          </p:nvPr>
+        </p:nvSpPr>
+        <p:spPr/>
+      </p:sp>
+      <p:sp>
+        <p:nvSpPr>
+          <p:cNvPr id="3" name="Notes Placeholder 2"/>
+          <p:cNvSpPr>
+            <a:spLocks noGrp="1"/>
+          </p:cNvSpPr>
+          <p:nvPr>
+            <p:ph type="body" idx="1"/>
+          </p:nvPr>
+        </p:nvSpPr>
+        <p:spPr/>
+        <p:txBody>
+          <a:bodyPr/>
+          <a:lstStyle/>
+          <a:p>
+            <a:r>
+              <a:rPr lang="en-US" dirty="0"/>
+              <a:t>Close on these three sentences. Then hand over to the demo.</a:t>
+            </a:r>
+            <a:endParaRPr lang="en-US" dirty="0"/>
+          </a:p>
+        </p:txBody>
+      </p:sp>
+      <p:sp>
+        <p:nvSpPr>
+          <p:cNvPr id="4" name="Slide Number Placeholder 3"/>
+          <p:cNvSpPr>
+            <a:spLocks noGrp="1"/>
+          </p:cNvSpPr>
+          <p:nvPr>
+            <p:ph type="sldNum" sz="quarter" idx="10"/>
+          </p:nvPr>
+        </p:nvSpPr>
+        <p:spPr/>
+        <p:txBody>
+          <a:bodyPr/>
+          <a:lstStyle/>
+          <a:p>
+            <a:fld id="{F7021451-1387-4CA6-816F-3879F97B5CBC}" type="slidenum">
+              <a:rPr lang="en-US"/>
+              <a:t>11</a:t>
             </a:fld>
             <a:endParaRPr lang="en-US"/>
           </a:p>
@@ -1869,6 +1958,518 @@
     <p:bg>
       <p:bgPr>
         <a:solidFill>
+          <a:srgbClr val="F6F7F9"/>
+        </a:solidFill>
+      </p:bgPr>
+    </p:bg>
+    <p:spTree>
+      <p:nvGrpSpPr>
+        <p:cNvPr id="1" name=""/>
+        <p:cNvGrpSpPr/>
+        <p:nvPr/>
+      </p:nvGrpSpPr>
+      <p:grpSpPr>
+        <a:xfrm>
+          <a:off x="0" y="0"/>
+          <a:ext cx="0" cy="0"/>
+          <a:chOff x="0" y="0"/>
+          <a:chExt cx="0" cy="0"/>
+        </a:xfrm>
+      </p:grpSpPr>
+      <p:sp>
+        <p:nvSpPr>
+          <p:cNvPr id="2" name="Text 0"/>
+          <p:cNvSpPr txBox="1"/>
+          <p:nvPr/>
+        </p:nvSpPr>
+        <p:spPr>
+          <a:xfrm>
+            <a:off x="640080" y="502920"/>
+            <a:ext cx="8229600" cy="256032"/>
+          </a:xfrm>
+          <a:prstGeom prst="rect">
+            <a:avLst/>
+          </a:prstGeom>
+          <a:noFill/>
+          <a:ln/>
+        </p:spPr>
+        <p:txBody>
+          <a:bodyPr wrap="square" lIns="0" tIns="0" rIns="0" bIns="0" rtlCol="0" anchor="ctr"/>
+          <a:lstStyle/>
+          <a:p>
+            <a:pPr indent="0" marL="0">
+              <a:buNone/>
+            </a:pPr>
+            <a:r>
+              <a:rPr lang="en-US" sz="1100" spc="300" kern="0" dirty="0">
+                <a:solidFill>
+                  <a:srgbClr val="A68430"/>
+                </a:solidFill>
+                <a:latin typeface="Calibri" pitchFamily="34" charset="0"/>
+                <a:ea typeface="Calibri" pitchFamily="34" charset="-122"/>
+                <a:cs typeface="Calibri" pitchFamily="34" charset="-120"/>
+              </a:rPr>
+              <a:t>WHERE THIS GOES NEXT</a:t>
+            </a:r>
+            <a:endParaRPr lang="en-US" sz="1100" dirty="0"/>
+          </a:p>
+        </p:txBody>
+      </p:sp>
+      <p:sp>
+        <p:nvSpPr>
+          <p:cNvPr id="3" name="Text 1"/>
+          <p:cNvSpPr txBox="1"/>
+          <p:nvPr/>
+        </p:nvSpPr>
+        <p:spPr>
+          <a:xfrm>
+            <a:off x="640080" y="868680"/>
+            <a:ext cx="10881360" cy="777240"/>
+          </a:xfrm>
+          <a:prstGeom prst="rect">
+            <a:avLst/>
+          </a:prstGeom>
+          <a:noFill/>
+          <a:ln/>
+        </p:spPr>
+        <p:txBody>
+          <a:bodyPr wrap="square" lIns="0" tIns="0" rIns="0" bIns="0" rtlCol="0" anchor="t"/>
+          <a:lstStyle/>
+          <a:p>
+            <a:pPr indent="0" marL="0">
+              <a:buNone/>
+            </a:pPr>
+            <a:r>
+              <a:rPr lang="en-US" sz="3400" spc="350" kern="0" dirty="0">
+                <a:solidFill>
+                  <a:srgbClr val="141E55"/>
+                </a:solidFill>
+                <a:latin typeface="Calibri" pitchFamily="34" charset="0"/>
+                <a:ea typeface="Calibri" pitchFamily="34" charset="-122"/>
+                <a:cs typeface="Calibri" pitchFamily="34" charset="-120"/>
+              </a:rPr>
+              <a:t>CLOSING THE LOOP</a:t>
+            </a:r>
+            <a:endParaRPr lang="en-US" sz="3400" dirty="0"/>
+          </a:p>
+        </p:txBody>
+      </p:sp>
+      <p:sp>
+        <p:nvSpPr>
+          <p:cNvPr id="4" name="Text 2"/>
+          <p:cNvSpPr txBox="1"/>
+          <p:nvPr/>
+        </p:nvSpPr>
+        <p:spPr>
+          <a:xfrm>
+            <a:off x="640080" y="1783080"/>
+            <a:ext cx="10881360" cy="731520"/>
+          </a:xfrm>
+          <a:prstGeom prst="rect">
+            <a:avLst/>
+          </a:prstGeom>
+          <a:noFill/>
+          <a:ln/>
+        </p:spPr>
+        <p:txBody>
+          <a:bodyPr wrap="square" lIns="0" tIns="0" rIns="0" bIns="0" rtlCol="0" anchor="ctr"/>
+          <a:lstStyle/>
+          <a:p>
+            <a:pPr indent="0" marL="0">
+              <a:lnSpc>
+                <a:spcPts val="2400"/>
+              </a:lnSpc>
+              <a:buNone/>
+            </a:pPr>
+            <a:r>
+              <a:rPr lang="en-US" sz="1400" dirty="0">
+                <a:solidFill>
+                  <a:srgbClr val="5E6976"/>
+                </a:solidFill>
+                <a:latin typeface="Calibri" pitchFamily="34" charset="0"/>
+                <a:ea typeface="Calibri" pitchFamily="34" charset="-122"/>
+                <a:cs typeface="Calibri" pitchFamily="34" charset="-120"/>
+              </a:rPr>
+              <a:t>The tone analysis already runs. Today it reads the twenty-eight written RM notes and produces the guidance below. Point the same pipeline at a consented meeting transcript and it reads the room instead.</a:t>
+            </a:r>
+            <a:endParaRPr lang="en-US" sz="1400" dirty="0"/>
+          </a:p>
+        </p:txBody>
+      </p:sp>
+      <p:sp>
+        <p:nvSpPr>
+          <p:cNvPr id="5" name="Shape 3"/>
+          <p:cNvSpPr/>
+          <p:nvPr/>
+        </p:nvSpPr>
+        <p:spPr>
+          <a:xfrm>
+            <a:off x="640080" y="2697480"/>
+            <a:ext cx="5349240" cy="2148840"/>
+          </a:xfrm>
+          <a:prstGeom prst="roundRect">
+            <a:avLst>
+              <a:gd name="adj" fmla="val 2553"/>
+            </a:avLst>
+          </a:prstGeom>
+          <a:solidFill>
+            <a:srgbClr val="FFFFFF"/>
+          </a:solidFill>
+          <a:ln w="12700">
+            <a:solidFill>
+              <a:srgbClr val="CCD0D1"/>
+            </a:solidFill>
+            <a:prstDash val="solid"/>
+          </a:ln>
+        </p:spPr>
+      </p:sp>
+      <p:sp>
+        <p:nvSpPr>
+          <p:cNvPr id="6" name="Text 4"/>
+          <p:cNvSpPr txBox="1"/>
+          <p:nvPr/>
+        </p:nvSpPr>
+        <p:spPr>
+          <a:xfrm>
+            <a:off x="914400" y="2880360"/>
+            <a:ext cx="4846320" cy="274320"/>
+          </a:xfrm>
+          <a:prstGeom prst="rect">
+            <a:avLst/>
+          </a:prstGeom>
+          <a:noFill/>
+          <a:ln/>
+        </p:spPr>
+        <p:txBody>
+          <a:bodyPr wrap="square" lIns="0" tIns="0" rIns="0" bIns="0" rtlCol="0" anchor="ctr"/>
+          <a:lstStyle/>
+          <a:p>
+            <a:pPr indent="0" marL="0">
+              <a:buNone/>
+            </a:pPr>
+            <a:r>
+              <a:rPr lang="en-US" sz="1050" spc="200" kern="0" dirty="0">
+                <a:solidFill>
+                  <a:srgbClr val="2C6A4F"/>
+                </a:solidFill>
+                <a:latin typeface="Calibri" pitchFamily="34" charset="0"/>
+                <a:ea typeface="Calibri" pitchFamily="34" charset="-122"/>
+                <a:cs typeface="Calibri" pitchFamily="34" charset="-120"/>
+              </a:rPr>
+              <a:t>LIVE TODAY  ·  FROM WRITTEN NOTES</a:t>
+            </a:r>
+            <a:endParaRPr lang="en-US" sz="1050" dirty="0"/>
+          </a:p>
+        </p:txBody>
+      </p:sp>
+      <p:sp>
+        <p:nvSpPr>
+          <p:cNvPr id="7" name="Text 5"/>
+          <p:cNvSpPr txBox="1"/>
+          <p:nvPr/>
+        </p:nvSpPr>
+        <p:spPr>
+          <a:xfrm>
+            <a:off x="914400" y="3246120"/>
+            <a:ext cx="4846320" cy="1371600"/>
+          </a:xfrm>
+          <a:prstGeom prst="rect">
+            <a:avLst/>
+          </a:prstGeom>
+          <a:noFill/>
+          <a:ln/>
+        </p:spPr>
+        <p:txBody>
+          <a:bodyPr wrap="square" lIns="0" tIns="0" rIns="0" bIns="0" rtlCol="0" anchor="ctr"/>
+          <a:lstStyle/>
+          <a:p>
+            <a:pPr indent="0" marL="0">
+              <a:lnSpc>
+                <a:spcPts val="2200"/>
+              </a:lnSpc>
+              <a:buNone/>
+            </a:pPr>
+            <a:r>
+              <a:rPr lang="en-US" sz="1350" i="1" dirty="0">
+                <a:solidFill>
+                  <a:srgbClr val="141E55"/>
+                </a:solidFill>
+                <a:latin typeface="Calibri" pitchFamily="34" charset="0"/>
+                <a:ea typeface="Calibri" pitchFamily="34" charset="-122"/>
+                <a:cs typeface="Calibri" pitchFamily="34" charset="-120"/>
+              </a:rPr>
+              <a:t>“Speak with respect for his entrepreneurial conviction but be direct and grounded in numbers, gently challenging the concentration risk without dismissing his market view.”</a:t>
+            </a:r>
+            <a:endParaRPr lang="en-US" sz="1350" dirty="0"/>
+          </a:p>
+        </p:txBody>
+      </p:sp>
+      <p:sp>
+        <p:nvSpPr>
+          <p:cNvPr id="8" name="Shape 6"/>
+          <p:cNvSpPr/>
+          <p:nvPr/>
+        </p:nvSpPr>
+        <p:spPr>
+          <a:xfrm>
+            <a:off x="6172200" y="2697480"/>
+            <a:ext cx="5349240" cy="2148840"/>
+          </a:xfrm>
+          <a:prstGeom prst="roundRect">
+            <a:avLst>
+              <a:gd name="adj" fmla="val 2553"/>
+            </a:avLst>
+          </a:prstGeom>
+          <a:solidFill>
+            <a:srgbClr val="FBF8F0"/>
+          </a:solidFill>
+          <a:ln w="12700">
+            <a:solidFill>
+              <a:srgbClr val="A68430"/>
+            </a:solidFill>
+            <a:prstDash val="solid"/>
+          </a:ln>
+        </p:spPr>
+      </p:sp>
+      <p:sp>
+        <p:nvSpPr>
+          <p:cNvPr id="9" name="Text 7"/>
+          <p:cNvSpPr txBox="1"/>
+          <p:nvPr/>
+        </p:nvSpPr>
+        <p:spPr>
+          <a:xfrm>
+            <a:off x="6446520" y="2880360"/>
+            <a:ext cx="4846320" cy="274320"/>
+          </a:xfrm>
+          <a:prstGeom prst="rect">
+            <a:avLst/>
+          </a:prstGeom>
+          <a:noFill/>
+          <a:ln/>
+        </p:spPr>
+        <p:txBody>
+          <a:bodyPr wrap="square" lIns="0" tIns="0" rIns="0" bIns="0" rtlCol="0" anchor="ctr"/>
+          <a:lstStyle/>
+          <a:p>
+            <a:pPr indent="0" marL="0">
+              <a:buNone/>
+            </a:pPr>
+            <a:r>
+              <a:rPr lang="en-US" sz="1050" spc="200" kern="0" dirty="0">
+                <a:solidFill>
+                  <a:srgbClr val="A68430"/>
+                </a:solidFill>
+                <a:latin typeface="Calibri" pitchFamily="34" charset="0"/>
+                <a:ea typeface="Calibri" pitchFamily="34" charset="-122"/>
+                <a:cs typeface="Calibri" pitchFamily="34" charset="-120"/>
+              </a:rPr>
+              <a:t>NEXT  ·  FROM A CONSENTED TRANSCRIPT</a:t>
+            </a:r>
+            <a:endParaRPr lang="en-US" sz="1050" dirty="0"/>
+          </a:p>
+        </p:txBody>
+      </p:sp>
+      <p:sp>
+        <p:nvSpPr>
+          <p:cNvPr id="10" name="Text 8"/>
+          <p:cNvSpPr txBox="1"/>
+          <p:nvPr/>
+        </p:nvSpPr>
+        <p:spPr>
+          <a:xfrm>
+            <a:off x="6537960" y="3246120"/>
+            <a:ext cx="4709160" cy="1371600"/>
+          </a:xfrm>
+          <a:prstGeom prst="rect">
+            <a:avLst/>
+          </a:prstGeom>
+          <a:noFill/>
+          <a:ln/>
+        </p:spPr>
+        <p:txBody>
+          <a:bodyPr wrap="square" lIns="0" tIns="0" rIns="0" bIns="0" rtlCol="0" anchor="ctr"/>
+          <a:lstStyle/>
+          <a:p>
+            <a:pPr marL="342900" indent="-342900">
+              <a:spcAft>
+                <a:spcPts val="700"/>
+              </a:spcAft>
+              <a:buSzPct val="100000"/>
+              <a:buChar char="•"/>
+            </a:pPr>
+            <a:r>
+              <a:rPr lang="en-US" sz="1250" dirty="0">
+                <a:solidFill>
+                  <a:srgbClr val="5E6976"/>
+                </a:solidFill>
+                <a:latin typeface="Calibri" pitchFamily="34" charset="0"/>
+                <a:ea typeface="Calibri" pitchFamily="34" charset="-122"/>
+                <a:cs typeface="Calibri" pitchFamily="34" charset="-120"/>
+              </a:rPr>
+              <a:t>Consent captured before anything records.</a:t>
+            </a:r>
+            <a:endParaRPr lang="en-US" sz="1250" dirty="0"/>
+          </a:p>
+          <a:p>
+            <a:pPr marL="342900" indent="-342900">
+              <a:spcAft>
+                <a:spcPts val="700"/>
+              </a:spcAft>
+              <a:buSzPct val="100000"/>
+              <a:buChar char="•"/>
+            </a:pPr>
+            <a:r>
+              <a:rPr lang="en-US" sz="1250" dirty="0">
+                <a:solidFill>
+                  <a:srgbClr val="5E6976"/>
+                </a:solidFill>
+                <a:latin typeface="Calibri" pitchFamily="34" charset="0"/>
+                <a:ea typeface="Calibri" pitchFamily="34" charset="-122"/>
+                <a:cs typeface="Calibri" pitchFamily="34" charset="-120"/>
+              </a:rPr>
+              <a:t>Tone and concerns extracted from the meeting.</a:t>
+            </a:r>
+            <a:endParaRPr lang="en-US" sz="1250" dirty="0"/>
+          </a:p>
+          <a:p>
+            <a:pPr marL="342900" indent="-342900">
+              <a:spcAft>
+                <a:spcPts val="700"/>
+              </a:spcAft>
+              <a:buSzPct val="100000"/>
+              <a:buChar char="•"/>
+            </a:pPr>
+            <a:r>
+              <a:rPr lang="en-US" sz="1250" dirty="0">
+                <a:solidFill>
+                  <a:srgbClr val="5E6976"/>
+                </a:solidFill>
+                <a:latin typeface="Calibri" pitchFamily="34" charset="0"/>
+                <a:ea typeface="Calibri" pitchFamily="34" charset="-122"/>
+                <a:cs typeface="Calibri" pitchFamily="34" charset="-120"/>
+              </a:rPr>
+              <a:t>Those become constraints — so the gate holds a</a:t>
+            </a:r>
+            <a:endParaRPr lang="en-US" sz="1250" dirty="0"/>
+          </a:p>
+          <a:p>
+            <a:pPr indent="0" marL="0">
+              <a:spcAft>
+                <a:spcPts val="700"/>
+              </a:spcAft>
+              <a:buNone/>
+            </a:pPr>
+            <a:r>
+              <a:rPr lang="en-US" sz="1250" dirty="0">
+                <a:solidFill>
+                  <a:srgbClr val="5E6976"/>
+                </a:solidFill>
+                <a:latin typeface="Calibri" pitchFamily="34" charset="0"/>
+                <a:ea typeface="Calibri" pitchFamily="34" charset="-122"/>
+                <a:cs typeface="Calibri" pitchFamily="34" charset="-120"/>
+              </a:rPr>
+              <a:t>    recommendation the client is not ready to hear.</a:t>
+            </a:r>
+            <a:endParaRPr lang="en-US" sz="1250" dirty="0"/>
+          </a:p>
+        </p:txBody>
+      </p:sp>
+      <p:sp>
+        <p:nvSpPr>
+          <p:cNvPr id="11" name="Text 9"/>
+          <p:cNvSpPr txBox="1"/>
+          <p:nvPr/>
+        </p:nvSpPr>
+        <p:spPr>
+          <a:xfrm>
+            <a:off x="640080" y="5120640"/>
+            <a:ext cx="10881360" cy="640080"/>
+          </a:xfrm>
+          <a:prstGeom prst="rect">
+            <a:avLst/>
+          </a:prstGeom>
+          <a:noFill/>
+          <a:ln/>
+        </p:spPr>
+        <p:txBody>
+          <a:bodyPr wrap="square" lIns="0" tIns="0" rIns="0" bIns="0" rtlCol="0" anchor="ctr"/>
+          <a:lstStyle/>
+          <a:p>
+            <a:pPr indent="0" marL="0">
+              <a:lnSpc>
+                <a:spcPts val="2400"/>
+              </a:lnSpc>
+              <a:buNone/>
+            </a:pPr>
+            <a:r>
+              <a:rPr lang="en-US" sz="1600" dirty="0">
+                <a:solidFill>
+                  <a:srgbClr val="141E55"/>
+                </a:solidFill>
+                <a:latin typeface="Calibri" pitchFamily="34" charset="0"/>
+                <a:ea typeface="Calibri" pitchFamily="34" charset="-122"/>
+                <a:cs typeface="Calibri" pitchFamily="34" charset="-120"/>
+              </a:rPr>
+              <a:t>Every other tool summarises the meeting and files a note. Ours feeds what was said back into what may be said next.</a:t>
+            </a:r>
+            <a:endParaRPr lang="en-US" sz="1600" dirty="0"/>
+          </a:p>
+        </p:txBody>
+      </p:sp>
+      <p:sp>
+        <p:nvSpPr>
+          <p:cNvPr id="12" name="Text 10"/>
+          <p:cNvSpPr txBox="1"/>
+          <p:nvPr/>
+        </p:nvSpPr>
+        <p:spPr>
+          <a:xfrm>
+            <a:off x="640080" y="6355080"/>
+            <a:ext cx="10881360" cy="274320"/>
+          </a:xfrm>
+          <a:prstGeom prst="rect">
+            <a:avLst/>
+          </a:prstGeom>
+          <a:noFill/>
+          <a:ln/>
+        </p:spPr>
+        <p:txBody>
+          <a:bodyPr wrap="square" lIns="0" tIns="0" rIns="0" bIns="0" rtlCol="0" anchor="ctr"/>
+          <a:lstStyle/>
+          <a:p>
+            <a:pPr indent="0" marL="0">
+              <a:buNone/>
+            </a:pPr>
+            <a:r>
+              <a:rPr lang="en-US" sz="950" dirty="0">
+                <a:solidFill>
+                  <a:srgbClr val="8B96A3"/>
+                </a:solidFill>
+                <a:latin typeface="Calibri" pitchFamily="34" charset="0"/>
+                <a:ea typeface="Calibri" pitchFamily="34" charset="-122"/>
+                <a:cs typeface="Calibri" pitchFamily="34" charset="-120"/>
+              </a:rPr>
+              <a:t>No transcript exists in the supplied dataset, so none was fabricated — the analysis runs on the real notes instead</a:t>
+            </a:r>
+            <a:endParaRPr lang="en-US" sz="950" dirty="0"/>
+          </a:p>
+        </p:txBody>
+      </p:sp>
+    </p:spTree>
+  </p:cSld>
+  <p:clrMapOvr>
+    <a:masterClrMapping/>
+  </p:clrMapOvr>
+</p:sld>
+</file>
+
+<file path=ppt/slides/slide11.xml><?xml version="1.0" encoding="utf-8"?>
+<p:sld xmlns:a="http://schemas.openxmlformats.org/drawingml/2006/main" xmlns:r="http://schemas.openxmlformats.org/officeDocument/2006/relationships" xmlns:p="http://schemas.openxmlformats.org/presentationml/2006/main">
+  <p:cSld name="Slide 11">
+    <p:bg>
+      <p:bgPr>
+        <a:solidFill>
           <a:srgbClr val="141E55"/>
         </a:solidFill>
       </p:bgPr>

--- a/docs/Foresight-RM-Pitch.pptx
+++ b/docs/Foresight-RM-Pitch.pptx
@@ -16,9 +16,10 @@
     <p:sldId id="264" r:id="rId10"/>
     <p:sldId id="265" r:id="rId11"/>
     <p:sldId id="266" r:id="rId12"/>
+    <p:sldId id="267" r:id="rId13"/>
   </p:sldIdLst>
   <p:notesMasterIdLst>
-    <p:notesMasterId r:id="rId13"/>
+    <p:notesMasterId r:id="rId14"/>
   </p:notesMasterIdLst>
   <p:sldSz cx="12192000" cy="6858000"/>
   <p:notesSz cx="6858000" cy="12192000"/>
@@ -600,7 +601,7 @@
           <a:p>
             <a:r>
               <a:rPr lang="en-US" dirty="0"/>
-              <a:t>If asked about the recorder: consent capture is built, the analysis is built and running on written notes today. The audio input is the piece we did not wire, deliberately, because there is no transcript in the dataset and we were not going to fake one.</a:t>
+              <a:t>Preserving the central role of the RM is in the rubric. For us it is the architecture, not a caveat.</a:t>
             </a:r>
             <a:endParaRPr lang="en-US" dirty="0"/>
           </a:p>
@@ -688,7 +689,7 @@
           <a:p>
             <a:r>
               <a:rPr lang="en-US" dirty="0"/>
-              <a:t>Close on these three sentences. Then hand over to the demo.</a:t>
+              <a:t>If asked about the recorder: consent capture is built, the analysis is built and running on written notes today. The audio input is the piece we did not wire, deliberately, because there is no transcript in the dataset and we were not going to fake one.</a:t>
             </a:r>
             <a:endParaRPr lang="en-US" dirty="0"/>
           </a:p>
@@ -712,6 +713,94 @@
             <a:fld id="{F7021451-1387-4CA6-816F-3879F97B5CBC}" type="slidenum">
               <a:rPr lang="en-US"/>
               <a:t>11</a:t>
+            </a:fld>
+            <a:endParaRPr lang="en-US"/>
+          </a:p>
+        </p:txBody>
+      </p:sp>
+    </p:spTree>
+    <p:extLst>
+      <p:ext uri="{BB962C8B-B14F-4D97-AF65-F5344CB8AC3E}">
+        <p14:creationId xmlns:p14="http://schemas.microsoft.com/office/powerpoint/2010/main" val="1024086991"/>
+      </p:ext>
+    </p:extLst>
+  </p:cSld>
+  <p:clrMapOvr>
+    <a:masterClrMapping/>
+  </p:clrMapOvr>
+</p:notes>
+</file>
+
+<file path=ppt/notesSlides/notesSlide12.xml><?xml version="1.0" encoding="utf-8"?>
+<p:notes xmlns:a="http://schemas.openxmlformats.org/drawingml/2006/main" xmlns:r="http://schemas.openxmlformats.org/officeDocument/2006/relationships" xmlns:p="http://schemas.openxmlformats.org/presentationml/2006/main">
+  <p:cSld>
+    <p:spTree>
+      <p:nvGrpSpPr>
+        <p:cNvPr id="1" name=""/>
+        <p:cNvGrpSpPr/>
+        <p:nvPr/>
+      </p:nvGrpSpPr>
+      <p:grpSpPr>
+        <a:xfrm>
+          <a:off x="0" y="0"/>
+          <a:ext cx="0" cy="0"/>
+          <a:chOff x="0" y="0"/>
+          <a:chExt cx="0" cy="0"/>
+        </a:xfrm>
+      </p:grpSpPr>
+      <p:sp>
+        <p:nvSpPr>
+          <p:cNvPr id="2" name="Slide Image Placeholder 1"/>
+          <p:cNvSpPr>
+            <a:spLocks noGrp="1" noRot="1" noChangeAspect="1"/>
+          </p:cNvSpPr>
+          <p:nvPr>
+            <p:ph type="sldImg"/>
+          </p:nvPr>
+        </p:nvSpPr>
+        <p:spPr/>
+      </p:sp>
+      <p:sp>
+        <p:nvSpPr>
+          <p:cNvPr id="3" name="Notes Placeholder 2"/>
+          <p:cNvSpPr>
+            <a:spLocks noGrp="1"/>
+          </p:cNvSpPr>
+          <p:nvPr>
+            <p:ph type="body" idx="1"/>
+          </p:nvPr>
+        </p:nvSpPr>
+        <p:spPr/>
+        <p:txBody>
+          <a:bodyPr/>
+          <a:lstStyle/>
+          <a:p>
+            <a:r>
+              <a:rPr lang="en-US" dirty="0"/>
+              <a:t>Close on these three sentences. Then hand over to the demo.</a:t>
+            </a:r>
+            <a:endParaRPr lang="en-US" dirty="0"/>
+          </a:p>
+        </p:txBody>
+      </p:sp>
+      <p:sp>
+        <p:nvSpPr>
+          <p:cNvPr id="4" name="Slide Number Placeholder 3"/>
+          <p:cNvSpPr>
+            <a:spLocks noGrp="1"/>
+          </p:cNvSpPr>
+          <p:nvPr>
+            <p:ph type="sldNum" sz="quarter" idx="10"/>
+          </p:nvPr>
+        </p:nvSpPr>
+        <p:spPr/>
+        <p:txBody>
+          <a:bodyPr/>
+          <a:lstStyle/>
+          <a:p>
+            <a:fld id="{F7021451-1387-4CA6-816F-3879F97B5CBC}" type="slidenum">
+              <a:rPr lang="en-US"/>
+              <a:t>12</a:t>
             </a:fld>
             <a:endParaRPr lang="en-US"/>
           </a:p>
@@ -1304,7 +1393,7 @@
           <a:p>
             <a:r>
               <a:rPr lang="en-US" dirty="0"/>
-              <a:t>Judges will ask whether they can trust the numbers. This is the answer.</a:t>
+              <a:t>The deck is otherwise all risk. This is the relationship half — the reasons to call when nothing is wrong.</a:t>
             </a:r>
             <a:endParaRPr lang="en-US" dirty="0"/>
           </a:p>
@@ -1392,7 +1481,7 @@
           <a:p>
             <a:r>
               <a:rPr lang="en-US" dirty="0"/>
-              <a:t>Preserving the central role of the RM is in the rubric. For us it is the architecture, not a caveat.</a:t>
+              <a:t>Judges will ask whether they can trust the numbers. This is the answer.</a:t>
             </a:r>
             <a:endParaRPr lang="en-US" dirty="0"/>
           </a:p>
@@ -1871,7 +1960,7 @@
               <a:buNone/>
             </a:pPr>
             <a:r>
-              <a:rPr lang="en-US" sz="1300" dirty="0">
+              <a:rPr lang="en-US" sz="1450" dirty="0">
                 <a:solidFill>
                   <a:srgbClr val="7186D3"/>
                 </a:solidFill>
@@ -1881,7 +1970,7 @@
               </a:rPr>
               <a:t>Julius Baer · Wealth Intelligence</a:t>
             </a:r>
-            <a:endParaRPr lang="en-US" sz="1300" dirty="0"/>
+            <a:endParaRPr lang="en-US" sz="1450" dirty="0"/>
           </a:p>
           <a:p>
             <a:pPr indent="0" marL="0">
@@ -1891,7 +1980,7 @@
               <a:buNone/>
             </a:pPr>
             <a:r>
-              <a:rPr lang="en-US" sz="1300" dirty="0">
+              <a:rPr lang="en-US" sz="1450" dirty="0">
                 <a:solidFill>
                   <a:srgbClr val="7186D3"/>
                 </a:solidFill>
@@ -1901,7 +1990,7 @@
               </a:rPr>
               <a:t>Foresight Labs · SingHacks 2026</a:t>
             </a:r>
-            <a:endParaRPr lang="en-US" sz="1300" dirty="0"/>
+            <a:endParaRPr lang="en-US" sz="1450" dirty="0"/>
           </a:p>
         </p:txBody>
       </p:sp>
@@ -1930,7 +2019,7 @@
               <a:buNone/>
             </a:pPr>
             <a:r>
-              <a:rPr lang="en-US" sz="1200" spc="200" kern="0" dirty="0">
+              <a:rPr lang="en-US" sz="1350" spc="200" kern="0" dirty="0">
                 <a:solidFill>
                   <a:srgbClr val="4A5FBD"/>
                 </a:solidFill>
@@ -1940,7 +2029,7 @@
               </a:rPr>
               <a:t>20 clients · 6 agents · 12 data files · 28 RM notes</a:t>
             </a:r>
-            <a:endParaRPr lang="en-US" sz="1200" dirty="0"/>
+            <a:endParaRPr lang="en-US" sz="1350" dirty="0"/>
           </a:p>
         </p:txBody>
       </p:sp>
@@ -1955,6 +2044,354 @@
 <file path=ppt/slides/slide10.xml><?xml version="1.0" encoding="utf-8"?>
 <p:sld xmlns:a="http://schemas.openxmlformats.org/drawingml/2006/main" xmlns:r="http://schemas.openxmlformats.org/officeDocument/2006/relationships" xmlns:p="http://schemas.openxmlformats.org/presentationml/2006/main">
   <p:cSld name="Slide 10">
+    <p:bg>
+      <p:bgPr>
+        <a:solidFill>
+          <a:srgbClr val="FFFFFF"/>
+        </a:solidFill>
+      </p:bgPr>
+    </p:bg>
+    <p:spTree>
+      <p:nvGrpSpPr>
+        <p:cNvPr id="1" name=""/>
+        <p:cNvGrpSpPr/>
+        <p:nvPr/>
+      </p:nvGrpSpPr>
+      <p:grpSpPr>
+        <a:xfrm>
+          <a:off x="0" y="0"/>
+          <a:ext cx="0" cy="0"/>
+          <a:chOff x="0" y="0"/>
+          <a:chExt cx="0" cy="0"/>
+        </a:xfrm>
+      </p:grpSpPr>
+      <p:sp>
+        <p:nvSpPr>
+          <p:cNvPr id="2" name="Text 0"/>
+          <p:cNvSpPr txBox="1"/>
+          <p:nvPr/>
+        </p:nvSpPr>
+        <p:spPr>
+          <a:xfrm>
+            <a:off x="640080" y="502920"/>
+            <a:ext cx="8229600" cy="256032"/>
+          </a:xfrm>
+          <a:prstGeom prst="rect">
+            <a:avLst/>
+          </a:prstGeom>
+          <a:noFill/>
+          <a:ln/>
+        </p:spPr>
+        <p:txBody>
+          <a:bodyPr wrap="square" lIns="0" tIns="0" rIns="0" bIns="0" rtlCol="0" anchor="ctr"/>
+          <a:lstStyle/>
+          <a:p>
+            <a:pPr indent="0" marL="0">
+              <a:buNone/>
+            </a:pPr>
+            <a:r>
+              <a:rPr lang="en-US" sz="1300" spc="300" kern="0" dirty="0">
+                <a:solidFill>
+                  <a:srgbClr val="A68430"/>
+                </a:solidFill>
+                <a:latin typeface="Calibri" pitchFamily="34" charset="0"/>
+                <a:ea typeface="Calibri" pitchFamily="34" charset="-122"/>
+                <a:cs typeface="Calibri" pitchFamily="34" charset="-120"/>
+              </a:rPr>
+              <a:t>STRATEGIC IMPACT</a:t>
+            </a:r>
+            <a:endParaRPr lang="en-US" sz="1300" dirty="0"/>
+          </a:p>
+        </p:txBody>
+      </p:sp>
+      <p:sp>
+        <p:nvSpPr>
+          <p:cNvPr id="3" name="Text 1"/>
+          <p:cNvSpPr txBox="1"/>
+          <p:nvPr/>
+        </p:nvSpPr>
+        <p:spPr>
+          <a:xfrm>
+            <a:off x="640080" y="868680"/>
+            <a:ext cx="10881360" cy="777240"/>
+          </a:xfrm>
+          <a:prstGeom prst="rect">
+            <a:avLst/>
+          </a:prstGeom>
+          <a:noFill/>
+          <a:ln/>
+        </p:spPr>
+        <p:txBody>
+          <a:bodyPr wrap="square" lIns="0" tIns="0" rIns="0" bIns="0" rtlCol="0" anchor="t"/>
+          <a:lstStyle/>
+          <a:p>
+            <a:pPr indent="0" marL="0">
+              <a:buNone/>
+            </a:pPr>
+            <a:r>
+              <a:rPr lang="en-US" sz="3400" spc="350" kern="0" dirty="0">
+                <a:solidFill>
+                  <a:srgbClr val="141E55"/>
+                </a:solidFill>
+                <a:latin typeface="Calibri" pitchFamily="34" charset="0"/>
+                <a:ea typeface="Calibri" pitchFamily="34" charset="-122"/>
+                <a:cs typeface="Calibri" pitchFamily="34" charset="-120"/>
+              </a:rPr>
+              <a:t>THE RELATIONSHIP MANAGER STAYS AT THE CENTRE</a:t>
+            </a:r>
+            <a:endParaRPr lang="en-US" sz="3400" dirty="0"/>
+          </a:p>
+        </p:txBody>
+      </p:sp>
+      <p:sp>
+        <p:nvSpPr>
+          <p:cNvPr id="4" name="Text 2"/>
+          <p:cNvSpPr txBox="1"/>
+          <p:nvPr/>
+        </p:nvSpPr>
+        <p:spPr>
+          <a:xfrm>
+            <a:off x="777240" y="1874520"/>
+            <a:ext cx="4572000" cy="1828800"/>
+          </a:xfrm>
+          <a:prstGeom prst="rect">
+            <a:avLst/>
+          </a:prstGeom>
+          <a:noFill/>
+          <a:ln/>
+        </p:spPr>
+        <p:txBody>
+          <a:bodyPr wrap="square" lIns="0" tIns="0" rIns="0" bIns="0" rtlCol="0" anchor="ctr"/>
+          <a:lstStyle/>
+          <a:p>
+            <a:pPr marL="342900" indent="-342900">
+              <a:spcAft>
+                <a:spcPts val="1200"/>
+              </a:spcAft>
+              <a:buSzPct val="100000"/>
+              <a:buChar char="•"/>
+            </a:pPr>
+            <a:r>
+              <a:rPr lang="en-US" sz="1600" dirty="0">
+                <a:solidFill>
+                  <a:srgbClr val="5E6976"/>
+                </a:solidFill>
+                <a:latin typeface="Calibri" pitchFamily="34" charset="0"/>
+                <a:ea typeface="Calibri" pitchFamily="34" charset="-122"/>
+                <a:cs typeface="Calibri" pitchFamily="34" charset="-120"/>
+              </a:rPr>
+              <a:t>Nothing reaches a client without her approval.</a:t>
+            </a:r>
+            <a:endParaRPr lang="en-US" sz="1600" dirty="0"/>
+          </a:p>
+          <a:p>
+            <a:pPr marL="342900" indent="-342900">
+              <a:spcAft>
+                <a:spcPts val="1200"/>
+              </a:spcAft>
+              <a:buSzPct val="100000"/>
+              <a:buChar char="•"/>
+            </a:pPr>
+            <a:r>
+              <a:rPr lang="en-US" sz="1600" dirty="0">
+                <a:solidFill>
+                  <a:srgbClr val="5E6976"/>
+                </a:solidFill>
+                <a:latin typeface="Calibri" pitchFamily="34" charset="0"/>
+                <a:ea typeface="Calibri" pitchFamily="34" charset="-122"/>
+                <a:cs typeface="Calibri" pitchFamily="34" charset="-120"/>
+              </a:rPr>
+              <a:t>Drafts are written in the client’s own reporting language.</a:t>
+            </a:r>
+            <a:endParaRPr lang="en-US" sz="1600" dirty="0"/>
+          </a:p>
+          <a:p>
+            <a:pPr marL="342900" indent="-342900">
+              <a:spcAft>
+                <a:spcPts val="1200"/>
+              </a:spcAft>
+              <a:buSzPct val="100000"/>
+              <a:buChar char="•"/>
+            </a:pPr>
+            <a:r>
+              <a:rPr lang="en-US" sz="1600" dirty="0">
+                <a:solidFill>
+                  <a:srgbClr val="5E6976"/>
+                </a:solidFill>
+                <a:latin typeface="Calibri" pitchFamily="34" charset="0"/>
+                <a:ea typeface="Calibri" pitchFamily="34" charset="-122"/>
+                <a:cs typeface="Calibri" pitchFamily="34" charset="-120"/>
+              </a:rPr>
+              <a:t>Every approval is stored with the original AI draft beside it.</a:t>
+            </a:r>
+            <a:endParaRPr lang="en-US" sz="1600" dirty="0"/>
+          </a:p>
+          <a:p>
+            <a:pPr marL="342900" indent="-342900">
+              <a:spcAft>
+                <a:spcPts val="1200"/>
+              </a:spcAft>
+              <a:buSzPct val="100000"/>
+              <a:buChar char="•"/>
+            </a:pPr>
+            <a:r>
+              <a:rPr lang="en-US" sz="1600" dirty="0">
+                <a:solidFill>
+                  <a:srgbClr val="5E6976"/>
+                </a:solidFill>
+                <a:latin typeface="Calibri" pitchFamily="34" charset="0"/>
+                <a:ea typeface="Calibri" pitchFamily="34" charset="-122"/>
+                <a:cs typeface="Calibri" pitchFamily="34" charset="-120"/>
+              </a:rPr>
+              <a:t>If she leaves, 23 years of relationship does not leave with her.</a:t>
+            </a:r>
+            <a:endParaRPr lang="en-US" sz="1600" dirty="0"/>
+          </a:p>
+        </p:txBody>
+      </p:sp>
+      <p:sp>
+        <p:nvSpPr>
+          <p:cNvPr id="5" name="Shape 3"/>
+          <p:cNvSpPr/>
+          <p:nvPr/>
+        </p:nvSpPr>
+        <p:spPr>
+          <a:xfrm>
+            <a:off x="640080" y="4023360"/>
+            <a:ext cx="4846320" cy="1737360"/>
+          </a:xfrm>
+          <a:prstGeom prst="roundRect">
+            <a:avLst>
+              <a:gd name="adj" fmla="val 3158"/>
+            </a:avLst>
+          </a:prstGeom>
+          <a:solidFill>
+            <a:srgbClr val="FBF8F0"/>
+          </a:solidFill>
+          <a:ln w="12700">
+            <a:solidFill>
+              <a:srgbClr val="A68430"/>
+            </a:solidFill>
+            <a:prstDash val="solid"/>
+          </a:ln>
+        </p:spPr>
+      </p:sp>
+      <p:sp>
+        <p:nvSpPr>
+          <p:cNvPr id="6" name="Text 4"/>
+          <p:cNvSpPr txBox="1"/>
+          <p:nvPr/>
+        </p:nvSpPr>
+        <p:spPr>
+          <a:xfrm>
+            <a:off x="914400" y="4297680"/>
+            <a:ext cx="4343400" cy="1234440"/>
+          </a:xfrm>
+          <a:prstGeom prst="rect">
+            <a:avLst/>
+          </a:prstGeom>
+          <a:noFill/>
+          <a:ln/>
+        </p:spPr>
+        <p:txBody>
+          <a:bodyPr wrap="square" lIns="0" tIns="0" rIns="0" bIns="0" rtlCol="0" anchor="ctr"/>
+          <a:lstStyle/>
+          <a:p>
+            <a:pPr indent="0" marL="0">
+              <a:lnSpc>
+                <a:spcPts val="2500"/>
+              </a:lnSpc>
+              <a:buNone/>
+            </a:pPr>
+            <a:r>
+              <a:rPr lang="en-US" sz="1650" dirty="0">
+                <a:solidFill>
+                  <a:srgbClr val="141E55"/>
+                </a:solidFill>
+                <a:latin typeface="Calibri" pitchFamily="34" charset="0"/>
+                <a:ea typeface="Calibri" pitchFamily="34" charset="-122"/>
+                <a:cs typeface="Calibri" pitchFamily="34" charset="-120"/>
+              </a:rPr>
+              <a:t>Relationship is the only agent that can veto another. A financial finding can be suppressed by a human fact — never the reverse.</a:t>
+            </a:r>
+            <a:endParaRPr lang="en-US" sz="1650" dirty="0"/>
+          </a:p>
+        </p:txBody>
+      </p:sp>
+      <p:pic>
+        <p:nvPicPr>
+          <p:cNvPr id="7" name="Image 0" descr="screens/c-brief.png">    </p:cNvPr>
+          <p:cNvPicPr>
+            <a:picLocks noChangeAspect="1"/>
+          </p:cNvPicPr>
+          <p:nvPr/>
+        </p:nvPicPr>
+        <p:blipFill>
+          <a:blip r:embed="rId1"/>
+          <a:stretch>
+            <a:fillRect/>
+          </a:stretch>
+        </p:blipFill>
+        <p:spPr>
+          <a:xfrm>
+            <a:off x="5806440" y="1737360"/>
+            <a:ext cx="5760720" cy="2971800"/>
+          </a:xfrm>
+          <a:prstGeom prst="rect">
+            <a:avLst/>
+          </a:prstGeom>
+        </p:spPr>
+      </p:pic>
+      <p:sp>
+        <p:nvSpPr>
+          <p:cNvPr id="8" name="Text 5"/>
+          <p:cNvSpPr txBox="1"/>
+          <p:nvPr/>
+        </p:nvSpPr>
+        <p:spPr>
+          <a:xfrm>
+            <a:off x="640080" y="6355080"/>
+            <a:ext cx="10881360" cy="274320"/>
+          </a:xfrm>
+          <a:prstGeom prst="rect">
+            <a:avLst/>
+          </a:prstGeom>
+          <a:noFill/>
+          <a:ln/>
+        </p:spPr>
+        <p:txBody>
+          <a:bodyPr wrap="square" lIns="0" tIns="0" rIns="0" bIns="0" rtlCol="0" anchor="ctr"/>
+          <a:lstStyle/>
+          <a:p>
+            <a:pPr indent="0" marL="0">
+              <a:buNone/>
+            </a:pPr>
+            <a:r>
+              <a:rPr lang="en-US" sz="1150" dirty="0">
+                <a:solidFill>
+                  <a:srgbClr val="8B96A3"/>
+                </a:solidFill>
+                <a:latin typeface="Calibri" pitchFamily="34" charset="0"/>
+                <a:ea typeface="Calibri" pitchFamily="34" charset="-122"/>
+                <a:cs typeface="Calibri" pitchFamily="34" charset="-120"/>
+              </a:rPr>
+              <a:t>Screen: Conversation brief — drafted in Traditional Chinese, approved by the RM before it is sent</a:t>
+            </a:r>
+            <a:endParaRPr lang="en-US" sz="1150" dirty="0"/>
+          </a:p>
+        </p:txBody>
+      </p:sp>
+    </p:spTree>
+  </p:cSld>
+  <p:clrMapOvr>
+    <a:masterClrMapping/>
+  </p:clrMapOvr>
+</p:sld>
+</file>
+
+<file path=ppt/slides/slide11.xml><?xml version="1.0" encoding="utf-8"?>
+<p:sld xmlns:a="http://schemas.openxmlformats.org/drawingml/2006/main" xmlns:r="http://schemas.openxmlformats.org/officeDocument/2006/relationships" xmlns:p="http://schemas.openxmlformats.org/presentationml/2006/main">
+  <p:cSld name="Slide 11">
     <p:bg>
       <p:bgPr>
         <a:solidFill>
@@ -1976,15 +2413,39 @@
           <a:chExt cx="0" cy="0"/>
         </a:xfrm>
       </p:grpSpPr>
-      <p:sp>
-        <p:nvSpPr>
-          <p:cNvPr id="2" name="Text 0"/>
-          <p:cNvSpPr txBox="1"/>
-          <p:nvPr/>
-        </p:nvSpPr>
-        <p:spPr>
-          <a:xfrm>
-            <a:off x="640080" y="502920"/>
+      <p:pic>
+        <p:nvPicPr>
+          <p:cNvPr id="2" name="Image 0" descr="icons/mic-navy.png">    </p:cNvPr>
+          <p:cNvPicPr>
+            <a:picLocks noChangeAspect="1"/>
+          </p:cNvPicPr>
+          <p:nvPr/>
+        </p:nvPicPr>
+        <p:blipFill>
+          <a:blip r:embed="rId1"/>
+          <a:stretch>
+            <a:fillRect/>
+          </a:stretch>
+        </p:blipFill>
+        <p:spPr>
+          <a:xfrm>
+            <a:off x="640080" y="457200"/>
+            <a:ext cx="274320" cy="274320"/>
+          </a:xfrm>
+          <a:prstGeom prst="rect">
+            <a:avLst/>
+          </a:prstGeom>
+        </p:spPr>
+      </p:pic>
+      <p:sp>
+        <p:nvSpPr>
+          <p:cNvPr id="3" name="Text 0"/>
+          <p:cNvSpPr txBox="1"/>
+          <p:nvPr/>
+        </p:nvSpPr>
+        <p:spPr>
+          <a:xfrm>
+            <a:off x="1024128" y="502920"/>
             <a:ext cx="8229600" cy="256032"/>
           </a:xfrm>
           <a:prstGeom prst="rect">
@@ -2001,7 +2462,7 @@
               <a:buNone/>
             </a:pPr>
             <a:r>
-              <a:rPr lang="en-US" sz="1100" spc="300" kern="0" dirty="0">
+              <a:rPr lang="en-US" sz="1300" spc="300" kern="0" dirty="0">
                 <a:solidFill>
                   <a:srgbClr val="A68430"/>
                 </a:solidFill>
@@ -2011,13 +2472,13 @@
               </a:rPr>
               <a:t>WHERE THIS GOES NEXT</a:t>
             </a:r>
-            <a:endParaRPr lang="en-US" sz="1100" dirty="0"/>
-          </a:p>
-        </p:txBody>
-      </p:sp>
-      <p:sp>
-        <p:nvSpPr>
-          <p:cNvPr id="3" name="Text 1"/>
+            <a:endParaRPr lang="en-US" sz="1300" dirty="0"/>
+          </a:p>
+        </p:txBody>
+      </p:sp>
+      <p:sp>
+        <p:nvSpPr>
+          <p:cNvPr id="4" name="Text 1"/>
           <p:cNvSpPr txBox="1"/>
           <p:nvPr/>
         </p:nvSpPr>
@@ -2056,7 +2517,7 @@
       </p:sp>
       <p:sp>
         <p:nvSpPr>
-          <p:cNvPr id="4" name="Text 2"/>
+          <p:cNvPr id="5" name="Text 2"/>
           <p:cNvSpPr txBox="1"/>
           <p:nvPr/>
         </p:nvSpPr>
@@ -2082,7 +2543,7 @@
               <a:buNone/>
             </a:pPr>
             <a:r>
-              <a:rPr lang="en-US" sz="1400" dirty="0">
+              <a:rPr lang="en-US" sz="1600" dirty="0">
                 <a:solidFill>
                   <a:srgbClr val="5E6976"/>
                 </a:solidFill>
@@ -2092,13 +2553,13 @@
               </a:rPr>
               <a:t>The tone analysis already runs. Today it reads the twenty-eight written RM notes and produces the guidance below. Point the same pipeline at a consented meeting transcript and it reads the room instead.</a:t>
             </a:r>
-            <a:endParaRPr lang="en-US" sz="1400" dirty="0"/>
-          </a:p>
-        </p:txBody>
-      </p:sp>
-      <p:sp>
-        <p:nvSpPr>
-          <p:cNvPr id="5" name="Shape 3"/>
+            <a:endParaRPr lang="en-US" sz="1600" dirty="0"/>
+          </a:p>
+        </p:txBody>
+      </p:sp>
+      <p:sp>
+        <p:nvSpPr>
+          <p:cNvPr id="6" name="Shape 3"/>
           <p:cNvSpPr/>
           <p:nvPr/>
         </p:nvSpPr>
@@ -2125,7 +2586,7 @@
       </p:sp>
       <p:sp>
         <p:nvSpPr>
-          <p:cNvPr id="6" name="Text 4"/>
+          <p:cNvPr id="7" name="Text 4"/>
           <p:cNvSpPr txBox="1"/>
           <p:nvPr/>
         </p:nvSpPr>
@@ -2148,7 +2609,7 @@
               <a:buNone/>
             </a:pPr>
             <a:r>
-              <a:rPr lang="en-US" sz="1050" spc="200" kern="0" dirty="0">
+              <a:rPr lang="en-US" sz="1250" spc="200" kern="0" dirty="0">
                 <a:solidFill>
                   <a:srgbClr val="2C6A4F"/>
                 </a:solidFill>
@@ -2158,13 +2619,13 @@
               </a:rPr>
               <a:t>LIVE TODAY  ·  FROM WRITTEN NOTES</a:t>
             </a:r>
-            <a:endParaRPr lang="en-US" sz="1050" dirty="0"/>
-          </a:p>
-        </p:txBody>
-      </p:sp>
-      <p:sp>
-        <p:nvSpPr>
-          <p:cNvPr id="7" name="Text 5"/>
+            <a:endParaRPr lang="en-US" sz="1250" dirty="0"/>
+          </a:p>
+        </p:txBody>
+      </p:sp>
+      <p:sp>
+        <p:nvSpPr>
+          <p:cNvPr id="8" name="Text 5"/>
           <p:cNvSpPr txBox="1"/>
           <p:nvPr/>
         </p:nvSpPr>
@@ -2190,7 +2651,7 @@
               <a:buNone/>
             </a:pPr>
             <a:r>
-              <a:rPr lang="en-US" sz="1350" i="1" dirty="0">
+              <a:rPr lang="en-US" sz="1500" i="1" dirty="0">
                 <a:solidFill>
                   <a:srgbClr val="141E55"/>
                 </a:solidFill>
@@ -2200,13 +2661,13 @@
               </a:rPr>
               <a:t>“Speak with respect for his entrepreneurial conviction but be direct and grounded in numbers, gently challenging the concentration risk without dismissing his market view.”</a:t>
             </a:r>
-            <a:endParaRPr lang="en-US" sz="1350" dirty="0"/>
-          </a:p>
-        </p:txBody>
-      </p:sp>
-      <p:sp>
-        <p:nvSpPr>
-          <p:cNvPr id="8" name="Shape 6"/>
+            <a:endParaRPr lang="en-US" sz="1500" dirty="0"/>
+          </a:p>
+        </p:txBody>
+      </p:sp>
+      <p:sp>
+        <p:nvSpPr>
+          <p:cNvPr id="9" name="Shape 6"/>
           <p:cNvSpPr/>
           <p:nvPr/>
         </p:nvSpPr>
@@ -2233,7 +2694,7 @@
       </p:sp>
       <p:sp>
         <p:nvSpPr>
-          <p:cNvPr id="9" name="Text 7"/>
+          <p:cNvPr id="10" name="Text 7"/>
           <p:cNvSpPr txBox="1"/>
           <p:nvPr/>
         </p:nvSpPr>
@@ -2256,7 +2717,7 @@
               <a:buNone/>
             </a:pPr>
             <a:r>
-              <a:rPr lang="en-US" sz="1050" spc="200" kern="0" dirty="0">
+              <a:rPr lang="en-US" sz="1250" spc="200" kern="0" dirty="0">
                 <a:solidFill>
                   <a:srgbClr val="A68430"/>
                 </a:solidFill>
@@ -2266,13 +2727,13 @@
               </a:rPr>
               <a:t>NEXT  ·  FROM A CONSENTED TRANSCRIPT</a:t>
             </a:r>
-            <a:endParaRPr lang="en-US" sz="1050" dirty="0"/>
-          </a:p>
-        </p:txBody>
-      </p:sp>
-      <p:sp>
-        <p:nvSpPr>
-          <p:cNvPr id="10" name="Text 8"/>
+            <a:endParaRPr lang="en-US" sz="1250" dirty="0"/>
+          </a:p>
+        </p:txBody>
+      </p:sp>
+      <p:sp>
+        <p:nvSpPr>
+          <p:cNvPr id="11" name="Text 8"/>
           <p:cNvSpPr txBox="1"/>
           <p:nvPr/>
         </p:nvSpPr>
@@ -2375,16 +2836,127 @@
           </a:p>
         </p:txBody>
       </p:sp>
-      <p:sp>
-        <p:nvSpPr>
-          <p:cNvPr id="11" name="Text 9"/>
-          <p:cNvSpPr txBox="1"/>
-          <p:nvPr/>
-        </p:nvSpPr>
-        <p:spPr>
-          <a:xfrm>
-            <a:off x="640080" y="5120640"/>
-            <a:ext cx="10881360" cy="640080"/>
+      <p:pic>
+        <p:nvPicPr>
+          <p:cNvPr id="12" name="Image 1" descr="screens/c-recorder.png">    </p:cNvPr>
+          <p:cNvPicPr>
+            <a:picLocks noChangeAspect="1"/>
+          </p:cNvPicPr>
+          <p:nvPr/>
+        </p:nvPicPr>
+        <p:blipFill>
+          <a:blip r:embed="rId2"/>
+          <a:stretch>
+            <a:fillRect/>
+          </a:stretch>
+        </p:blipFill>
+        <p:spPr>
+          <a:xfrm>
+            <a:off x="1234440" y="4983480"/>
+            <a:ext cx="969264" cy="1225296"/>
+          </a:xfrm>
+          <a:prstGeom prst="rect">
+            <a:avLst/>
+          </a:prstGeom>
+        </p:spPr>
+      </p:pic>
+      <p:pic>
+        <p:nvPicPr>
+          <p:cNvPr id="13" name="Image 2" descr="screens/c-recording.png">    </p:cNvPr>
+          <p:cNvPicPr>
+            <a:picLocks noChangeAspect="1"/>
+          </p:cNvPicPr>
+          <p:nvPr/>
+        </p:nvPicPr>
+        <p:blipFill>
+          <a:blip r:embed="rId3"/>
+          <a:stretch>
+            <a:fillRect/>
+          </a:stretch>
+        </p:blipFill>
+        <p:spPr>
+          <a:xfrm>
+            <a:off x="2377440" y="4983480"/>
+            <a:ext cx="850392" cy="1225296"/>
+          </a:xfrm>
+          <a:prstGeom prst="rect">
+            <a:avLst/>
+          </a:prstGeom>
+        </p:spPr>
+      </p:pic>
+      <p:pic>
+        <p:nvPicPr>
+          <p:cNvPr id="14" name="Image 3" descr="screens/c-recorder-saved.png">    </p:cNvPr>
+          <p:cNvPicPr>
+            <a:picLocks noChangeAspect="1"/>
+          </p:cNvPicPr>
+          <p:nvPr/>
+        </p:nvPicPr>
+        <p:blipFill>
+          <a:blip r:embed="rId4"/>
+          <a:stretch>
+            <a:fillRect/>
+          </a:stretch>
+        </p:blipFill>
+        <p:spPr>
+          <a:xfrm>
+            <a:off x="3401568" y="4983480"/>
+            <a:ext cx="850392" cy="1225296"/>
+          </a:xfrm>
+          <a:prstGeom prst="rect">
+            <a:avLst/>
+          </a:prstGeom>
+        </p:spPr>
+      </p:pic>
+      <p:sp>
+        <p:nvSpPr>
+          <p:cNvPr id="15" name="Text 9"/>
+          <p:cNvSpPr txBox="1"/>
+          <p:nvPr/>
+        </p:nvSpPr>
+        <p:spPr>
+          <a:xfrm>
+            <a:off x="1234440" y="6263640"/>
+            <a:ext cx="3017520" cy="274320"/>
+          </a:xfrm>
+          <a:prstGeom prst="rect">
+            <a:avLst/>
+          </a:prstGeom>
+          <a:noFill/>
+          <a:ln/>
+        </p:spPr>
+        <p:txBody>
+          <a:bodyPr wrap="square" lIns="0" tIns="0" rIns="0" bIns="0" rtlCol="0" anchor="ctr"/>
+          <a:lstStyle/>
+          <a:p>
+            <a:pPr algn="ctr" indent="0" marL="0">
+              <a:buNone/>
+            </a:pPr>
+            <a:r>
+              <a:rPr lang="en-US" sz="1100" spc="200" kern="0" dirty="0">
+                <a:solidFill>
+                  <a:srgbClr val="5E6976"/>
+                </a:solidFill>
+                <a:latin typeface="Calibri" pitchFamily="34" charset="0"/>
+                <a:ea typeface="Calibri" pitchFamily="34" charset="-122"/>
+                <a:cs typeface="Calibri" pitchFamily="34" charset="-120"/>
+              </a:rPr>
+              <a:t>consent  ·  capture  ·  filed</a:t>
+            </a:r>
+            <a:endParaRPr lang="en-US" sz="1100" dirty="0"/>
+          </a:p>
+        </p:txBody>
+      </p:sp>
+      <p:sp>
+        <p:nvSpPr>
+          <p:cNvPr id="16" name="Text 10"/>
+          <p:cNvSpPr txBox="1"/>
+          <p:nvPr/>
+        </p:nvSpPr>
+        <p:spPr>
+          <a:xfrm>
+            <a:off x="4846320" y="5120640"/>
+            <a:ext cx="6675120" cy="914400"/>
           </a:xfrm>
           <a:prstGeom prst="rect">
             <a:avLst/>
@@ -2398,12 +2970,12 @@
           <a:p>
             <a:pPr indent="0" marL="0">
               <a:lnSpc>
-                <a:spcPts val="2400"/>
+                <a:spcPts val="2800"/>
               </a:lnSpc>
               <a:buNone/>
             </a:pPr>
             <a:r>
-              <a:rPr lang="en-US" sz="1600" dirty="0">
+              <a:rPr lang="en-US" sz="1750" dirty="0">
                 <a:solidFill>
                   <a:srgbClr val="141E55"/>
                 </a:solidFill>
@@ -2411,15 +2983,35 @@
                 <a:ea typeface="Calibri" pitchFamily="34" charset="-122"/>
                 <a:cs typeface="Calibri" pitchFamily="34" charset="-120"/>
               </a:rPr>
-              <a:t>Every other tool summarises the meeting and files a note. Ours feeds what was said back into what may be said next.</a:t>
-            </a:r>
-            <a:endParaRPr lang="en-US" sz="1600" dirty="0"/>
-          </a:p>
-        </p:txBody>
-      </p:sp>
-      <p:sp>
-        <p:nvSpPr>
-          <p:cNvPr id="12" name="Text 10"/>
+              <a:t>Every other tool summarises the meeting and files a note.</a:t>
+            </a:r>
+            <a:endParaRPr lang="en-US" sz="1750" dirty="0"/>
+          </a:p>
+          <a:p>
+            <a:pPr indent="0" marL="0">
+              <a:lnSpc>
+                <a:spcPts val="2800"/>
+              </a:lnSpc>
+              <a:buNone/>
+            </a:pPr>
+            <a:r>
+              <a:rPr lang="en-US" sz="1750" dirty="0">
+                <a:solidFill>
+                  <a:srgbClr val="141E55"/>
+                </a:solidFill>
+                <a:latin typeface="Calibri" pitchFamily="34" charset="0"/>
+                <a:ea typeface="Calibri" pitchFamily="34" charset="-122"/>
+                <a:cs typeface="Calibri" pitchFamily="34" charset="-120"/>
+              </a:rPr>
+              <a:t>Ours feeds what was said back into what may be said next.</a:t>
+            </a:r>
+            <a:endParaRPr lang="en-US" sz="1750" dirty="0"/>
+          </a:p>
+        </p:txBody>
+      </p:sp>
+      <p:sp>
+        <p:nvSpPr>
+          <p:cNvPr id="17" name="Text 11"/>
           <p:cNvSpPr txBox="1"/>
           <p:nvPr/>
         </p:nvSpPr>
@@ -2442,7 +3034,7 @@
               <a:buNone/>
             </a:pPr>
             <a:r>
-              <a:rPr lang="en-US" sz="950" dirty="0">
+              <a:rPr lang="en-US" sz="1150" dirty="0">
                 <a:solidFill>
                   <a:srgbClr val="8B96A3"/>
                 </a:solidFill>
@@ -2452,7 +3044,7 @@
               </a:rPr>
               <a:t>No transcript exists in the supplied dataset, so none was fabricated — the analysis runs on the real notes instead</a:t>
             </a:r>
-            <a:endParaRPr lang="en-US" sz="950" dirty="0"/>
+            <a:endParaRPr lang="en-US" sz="1150" dirty="0"/>
           </a:p>
         </p:txBody>
       </p:sp>
@@ -2464,9 +3056,9 @@
 </p:sld>
 </file>
 
-<file path=ppt/slides/slide11.xml><?xml version="1.0" encoding="utf-8"?>
+<file path=ppt/slides/slide12.xml><?xml version="1.0" encoding="utf-8"?>
 <p:sld xmlns:a="http://schemas.openxmlformats.org/drawingml/2006/main" xmlns:r="http://schemas.openxmlformats.org/officeDocument/2006/relationships" xmlns:p="http://schemas.openxmlformats.org/presentationml/2006/main">
-  <p:cSld name="Slide 11">
+  <p:cSld name="Slide 12">
     <p:bg>
       <p:bgPr>
         <a:solidFill>
@@ -2513,7 +3105,7 @@
               <a:buNone/>
             </a:pPr>
             <a:r>
-              <a:rPr lang="en-US" sz="1100" spc="300" kern="0" dirty="0">
+              <a:rPr lang="en-US" sz="1300" spc="300" kern="0" dirty="0">
                 <a:solidFill>
                   <a:srgbClr val="C9A94A"/>
                 </a:solidFill>
@@ -2523,7 +3115,7 @@
               </a:rPr>
               <a:t>FORESIGHT RM</a:t>
             </a:r>
-            <a:endParaRPr lang="en-US" sz="1100" dirty="0"/>
+            <a:endParaRPr lang="en-US" sz="1300" dirty="0"/>
           </a:p>
         </p:txBody>
       </p:sp>
@@ -2734,7 +3326,7 @@
               <a:buNone/>
             </a:pPr>
             <a:r>
-              <a:rPr lang="en-US" sz="1300" dirty="0">
+              <a:rPr lang="en-US" sz="1450" dirty="0">
                 <a:solidFill>
                   <a:srgbClr val="7186D3"/>
                 </a:solidFill>
@@ -2744,7 +3336,7 @@
               </a:rPr>
               <a:t>github.com/jvvinoth/Foresight-RM</a:t>
             </a:r>
-            <a:endParaRPr lang="en-US" sz="1300" dirty="0"/>
+            <a:endParaRPr lang="en-US" sz="1450" dirty="0"/>
           </a:p>
         </p:txBody>
       </p:sp>
@@ -2805,7 +3397,7 @@
               <a:buNone/>
             </a:pPr>
             <a:r>
-              <a:rPr lang="en-US" sz="1100" spc="300" kern="0" dirty="0">
+              <a:rPr lang="en-US" sz="1300" spc="300" kern="0" dirty="0">
                 <a:solidFill>
                   <a:srgbClr val="A68430"/>
                 </a:solidFill>
@@ -2815,7 +3407,7 @@
               </a:rPr>
               <a:t>THE PROBLEM</a:t>
             </a:r>
-            <a:endParaRPr lang="en-US" sz="1100" dirty="0"/>
+            <a:endParaRPr lang="en-US" sz="1300" dirty="0"/>
           </a:p>
         </p:txBody>
       </p:sp>
@@ -2886,7 +3478,7 @@
               <a:buNone/>
             </a:pPr>
             <a:r>
-              <a:rPr lang="en-US" sz="1500" dirty="0">
+              <a:rPr lang="en-US" sz="1650" dirty="0">
                 <a:solidFill>
                   <a:srgbClr val="5E6976"/>
                 </a:solidFill>
@@ -2896,7 +3488,7 @@
               </a:rPr>
               <a:t>Lau Chi Ming holds an apartment, a share, a bond and a derivative.</a:t>
             </a:r>
-            <a:endParaRPr lang="en-US" sz="1500" dirty="0"/>
+            <a:endParaRPr lang="en-US" sz="1650" dirty="0"/>
           </a:p>
           <a:p>
             <a:pPr indent="0" marL="0">
@@ -2906,7 +3498,7 @@
               <a:buNone/>
             </a:pPr>
             <a:r>
-              <a:rPr lang="en-US" sz="1500" dirty="0">
+              <a:rPr lang="en-US" sz="1650" dirty="0">
                 <a:solidFill>
                   <a:srgbClr val="5E6976"/>
                 </a:solidFill>
@@ -2916,7 +3508,7 @@
               </a:rPr>
               <a:t>The bank shows six tidy rows. Nothing is flagged, because nothing </a:t>
             </a:r>
-            <a:endParaRPr lang="en-US" sz="1500" dirty="0"/>
+            <a:endParaRPr lang="en-US" sz="1650" dirty="0"/>
           </a:p>
           <a:p>
             <a:pPr indent="0" marL="0">
@@ -2926,7 +3518,7 @@
               <a:buNone/>
             </a:pPr>
             <a:r>
-              <a:rPr lang="en-US" sz="1500" dirty="0">
+              <a:rPr lang="en-US" sz="1650" dirty="0">
                 <a:solidFill>
                   <a:srgbClr val="5E6976"/>
                 </a:solidFill>
@@ -2936,7 +3528,7 @@
               </a:rPr>
               <a:t>individually breaks a rule.</a:t>
             </a:r>
-            <a:endParaRPr lang="en-US" sz="1500" dirty="0"/>
+            <a:endParaRPr lang="en-US" sz="1650" dirty="0"/>
           </a:p>
         </p:txBody>
       </p:sp>
@@ -2965,7 +3557,7 @@
               <a:buNone/>
             </a:pPr>
             <a:r>
-              <a:rPr lang="en-US" sz="1600" i="1" dirty="0">
+              <a:rPr lang="en-US" sz="1750" i="1" dirty="0">
                 <a:solidFill>
                   <a:srgbClr val="141E55"/>
                 </a:solidFill>
@@ -2975,7 +3567,7 @@
               </a:rPr>
               <a:t>This is what every wealth platform shows today.</a:t>
             </a:r>
-            <a:endParaRPr lang="en-US" sz="1600" dirty="0"/>
+            <a:endParaRPr lang="en-US" sz="1750" dirty="0"/>
           </a:p>
         </p:txBody>
       </p:sp>
@@ -3028,7 +3620,7 @@
               <a:buNone/>
             </a:pPr>
             <a:r>
-              <a:rPr lang="en-US" sz="950" dirty="0">
+              <a:rPr lang="en-US" sz="1150" dirty="0">
                 <a:solidFill>
                   <a:srgbClr val="8B96A3"/>
                 </a:solidFill>
@@ -3038,7 +3630,7 @@
               </a:rPr>
               <a:t>Screen: Client 360 → Exposure, before the reveal</a:t>
             </a:r>
-            <a:endParaRPr lang="en-US" sz="950" dirty="0"/>
+            <a:endParaRPr lang="en-US" sz="1150" dirty="0"/>
           </a:p>
         </p:txBody>
       </p:sp>
@@ -3099,7 +3691,7 @@
               <a:buNone/>
             </a:pPr>
             <a:r>
-              <a:rPr lang="en-US" sz="1100" spc="300" kern="0" dirty="0">
+              <a:rPr lang="en-US" sz="1300" spc="300" kern="0" dirty="0">
                 <a:solidFill>
                   <a:srgbClr val="C9A94A"/>
                 </a:solidFill>
@@ -3109,7 +3701,7 @@
               </a:rPr>
               <a:t>ONE CLICK LATER</a:t>
             </a:r>
-            <a:endParaRPr lang="en-US" sz="1100" dirty="0"/>
+            <a:endParaRPr lang="en-US" sz="1300" dirty="0"/>
           </a:p>
         </p:txBody>
       </p:sp>
@@ -3220,7 +3812,7 @@
               <a:buChar char="•"/>
             </a:pPr>
             <a:r>
-              <a:rPr lang="en-US" sz="1350" dirty="0">
+              <a:rPr lang="en-US" sz="1500" dirty="0">
                 <a:solidFill>
                   <a:srgbClr val="A3B1E5"/>
                 </a:solidFill>
@@ -3230,7 +3822,7 @@
               </a:rPr>
               <a:t>A structured product hid the exposure behind a wrapper.</a:t>
             </a:r>
-            <a:endParaRPr lang="en-US" sz="1350" dirty="0"/>
+            <a:endParaRPr lang="en-US" sz="1500" dirty="0"/>
           </a:p>
           <a:p>
             <a:pPr marL="342900" indent="-342900">
@@ -3241,7 +3833,7 @@
               <a:buChar char="•"/>
             </a:pPr>
             <a:r>
-              <a:rPr lang="en-US" sz="1350" dirty="0">
+              <a:rPr lang="en-US" sz="1500" dirty="0">
                 <a:solidFill>
                   <a:srgbClr val="A3B1E5"/>
                 </a:solidFill>
@@ -3251,7 +3843,7 @@
               </a:rPr>
               <a:t>His loan is secured on the same asset.</a:t>
             </a:r>
-            <a:endParaRPr lang="en-US" sz="1350" dirty="0"/>
+            <a:endParaRPr lang="en-US" sz="1500" dirty="0"/>
           </a:p>
           <a:p>
             <a:pPr marL="342900" indent="-342900">
@@ -3262,7 +3854,7 @@
               <a:buChar char="•"/>
             </a:pPr>
             <a:r>
-              <a:rPr lang="en-US" sz="1350" dirty="0">
+              <a:rPr lang="en-US" sz="1500" dirty="0">
                 <a:solidFill>
                   <a:srgbClr val="A3B1E5"/>
                 </a:solidFill>
@@ -3272,7 +3864,7 @@
               </a:rPr>
               <a:t>His career is Hong Kong property development.</a:t>
             </a:r>
-            <a:endParaRPr lang="en-US" sz="1350" dirty="0"/>
+            <a:endParaRPr lang="en-US" sz="1500" dirty="0"/>
           </a:p>
           <a:p>
             <a:pPr marL="342900" indent="-342900">
@@ -3283,7 +3875,7 @@
               <a:buChar char="•"/>
             </a:pPr>
             <a:r>
-              <a:rPr lang="en-US" sz="1350" dirty="0">
+              <a:rPr lang="en-US" sz="1500" dirty="0">
                 <a:solidFill>
                   <a:srgbClr val="A3B1E5"/>
                 </a:solidFill>
@@ -3293,7 +3885,7 @@
               </a:rPr>
               <a:t>He owes HKD 60m to a project in November.</a:t>
             </a:r>
-            <a:endParaRPr lang="en-US" sz="1350" dirty="0"/>
+            <a:endParaRPr lang="en-US" sz="1500" dirty="0"/>
           </a:p>
         </p:txBody>
       </p:sp>
@@ -3346,7 +3938,7 @@
               <a:buNone/>
             </a:pPr>
             <a:r>
-              <a:rPr lang="en-US" sz="1300" spc="100" kern="0" dirty="0">
+              <a:rPr lang="en-US" sz="1450" spc="100" kern="0" dirty="0">
                 <a:solidFill>
                   <a:srgbClr val="C9A94A"/>
                 </a:solidFill>
@@ -3356,7 +3948,7 @@
               </a:rPr>
               <a:t>Mandate limit for a single position: 10%</a:t>
             </a:r>
-            <a:endParaRPr lang="en-US" sz="1300" dirty="0"/>
+            <a:endParaRPr lang="en-US" sz="1450" dirty="0"/>
           </a:p>
         </p:txBody>
       </p:sp>
@@ -3417,7 +4009,7 @@
               <a:buNone/>
             </a:pPr>
             <a:r>
-              <a:rPr lang="en-US" sz="1100" spc="300" kern="0" dirty="0">
+              <a:rPr lang="en-US" sz="1300" spc="300" kern="0" dirty="0">
                 <a:solidFill>
                   <a:srgbClr val="A68430"/>
                 </a:solidFill>
@@ -3427,7 +4019,7 @@
               </a:rPr>
               <a:t>WHY NOBODY SAW IT</a:t>
             </a:r>
-            <a:endParaRPr lang="en-US" sz="1100" dirty="0"/>
+            <a:endParaRPr lang="en-US" sz="1300" dirty="0"/>
           </a:p>
         </p:txBody>
       </p:sp>
@@ -3479,11 +4071,11 @@
         <p:spPr>
           <a:xfrm>
             <a:off x="640080" y="1920240"/>
-            <a:ext cx="3429000" cy="1600200"/>
+            <a:ext cx="3429000" cy="1737360"/>
           </a:xfrm>
           <a:prstGeom prst="roundRect">
             <a:avLst>
-              <a:gd name="adj" fmla="val 3429"/>
+              <a:gd name="adj" fmla="val 3158"/>
             </a:avLst>
           </a:prstGeom>
           <a:solidFill>
@@ -3497,32 +4089,56 @@
           </a:ln>
         </p:spPr>
       </p:sp>
-      <p:sp>
-        <p:nvSpPr>
-          <p:cNvPr id="5" name="Text 3"/>
-          <p:cNvSpPr txBox="1"/>
-          <p:nvPr/>
-        </p:nvSpPr>
-        <p:spPr>
-          <a:xfrm>
-            <a:off x="896112" y="2121408"/>
-            <a:ext cx="2926080" cy="274320"/>
-          </a:xfrm>
-          <a:prstGeom prst="rect">
-            <a:avLst/>
-          </a:prstGeom>
-          <a:noFill/>
-          <a:ln/>
-        </p:spPr>
-        <p:txBody>
-          <a:bodyPr wrap="square" lIns="0" tIns="0" rIns="0" bIns="0" rtlCol="0" anchor="ctr"/>
-          <a:lstStyle/>
-          <a:p>
-            <a:pPr indent="0" marL="0">
-              <a:buNone/>
-            </a:pPr>
-            <a:r>
-              <a:rPr lang="en-US" sz="1050" spc="200" kern="0" dirty="0">
+      <p:pic>
+        <p:nvPicPr>
+          <p:cNvPr id="5" name="Image 0" descr="icons/exposure-navy.png">    </p:cNvPr>
+          <p:cNvPicPr>
+            <a:picLocks noChangeAspect="1"/>
+          </p:cNvPicPr>
+          <p:nvPr/>
+        </p:nvPicPr>
+        <p:blipFill>
+          <a:blip r:embed="rId1"/>
+          <a:stretch>
+            <a:fillRect/>
+          </a:stretch>
+        </p:blipFill>
+        <p:spPr>
+          <a:xfrm>
+            <a:off x="896112" y="2103120"/>
+            <a:ext cx="274320" cy="274320"/>
+          </a:xfrm>
+          <a:prstGeom prst="rect">
+            <a:avLst/>
+          </a:prstGeom>
+        </p:spPr>
+      </p:pic>
+      <p:sp>
+        <p:nvSpPr>
+          <p:cNvPr id="6" name="Text 3"/>
+          <p:cNvSpPr txBox="1"/>
+          <p:nvPr/>
+        </p:nvSpPr>
+        <p:spPr>
+          <a:xfrm>
+            <a:off x="1280160" y="2139696"/>
+            <a:ext cx="2560320" cy="274320"/>
+          </a:xfrm>
+          <a:prstGeom prst="rect">
+            <a:avLst/>
+          </a:prstGeom>
+          <a:noFill/>
+          <a:ln/>
+        </p:spPr>
+        <p:txBody>
+          <a:bodyPr wrap="square" lIns="0" tIns="0" rIns="0" bIns="0" rtlCol="0" anchor="ctr"/>
+          <a:lstStyle/>
+          <a:p>
+            <a:pPr indent="0" marL="0">
+              <a:buNone/>
+            </a:pPr>
+            <a:r>
+              <a:rPr lang="en-US" sz="1250" spc="200" kern="0" dirty="0">
                 <a:solidFill>
                   <a:srgbClr val="5E6976"/>
                 </a:solidFill>
@@ -3532,19 +4148,19 @@
               </a:rPr>
               <a:t>PORTFOLIO SYSTEM</a:t>
             </a:r>
-            <a:endParaRPr lang="en-US" sz="1050" dirty="0"/>
-          </a:p>
-        </p:txBody>
-      </p:sp>
-      <p:sp>
-        <p:nvSpPr>
-          <p:cNvPr id="6" name="Text 4"/>
-          <p:cNvSpPr txBox="1"/>
-          <p:nvPr/>
-        </p:nvSpPr>
-        <p:spPr>
-          <a:xfrm>
-            <a:off x="896112" y="2487168"/>
+            <a:endParaRPr lang="en-US" sz="1250" dirty="0"/>
+          </a:p>
+        </p:txBody>
+      </p:sp>
+      <p:sp>
+        <p:nvSpPr>
+          <p:cNvPr id="7" name="Text 4"/>
+          <p:cNvSpPr txBox="1"/>
+          <p:nvPr/>
+        </p:nvSpPr>
+        <p:spPr>
+          <a:xfrm>
+            <a:off x="896112" y="2578608"/>
             <a:ext cx="2926080" cy="365760"/>
           </a:xfrm>
           <a:prstGeom prst="rect">
@@ -3561,7 +4177,7 @@
               <a:buNone/>
             </a:pPr>
             <a:r>
-              <a:rPr lang="en-US" sz="1400" dirty="0">
+              <a:rPr lang="en-US" sz="1600" dirty="0">
                 <a:solidFill>
                   <a:srgbClr val="141E55"/>
                 </a:solidFill>
@@ -3571,19 +4187,19 @@
               </a:rPr>
               <a:t>Six separate holdings</a:t>
             </a:r>
-            <a:endParaRPr lang="en-US" sz="1400" dirty="0"/>
-          </a:p>
-        </p:txBody>
-      </p:sp>
-      <p:sp>
-        <p:nvSpPr>
-          <p:cNvPr id="7" name="Text 5"/>
-          <p:cNvSpPr txBox="1"/>
-          <p:nvPr/>
-        </p:nvSpPr>
-        <p:spPr>
-          <a:xfrm>
-            <a:off x="896112" y="2962656"/>
+            <a:endParaRPr lang="en-US" sz="1600" dirty="0"/>
+          </a:p>
+        </p:txBody>
+      </p:sp>
+      <p:sp>
+        <p:nvSpPr>
+          <p:cNvPr id="8" name="Text 5"/>
+          <p:cNvSpPr txBox="1"/>
+          <p:nvPr/>
+        </p:nvSpPr>
+        <p:spPr>
+          <a:xfrm>
+            <a:off x="896112" y="3072384"/>
             <a:ext cx="2926080" cy="365760"/>
           </a:xfrm>
           <a:prstGeom prst="rect">
@@ -3600,7 +4216,7 @@
               <a:buNone/>
             </a:pPr>
             <a:r>
-              <a:rPr lang="en-US" sz="1400" i="1" dirty="0">
+              <a:rPr lang="en-US" sz="1600" i="1" dirty="0">
                 <a:solidFill>
                   <a:srgbClr val="2C6A4F"/>
                 </a:solidFill>
@@ -3610,24 +4226,24 @@
               </a:rPr>
               <a:t>“All fine”</a:t>
             </a:r>
-            <a:endParaRPr lang="en-US" sz="1400" dirty="0"/>
-          </a:p>
-        </p:txBody>
-      </p:sp>
-      <p:sp>
-        <p:nvSpPr>
-          <p:cNvPr id="8" name="Shape 6"/>
+            <a:endParaRPr lang="en-US" sz="1600" dirty="0"/>
+          </a:p>
+        </p:txBody>
+      </p:sp>
+      <p:sp>
+        <p:nvSpPr>
+          <p:cNvPr id="9" name="Shape 6"/>
           <p:cNvSpPr/>
           <p:nvPr/>
         </p:nvSpPr>
         <p:spPr>
           <a:xfrm>
             <a:off x="4343400" y="1920240"/>
-            <a:ext cx="3429000" cy="1600200"/>
+            <a:ext cx="3429000" cy="1737360"/>
           </a:xfrm>
           <a:prstGeom prst="roundRect">
             <a:avLst>
-              <a:gd name="adj" fmla="val 3429"/>
+              <a:gd name="adj" fmla="val 3158"/>
             </a:avLst>
           </a:prstGeom>
           <a:solidFill>
@@ -3641,32 +4257,56 @@
           </a:ln>
         </p:spPr>
       </p:sp>
-      <p:sp>
-        <p:nvSpPr>
-          <p:cNvPr id="9" name="Text 7"/>
-          <p:cNvSpPr txBox="1"/>
-          <p:nvPr/>
-        </p:nvSpPr>
-        <p:spPr>
-          <a:xfrm>
-            <a:off x="4599432" y="2121408"/>
-            <a:ext cx="2926080" cy="274320"/>
-          </a:xfrm>
-          <a:prstGeom prst="rect">
-            <a:avLst/>
-          </a:prstGeom>
-          <a:noFill/>
-          <a:ln/>
-        </p:spPr>
-        <p:txBody>
-          <a:bodyPr wrap="square" lIns="0" tIns="0" rIns="0" bIns="0" rtlCol="0" anchor="ctr"/>
-          <a:lstStyle/>
-          <a:p>
-            <a:pPr indent="0" marL="0">
-              <a:buNone/>
-            </a:pPr>
-            <a:r>
-              <a:rPr lang="en-US" sz="1050" spc="200" kern="0" dirty="0">
+      <p:pic>
+        <p:nvPicPr>
+          <p:cNvPr id="10" name="Image 1" descr="icons/lock-navy.png">    </p:cNvPr>
+          <p:cNvPicPr>
+            <a:picLocks noChangeAspect="1"/>
+          </p:cNvPicPr>
+          <p:nvPr/>
+        </p:nvPicPr>
+        <p:blipFill>
+          <a:blip r:embed="rId2"/>
+          <a:stretch>
+            <a:fillRect/>
+          </a:stretch>
+        </p:blipFill>
+        <p:spPr>
+          <a:xfrm>
+            <a:off x="4599432" y="2103120"/>
+            <a:ext cx="274320" cy="274320"/>
+          </a:xfrm>
+          <a:prstGeom prst="rect">
+            <a:avLst/>
+          </a:prstGeom>
+        </p:spPr>
+      </p:pic>
+      <p:sp>
+        <p:nvSpPr>
+          <p:cNvPr id="11" name="Text 7"/>
+          <p:cNvSpPr txBox="1"/>
+          <p:nvPr/>
+        </p:nvSpPr>
+        <p:spPr>
+          <a:xfrm>
+            <a:off x="4983480" y="2139696"/>
+            <a:ext cx="2560320" cy="274320"/>
+          </a:xfrm>
+          <a:prstGeom prst="rect">
+            <a:avLst/>
+          </a:prstGeom>
+          <a:noFill/>
+          <a:ln/>
+        </p:spPr>
+        <p:txBody>
+          <a:bodyPr wrap="square" lIns="0" tIns="0" rIns="0" bIns="0" rtlCol="0" anchor="ctr"/>
+          <a:lstStyle/>
+          <a:p>
+            <a:pPr indent="0" marL="0">
+              <a:buNone/>
+            </a:pPr>
+            <a:r>
+              <a:rPr lang="en-US" sz="1250" spc="200" kern="0" dirty="0">
                 <a:solidFill>
                   <a:srgbClr val="5E6976"/>
                 </a:solidFill>
@@ -3676,19 +4316,19 @@
               </a:rPr>
               <a:t>CREDIT SYSTEM</a:t>
             </a:r>
-            <a:endParaRPr lang="en-US" sz="1050" dirty="0"/>
-          </a:p>
-        </p:txBody>
-      </p:sp>
-      <p:sp>
-        <p:nvSpPr>
-          <p:cNvPr id="10" name="Text 8"/>
-          <p:cNvSpPr txBox="1"/>
-          <p:nvPr/>
-        </p:nvSpPr>
-        <p:spPr>
-          <a:xfrm>
-            <a:off x="4599432" y="2487168"/>
+            <a:endParaRPr lang="en-US" sz="1250" dirty="0"/>
+          </a:p>
+        </p:txBody>
+      </p:sp>
+      <p:sp>
+        <p:nvSpPr>
+          <p:cNvPr id="12" name="Text 8"/>
+          <p:cNvSpPr txBox="1"/>
+          <p:nvPr/>
+        </p:nvSpPr>
+        <p:spPr>
+          <a:xfrm>
+            <a:off x="4599432" y="2578608"/>
             <a:ext cx="2926080" cy="365760"/>
           </a:xfrm>
           <a:prstGeom prst="rect">
@@ -3705,7 +4345,7 @@
               <a:buNone/>
             </a:pPr>
             <a:r>
-              <a:rPr lang="en-US" sz="1400" dirty="0">
+              <a:rPr lang="en-US" sz="1600" dirty="0">
                 <a:solidFill>
                   <a:srgbClr val="141E55"/>
                 </a:solidFill>
@@ -3715,19 +4355,19 @@
               </a:rPr>
               <a:t>One loan, well covered</a:t>
             </a:r>
-            <a:endParaRPr lang="en-US" sz="1400" dirty="0"/>
-          </a:p>
-        </p:txBody>
-      </p:sp>
-      <p:sp>
-        <p:nvSpPr>
-          <p:cNvPr id="11" name="Text 9"/>
-          <p:cNvSpPr txBox="1"/>
-          <p:nvPr/>
-        </p:nvSpPr>
-        <p:spPr>
-          <a:xfrm>
-            <a:off x="4599432" y="2962656"/>
+            <a:endParaRPr lang="en-US" sz="1600" dirty="0"/>
+          </a:p>
+        </p:txBody>
+      </p:sp>
+      <p:sp>
+        <p:nvSpPr>
+          <p:cNvPr id="13" name="Text 9"/>
+          <p:cNvSpPr txBox="1"/>
+          <p:nvPr/>
+        </p:nvSpPr>
+        <p:spPr>
+          <a:xfrm>
+            <a:off x="4599432" y="3072384"/>
             <a:ext cx="2926080" cy="365760"/>
           </a:xfrm>
           <a:prstGeom prst="rect">
@@ -3744,7 +4384,7 @@
               <a:buNone/>
             </a:pPr>
             <a:r>
-              <a:rPr lang="en-US" sz="1400" i="1" dirty="0">
+              <a:rPr lang="en-US" sz="1600" i="1" dirty="0">
                 <a:solidFill>
                   <a:srgbClr val="2C6A4F"/>
                 </a:solidFill>
@@ -3754,24 +4394,24 @@
               </a:rPr>
               <a:t>“All fine”</a:t>
             </a:r>
-            <a:endParaRPr lang="en-US" sz="1400" dirty="0"/>
-          </a:p>
-        </p:txBody>
-      </p:sp>
-      <p:sp>
-        <p:nvSpPr>
-          <p:cNvPr id="12" name="Shape 10"/>
+            <a:endParaRPr lang="en-US" sz="1600" dirty="0"/>
+          </a:p>
+        </p:txBody>
+      </p:sp>
+      <p:sp>
+        <p:nvSpPr>
+          <p:cNvPr id="14" name="Shape 10"/>
           <p:cNvSpPr/>
           <p:nvPr/>
         </p:nvSpPr>
         <p:spPr>
           <a:xfrm>
             <a:off x="8046720" y="1920240"/>
-            <a:ext cx="3429000" cy="1600200"/>
+            <a:ext cx="3429000" cy="1737360"/>
           </a:xfrm>
           <a:prstGeom prst="roundRect">
             <a:avLst>
-              <a:gd name="adj" fmla="val 3429"/>
+              <a:gd name="adj" fmla="val 3158"/>
             </a:avLst>
           </a:prstGeom>
           <a:solidFill>
@@ -3785,32 +4425,56 @@
           </a:ln>
         </p:spPr>
       </p:sp>
-      <p:sp>
-        <p:nvSpPr>
-          <p:cNvPr id="13" name="Text 11"/>
-          <p:cNvSpPr txBox="1"/>
-          <p:nvPr/>
-        </p:nvSpPr>
-        <p:spPr>
-          <a:xfrm>
-            <a:off x="8302752" y="2121408"/>
-            <a:ext cx="2926080" cy="274320"/>
-          </a:xfrm>
-          <a:prstGeom prst="rect">
-            <a:avLst/>
-          </a:prstGeom>
-          <a:noFill/>
-          <a:ln/>
-        </p:spPr>
-        <p:txBody>
-          <a:bodyPr wrap="square" lIns="0" tIns="0" rIns="0" bIns="0" rtlCol="0" anchor="ctr"/>
-          <a:lstStyle/>
-          <a:p>
-            <a:pPr indent="0" marL="0">
-              <a:buNone/>
-            </a:pPr>
-            <a:r>
-              <a:rPr lang="en-US" sz="1050" spc="200" kern="0" dirty="0">
+      <p:pic>
+        <p:nvPicPr>
+          <p:cNvPr id="15" name="Image 2" descr="icons/clock-gold.png">    </p:cNvPr>
+          <p:cNvPicPr>
+            <a:picLocks noChangeAspect="1"/>
+          </p:cNvPicPr>
+          <p:nvPr/>
+        </p:nvPicPr>
+        <p:blipFill>
+          <a:blip r:embed="rId3"/>
+          <a:stretch>
+            <a:fillRect/>
+          </a:stretch>
+        </p:blipFill>
+        <p:spPr>
+          <a:xfrm>
+            <a:off x="8302752" y="2103120"/>
+            <a:ext cx="274320" cy="274320"/>
+          </a:xfrm>
+          <a:prstGeom prst="rect">
+            <a:avLst/>
+          </a:prstGeom>
+        </p:spPr>
+      </p:pic>
+      <p:sp>
+        <p:nvSpPr>
+          <p:cNvPr id="16" name="Text 11"/>
+          <p:cNvSpPr txBox="1"/>
+          <p:nvPr/>
+        </p:nvSpPr>
+        <p:spPr>
+          <a:xfrm>
+            <a:off x="8686800" y="2139696"/>
+            <a:ext cx="2560320" cy="274320"/>
+          </a:xfrm>
+          <a:prstGeom prst="rect">
+            <a:avLst/>
+          </a:prstGeom>
+          <a:noFill/>
+          <a:ln/>
+        </p:spPr>
+        <p:txBody>
+          <a:bodyPr wrap="square" lIns="0" tIns="0" rIns="0" bIns="0" rtlCol="0" anchor="ctr"/>
+          <a:lstStyle/>
+          <a:p>
+            <a:pPr indent="0" marL="0">
+              <a:buNone/>
+            </a:pPr>
+            <a:r>
+              <a:rPr lang="en-US" sz="1250" spc="200" kern="0" dirty="0">
                 <a:solidFill>
                   <a:srgbClr val="5E6976"/>
                 </a:solidFill>
@@ -3820,19 +4484,19 @@
               </a:rPr>
               <a:t>CRM NOTES</a:t>
             </a:r>
-            <a:endParaRPr lang="en-US" sz="1050" dirty="0"/>
-          </a:p>
-        </p:txBody>
-      </p:sp>
-      <p:sp>
-        <p:nvSpPr>
-          <p:cNvPr id="14" name="Text 12"/>
-          <p:cNvSpPr txBox="1"/>
-          <p:nvPr/>
-        </p:nvSpPr>
-        <p:spPr>
-          <a:xfrm>
-            <a:off x="8302752" y="2487168"/>
+            <a:endParaRPr lang="en-US" sz="1250" dirty="0"/>
+          </a:p>
+        </p:txBody>
+      </p:sp>
+      <p:sp>
+        <p:nvSpPr>
+          <p:cNvPr id="17" name="Text 12"/>
+          <p:cNvSpPr txBox="1"/>
+          <p:nvPr/>
+        </p:nvSpPr>
+        <p:spPr>
+          <a:xfrm>
+            <a:off x="8302752" y="2578608"/>
             <a:ext cx="2926080" cy="365760"/>
           </a:xfrm>
           <a:prstGeom prst="rect">
@@ -3849,7 +4513,7 @@
               <a:buNone/>
             </a:pPr>
             <a:r>
-              <a:rPr lang="en-US" sz="1400" dirty="0">
+              <a:rPr lang="en-US" sz="1600" dirty="0">
                 <a:solidFill>
                   <a:srgbClr val="141E55"/>
                 </a:solidFill>
@@ -3859,19 +4523,19 @@
               </a:rPr>
               <a:t>A note nobody queries</a:t>
             </a:r>
-            <a:endParaRPr lang="en-US" sz="1400" dirty="0"/>
-          </a:p>
-        </p:txBody>
-      </p:sp>
-      <p:sp>
-        <p:nvSpPr>
-          <p:cNvPr id="15" name="Text 13"/>
-          <p:cNvSpPr txBox="1"/>
-          <p:nvPr/>
-        </p:nvSpPr>
-        <p:spPr>
-          <a:xfrm>
-            <a:off x="8302752" y="2962656"/>
+            <a:endParaRPr lang="en-US" sz="1600" dirty="0"/>
+          </a:p>
+        </p:txBody>
+      </p:sp>
+      <p:sp>
+        <p:nvSpPr>
+          <p:cNvPr id="18" name="Text 13"/>
+          <p:cNvSpPr txBox="1"/>
+          <p:nvPr/>
+        </p:nvSpPr>
+        <p:spPr>
+          <a:xfrm>
+            <a:off x="8302752" y="3072384"/>
             <a:ext cx="2926080" cy="365760"/>
           </a:xfrm>
           <a:prstGeom prst="rect">
@@ -3888,7 +4552,7 @@
               <a:buNone/>
             </a:pPr>
             <a:r>
-              <a:rPr lang="en-US" sz="1400" i="1" dirty="0">
+              <a:rPr lang="en-US" sz="1600" i="1" dirty="0">
                 <a:solidFill>
                   <a:srgbClr val="A8322B"/>
                 </a:solidFill>
@@ -3898,13 +4562,13 @@
               </a:rPr>
               <a:t>never read</a:t>
             </a:r>
-            <a:endParaRPr lang="en-US" sz="1400" dirty="0"/>
-          </a:p>
-        </p:txBody>
-      </p:sp>
-      <p:sp>
-        <p:nvSpPr>
-          <p:cNvPr id="16" name="Shape 14"/>
+            <a:endParaRPr lang="en-US" sz="1600" dirty="0"/>
+          </a:p>
+        </p:txBody>
+      </p:sp>
+      <p:sp>
+        <p:nvSpPr>
+          <p:cNvPr id="19" name="Shape 14"/>
           <p:cNvSpPr/>
           <p:nvPr/>
         </p:nvSpPr>
@@ -3931,7 +4595,7 @@
       </p:sp>
       <p:sp>
         <p:nvSpPr>
-          <p:cNvPr id="17" name="Text 15"/>
+          <p:cNvPr id="20" name="Text 15"/>
           <p:cNvSpPr txBox="1"/>
           <p:nvPr/>
         </p:nvSpPr>
@@ -3954,7 +4618,7 @@
               <a:buNone/>
             </a:pPr>
             <a:r>
-              <a:rPr lang="en-US" sz="1400" spc="150" kern="0" dirty="0">
+              <a:rPr lang="en-US" sz="1600" spc="150" kern="0" dirty="0">
                 <a:solidFill>
                   <a:srgbClr val="A68430"/>
                 </a:solidFill>
@@ -3964,13 +4628,13 @@
               </a:rPr>
               <a:t>And the Relationship Manager had already worked it out.</a:t>
             </a:r>
-            <a:endParaRPr lang="en-US" sz="1400" dirty="0"/>
-          </a:p>
-        </p:txBody>
-      </p:sp>
-      <p:sp>
-        <p:nvSpPr>
-          <p:cNvPr id="18" name="Text 16"/>
+            <a:endParaRPr lang="en-US" sz="1600" dirty="0"/>
+          </a:p>
+        </p:txBody>
+      </p:sp>
+      <p:sp>
+        <p:nvSpPr>
+          <p:cNvPr id="21" name="Text 16"/>
           <p:cNvSpPr txBox="1"/>
           <p:nvPr/>
         </p:nvSpPr>
@@ -4032,7 +4696,7 @@
       </p:sp>
       <p:sp>
         <p:nvSpPr>
-          <p:cNvPr id="19" name="Text 17"/>
+          <p:cNvPr id="22" name="Text 17"/>
           <p:cNvSpPr txBox="1"/>
           <p:nvPr/>
         </p:nvSpPr>
@@ -4055,7 +4719,7 @@
               <a:buNone/>
             </a:pPr>
             <a:r>
-              <a:rPr lang="en-US" sz="1100" dirty="0">
+              <a:rPr lang="en-US" sz="1300" dirty="0">
                 <a:solidFill>
                   <a:srgbClr val="5E6976"/>
                 </a:solidFill>
@@ -4065,7 +4729,7 @@
               </a:rPr>
               <a:t>rm_notes.json · N-018 · 5 March 2026 · P. Ong    —    typed, filed, and never read against the numbers</a:t>
             </a:r>
-            <a:endParaRPr lang="en-US" sz="1100" dirty="0"/>
+            <a:endParaRPr lang="en-US" sz="1300" dirty="0"/>
           </a:p>
         </p:txBody>
       </p:sp>
@@ -4126,7 +4790,7 @@
               <a:buNone/>
             </a:pPr>
             <a:r>
-              <a:rPr lang="en-US" sz="1100" spc="300" kern="0" dirty="0">
+              <a:rPr lang="en-US" sz="1300" spc="300" kern="0" dirty="0">
                 <a:solidFill>
                   <a:srgbClr val="A68430"/>
                 </a:solidFill>
@@ -4136,7 +4800,7 @@
               </a:rPr>
               <a:t>WHAT WE BUILT</a:t>
             </a:r>
-            <a:endParaRPr lang="en-US" sz="1100" dirty="0"/>
+            <a:endParaRPr lang="en-US" sz="1300" dirty="0"/>
           </a:p>
         </p:txBody>
       </p:sp>
@@ -4195,7 +4859,7 @@
         </p:blipFill>
         <p:spPr>
           <a:xfrm>
-            <a:off x="640080" y="1828800"/>
+            <a:off x="640080" y="1874520"/>
             <a:ext cx="10881360" cy="2569464"/>
           </a:xfrm>
           <a:prstGeom prst="rect">
@@ -4205,30 +4869,74 @@
       </p:pic>
       <p:sp>
         <p:nvSpPr>
-          <p:cNvPr id="5" name="Text 2"/>
-          <p:cNvSpPr txBox="1"/>
-          <p:nvPr/>
-        </p:nvSpPr>
-        <p:spPr>
-          <a:xfrm>
-            <a:off x="640080" y="4663440"/>
-            <a:ext cx="1737360" cy="228600"/>
-          </a:xfrm>
-          <a:prstGeom prst="rect">
-            <a:avLst/>
-          </a:prstGeom>
-          <a:noFill/>
-          <a:ln/>
-        </p:spPr>
-        <p:txBody>
-          <a:bodyPr wrap="square" lIns="0" tIns="0" rIns="0" bIns="0" rtlCol="0" anchor="ctr"/>
-          <a:lstStyle/>
-          <a:p>
-            <a:pPr indent="0" marL="0">
-              <a:buNone/>
-            </a:pPr>
-            <a:r>
-              <a:rPr lang="en-US" sz="950" spc="100" kern="0" dirty="0">
+          <p:cNvPr id="5" name="Shape 2"/>
+          <p:cNvSpPr/>
+          <p:nvPr/>
+        </p:nvSpPr>
+        <p:spPr>
+          <a:xfrm>
+            <a:off x="640080" y="4617720"/>
+            <a:ext cx="475488" cy="475488"/>
+          </a:xfrm>
+          <a:prstGeom prst="ellipse">
+            <a:avLst/>
+          </a:prstGeom>
+          <a:solidFill>
+            <a:srgbClr val="E6EBF9"/>
+          </a:solidFill>
+          <a:ln/>
+        </p:spPr>
+      </p:sp>
+      <p:pic>
+        <p:nvPicPr>
+          <p:cNvPr id="6" name="Image 1" descr="icons/monitor-navy.png">    </p:cNvPr>
+          <p:cNvPicPr>
+            <a:picLocks noChangeAspect="1"/>
+          </p:cNvPicPr>
+          <p:nvPr/>
+        </p:nvPicPr>
+        <p:blipFill>
+          <a:blip r:embed="rId2"/>
+          <a:stretch>
+            <a:fillRect/>
+          </a:stretch>
+        </p:blipFill>
+        <p:spPr>
+          <a:xfrm>
+            <a:off x="745236" y="4722876"/>
+            <a:ext cx="265176" cy="265176"/>
+          </a:xfrm>
+          <a:prstGeom prst="rect">
+            <a:avLst/>
+          </a:prstGeom>
+        </p:spPr>
+      </p:pic>
+      <p:sp>
+        <p:nvSpPr>
+          <p:cNvPr id="7" name="Text 3"/>
+          <p:cNvSpPr txBox="1"/>
+          <p:nvPr/>
+        </p:nvSpPr>
+        <p:spPr>
+          <a:xfrm>
+            <a:off x="640080" y="5193792"/>
+            <a:ext cx="1755648" cy="237744"/>
+          </a:xfrm>
+          <a:prstGeom prst="rect">
+            <a:avLst/>
+          </a:prstGeom>
+          <a:noFill/>
+          <a:ln/>
+        </p:spPr>
+        <p:txBody>
+          <a:bodyPr wrap="square" lIns="0" tIns="0" rIns="0" bIns="0" rtlCol="0" anchor="ctr"/>
+          <a:lstStyle/>
+          <a:p>
+            <a:pPr indent="0" marL="0">
+              <a:buNone/>
+            </a:pPr>
+            <a:r>
+              <a:rPr lang="en-US" sz="1100" spc="100" kern="0" dirty="0">
                 <a:solidFill>
                   <a:srgbClr val="1D2A6D"/>
                 </a:solidFill>
@@ -4238,36 +4946,36 @@
               </a:rPr>
               <a:t>01 MONITOR</a:t>
             </a:r>
-            <a:endParaRPr lang="en-US" sz="950" dirty="0"/>
-          </a:p>
-        </p:txBody>
-      </p:sp>
-      <p:sp>
-        <p:nvSpPr>
-          <p:cNvPr id="6" name="Text 3"/>
-          <p:cNvSpPr txBox="1"/>
-          <p:nvPr/>
-        </p:nvSpPr>
-        <p:spPr>
-          <a:xfrm>
-            <a:off x="640080" y="4919472"/>
-            <a:ext cx="1737360" cy="457200"/>
-          </a:xfrm>
-          <a:prstGeom prst="rect">
-            <a:avLst/>
-          </a:prstGeom>
-          <a:noFill/>
-          <a:ln/>
-        </p:spPr>
-        <p:txBody>
-          <a:bodyPr wrap="square" lIns="0" tIns="0" rIns="0" bIns="0" rtlCol="0" anchor="ctr"/>
-          <a:lstStyle/>
-          <a:p>
-            <a:pPr indent="0" marL="0">
-              <a:buNone/>
-            </a:pPr>
-            <a:r>
-              <a:rPr lang="en-US" sz="1100" dirty="0">
+            <a:endParaRPr lang="en-US" sz="1100" dirty="0"/>
+          </a:p>
+        </p:txBody>
+      </p:sp>
+      <p:sp>
+        <p:nvSpPr>
+          <p:cNvPr id="8" name="Text 4"/>
+          <p:cNvSpPr txBox="1"/>
+          <p:nvPr/>
+        </p:nvSpPr>
+        <p:spPr>
+          <a:xfrm>
+            <a:off x="640080" y="5440680"/>
+            <a:ext cx="1755648" cy="457200"/>
+          </a:xfrm>
+          <a:prstGeom prst="rect">
+            <a:avLst/>
+          </a:prstGeom>
+          <a:noFill/>
+          <a:ln/>
+        </p:spPr>
+        <p:txBody>
+          <a:bodyPr wrap="square" lIns="0" tIns="0" rIns="0" bIns="0" rtlCol="0" anchor="ctr"/>
+          <a:lstStyle/>
+          <a:p>
+            <a:pPr indent="0" marL="0">
+              <a:buNone/>
+            </a:pPr>
+            <a:r>
+              <a:rPr lang="en-US" sz="1250" dirty="0">
                 <a:solidFill>
                   <a:srgbClr val="5E6976"/>
                 </a:solidFill>
@@ -4277,36 +4985,202 @@
               </a:rPr>
               <a:t>what changed</a:t>
             </a:r>
+            <a:endParaRPr lang="en-US" sz="1250" dirty="0"/>
+          </a:p>
+        </p:txBody>
+      </p:sp>
+      <p:sp>
+        <p:nvSpPr>
+          <p:cNvPr id="9" name="Shape 5"/>
+          <p:cNvSpPr/>
+          <p:nvPr/>
+        </p:nvSpPr>
+        <p:spPr>
+          <a:xfrm>
+            <a:off x="2455164" y="4617720"/>
+            <a:ext cx="475488" cy="475488"/>
+          </a:xfrm>
+          <a:prstGeom prst="ellipse">
+            <a:avLst/>
+          </a:prstGeom>
+          <a:solidFill>
+            <a:srgbClr val="E6EBF9"/>
+          </a:solidFill>
+          <a:ln/>
+        </p:spPr>
+      </p:sp>
+      <p:pic>
+        <p:nvPicPr>
+          <p:cNvPr id="10" name="Image 2" descr="icons/exposure-navy.png">    </p:cNvPr>
+          <p:cNvPicPr>
+            <a:picLocks noChangeAspect="1"/>
+          </p:cNvPicPr>
+          <p:nvPr/>
+        </p:nvPicPr>
+        <p:blipFill>
+          <a:blip r:embed="rId3"/>
+          <a:stretch>
+            <a:fillRect/>
+          </a:stretch>
+        </p:blipFill>
+        <p:spPr>
+          <a:xfrm>
+            <a:off x="2560320" y="4722876"/>
+            <a:ext cx="265176" cy="265176"/>
+          </a:xfrm>
+          <a:prstGeom prst="rect">
+            <a:avLst/>
+          </a:prstGeom>
+        </p:spPr>
+      </p:pic>
+      <p:sp>
+        <p:nvSpPr>
+          <p:cNvPr id="11" name="Text 6"/>
+          <p:cNvSpPr txBox="1"/>
+          <p:nvPr/>
+        </p:nvSpPr>
+        <p:spPr>
+          <a:xfrm>
+            <a:off x="2455164" y="5193792"/>
+            <a:ext cx="1755648" cy="237744"/>
+          </a:xfrm>
+          <a:prstGeom prst="rect">
+            <a:avLst/>
+          </a:prstGeom>
+          <a:noFill/>
+          <a:ln/>
+        </p:spPr>
+        <p:txBody>
+          <a:bodyPr wrap="square" lIns="0" tIns="0" rIns="0" bIns="0" rtlCol="0" anchor="ctr"/>
+          <a:lstStyle/>
+          <a:p>
+            <a:pPr indent="0" marL="0">
+              <a:buNone/>
+            </a:pPr>
+            <a:r>
+              <a:rPr lang="en-US" sz="1100" spc="100" kern="0" dirty="0">
+                <a:solidFill>
+                  <a:srgbClr val="1D2A6D"/>
+                </a:solidFill>
+                <a:latin typeface="Calibri" pitchFamily="34" charset="0"/>
+                <a:ea typeface="Calibri" pitchFamily="34" charset="-122"/>
+                <a:cs typeface="Calibri" pitchFamily="34" charset="-120"/>
+              </a:rPr>
+              <a:t>02 EXPOSURE</a:t>
+            </a:r>
             <a:endParaRPr lang="en-US" sz="1100" dirty="0"/>
           </a:p>
         </p:txBody>
       </p:sp>
       <p:sp>
         <p:nvSpPr>
-          <p:cNvPr id="7" name="Text 4"/>
-          <p:cNvSpPr txBox="1"/>
-          <p:nvPr/>
-        </p:nvSpPr>
-        <p:spPr>
-          <a:xfrm>
-            <a:off x="2455164" y="4663440"/>
-            <a:ext cx="1737360" cy="228600"/>
-          </a:xfrm>
-          <a:prstGeom prst="rect">
-            <a:avLst/>
-          </a:prstGeom>
-          <a:noFill/>
-          <a:ln/>
-        </p:spPr>
-        <p:txBody>
-          <a:bodyPr wrap="square" lIns="0" tIns="0" rIns="0" bIns="0" rtlCol="0" anchor="ctr"/>
-          <a:lstStyle/>
-          <a:p>
-            <a:pPr indent="0" marL="0">
-              <a:buNone/>
-            </a:pPr>
-            <a:r>
-              <a:rPr lang="en-US" sz="950" spc="100" kern="0" dirty="0">
+          <p:cNvPr id="12" name="Text 7"/>
+          <p:cNvSpPr txBox="1"/>
+          <p:nvPr/>
+        </p:nvSpPr>
+        <p:spPr>
+          <a:xfrm>
+            <a:off x="2455164" y="5440680"/>
+            <a:ext cx="1755648" cy="457200"/>
+          </a:xfrm>
+          <a:prstGeom prst="rect">
+            <a:avLst/>
+          </a:prstGeom>
+          <a:noFill/>
+          <a:ln/>
+        </p:spPr>
+        <p:txBody>
+          <a:bodyPr wrap="square" lIns="0" tIns="0" rIns="0" bIns="0" rtlCol="0" anchor="ctr"/>
+          <a:lstStyle/>
+          <a:p>
+            <a:pPr indent="0" marL="0">
+              <a:buNone/>
+            </a:pPr>
+            <a:r>
+              <a:rPr lang="en-US" sz="1250" dirty="0">
+                <a:solidFill>
+                  <a:srgbClr val="5E6976"/>
+                </a:solidFill>
+                <a:latin typeface="Calibri" pitchFamily="34" charset="0"/>
+                <a:ea typeface="Calibri" pitchFamily="34" charset="-122"/>
+                <a:cs typeface="Calibri" pitchFamily="34" charset="-120"/>
+              </a:rPr>
+              <a:t>what they really hold</a:t>
+            </a:r>
+            <a:endParaRPr lang="en-US" sz="1250" dirty="0"/>
+          </a:p>
+        </p:txBody>
+      </p:sp>
+      <p:sp>
+        <p:nvSpPr>
+          <p:cNvPr id="13" name="Shape 8"/>
+          <p:cNvSpPr/>
+          <p:nvPr/>
+        </p:nvSpPr>
+        <p:spPr>
+          <a:xfrm>
+            <a:off x="4270248" y="4617720"/>
+            <a:ext cx="475488" cy="475488"/>
+          </a:xfrm>
+          <a:prstGeom prst="ellipse">
+            <a:avLst/>
+          </a:prstGeom>
+          <a:solidFill>
+            <a:srgbClr val="E6EBF9"/>
+          </a:solidFill>
+          <a:ln/>
+        </p:spPr>
+      </p:sp>
+      <p:pic>
+        <p:nvPicPr>
+          <p:cNvPr id="14" name="Image 3" descr="icons/resilience-navy.png">    </p:cNvPr>
+          <p:cNvPicPr>
+            <a:picLocks noChangeAspect="1"/>
+          </p:cNvPicPr>
+          <p:nvPr/>
+        </p:nvPicPr>
+        <p:blipFill>
+          <a:blip r:embed="rId4"/>
+          <a:stretch>
+            <a:fillRect/>
+          </a:stretch>
+        </p:blipFill>
+        <p:spPr>
+          <a:xfrm>
+            <a:off x="4375404" y="4722876"/>
+            <a:ext cx="265176" cy="265176"/>
+          </a:xfrm>
+          <a:prstGeom prst="rect">
+            <a:avLst/>
+          </a:prstGeom>
+        </p:spPr>
+      </p:pic>
+      <p:sp>
+        <p:nvSpPr>
+          <p:cNvPr id="15" name="Text 9"/>
+          <p:cNvSpPr txBox="1"/>
+          <p:nvPr/>
+        </p:nvSpPr>
+        <p:spPr>
+          <a:xfrm>
+            <a:off x="4270248" y="5193792"/>
+            <a:ext cx="1755648" cy="237744"/>
+          </a:xfrm>
+          <a:prstGeom prst="rect">
+            <a:avLst/>
+          </a:prstGeom>
+          <a:noFill/>
+          <a:ln/>
+        </p:spPr>
+        <p:txBody>
+          <a:bodyPr wrap="square" lIns="0" tIns="0" rIns="0" bIns="0" rtlCol="0" anchor="ctr"/>
+          <a:lstStyle/>
+          <a:p>
+            <a:pPr indent="0" marL="0">
+              <a:buNone/>
+            </a:pPr>
+            <a:r>
+              <a:rPr lang="en-US" sz="1100" spc="100" kern="0" dirty="0">
                 <a:solidFill>
                   <a:srgbClr val="1D2A6D"/>
                 </a:solidFill>
@@ -4314,38 +5188,38 @@
                 <a:ea typeface="Calibri" pitchFamily="34" charset="-122"/>
                 <a:cs typeface="Calibri" pitchFamily="34" charset="-120"/>
               </a:rPr>
-              <a:t>02 EXPOSURE</a:t>
-            </a:r>
-            <a:endParaRPr lang="en-US" sz="950" dirty="0"/>
-          </a:p>
-        </p:txBody>
-      </p:sp>
-      <p:sp>
-        <p:nvSpPr>
-          <p:cNvPr id="8" name="Text 5"/>
-          <p:cNvSpPr txBox="1"/>
-          <p:nvPr/>
-        </p:nvSpPr>
-        <p:spPr>
-          <a:xfrm>
-            <a:off x="2455164" y="4919472"/>
-            <a:ext cx="1737360" cy="457200"/>
-          </a:xfrm>
-          <a:prstGeom prst="rect">
-            <a:avLst/>
-          </a:prstGeom>
-          <a:noFill/>
-          <a:ln/>
-        </p:spPr>
-        <p:txBody>
-          <a:bodyPr wrap="square" lIns="0" tIns="0" rIns="0" bIns="0" rtlCol="0" anchor="ctr"/>
-          <a:lstStyle/>
-          <a:p>
-            <a:pPr indent="0" marL="0">
-              <a:buNone/>
-            </a:pPr>
-            <a:r>
-              <a:rPr lang="en-US" sz="1100" dirty="0">
+              <a:t>03 RESILIENCE</a:t>
+            </a:r>
+            <a:endParaRPr lang="en-US" sz="1100" dirty="0"/>
+          </a:p>
+        </p:txBody>
+      </p:sp>
+      <p:sp>
+        <p:nvSpPr>
+          <p:cNvPr id="16" name="Text 10"/>
+          <p:cNvSpPr txBox="1"/>
+          <p:nvPr/>
+        </p:nvSpPr>
+        <p:spPr>
+          <a:xfrm>
+            <a:off x="4270248" y="5440680"/>
+            <a:ext cx="1755648" cy="457200"/>
+          </a:xfrm>
+          <a:prstGeom prst="rect">
+            <a:avLst/>
+          </a:prstGeom>
+          <a:noFill/>
+          <a:ln/>
+        </p:spPr>
+        <p:txBody>
+          <a:bodyPr wrap="square" lIns="0" tIns="0" rIns="0" bIns="0" rtlCol="0" anchor="ctr"/>
+          <a:lstStyle/>
+          <a:p>
+            <a:pPr indent="0" marL="0">
+              <a:buNone/>
+            </a:pPr>
+            <a:r>
+              <a:rPr lang="en-US" sz="1250" dirty="0">
                 <a:solidFill>
                   <a:srgbClr val="5E6976"/>
                 </a:solidFill>
@@ -4353,7 +5227,90 @@
                 <a:ea typeface="Calibri" pitchFamily="34" charset="-122"/>
                 <a:cs typeface="Calibri" pitchFamily="34" charset="-120"/>
               </a:rPr>
-              <a:t>what they really hold</a:t>
+              <a:t>what breaks first</a:t>
+            </a:r>
+            <a:endParaRPr lang="en-US" sz="1250" dirty="0"/>
+          </a:p>
+        </p:txBody>
+      </p:sp>
+      <p:sp>
+        <p:nvSpPr>
+          <p:cNvPr id="17" name="Shape 11"/>
+          <p:cNvSpPr/>
+          <p:nvPr/>
+        </p:nvSpPr>
+        <p:spPr>
+          <a:xfrm>
+            <a:off x="6085332" y="4617720"/>
+            <a:ext cx="475488" cy="475488"/>
+          </a:xfrm>
+          <a:prstGeom prst="ellipse">
+            <a:avLst/>
+          </a:prstGeom>
+          <a:solidFill>
+            <a:srgbClr val="E6EBF9"/>
+          </a:solidFill>
+          <a:ln/>
+        </p:spPr>
+      </p:sp>
+      <p:pic>
+        <p:nvPicPr>
+          <p:cNvPr id="18" name="Image 4" descr="icons/opportunity-navy.png">    </p:cNvPr>
+          <p:cNvPicPr>
+            <a:picLocks noChangeAspect="1"/>
+          </p:cNvPicPr>
+          <p:nvPr/>
+        </p:nvPicPr>
+        <p:blipFill>
+          <a:blip r:embed="rId5"/>
+          <a:stretch>
+            <a:fillRect/>
+          </a:stretch>
+        </p:blipFill>
+        <p:spPr>
+          <a:xfrm>
+            <a:off x="6190488" y="4722876"/>
+            <a:ext cx="265176" cy="265176"/>
+          </a:xfrm>
+          <a:prstGeom prst="rect">
+            <a:avLst/>
+          </a:prstGeom>
+        </p:spPr>
+      </p:pic>
+      <p:sp>
+        <p:nvSpPr>
+          <p:cNvPr id="19" name="Text 12"/>
+          <p:cNvSpPr txBox="1"/>
+          <p:nvPr/>
+        </p:nvSpPr>
+        <p:spPr>
+          <a:xfrm>
+            <a:off x="6085332" y="5193792"/>
+            <a:ext cx="1755648" cy="237744"/>
+          </a:xfrm>
+          <a:prstGeom prst="rect">
+            <a:avLst/>
+          </a:prstGeom>
+          <a:noFill/>
+          <a:ln/>
+        </p:spPr>
+        <p:txBody>
+          <a:bodyPr wrap="square" lIns="0" tIns="0" rIns="0" bIns="0" rtlCol="0" anchor="ctr"/>
+          <a:lstStyle/>
+          <a:p>
+            <a:pPr indent="0" marL="0">
+              <a:buNone/>
+            </a:pPr>
+            <a:r>
+              <a:rPr lang="en-US" sz="1100" spc="100" kern="0" dirty="0">
+                <a:solidFill>
+                  <a:srgbClr val="1D2A6D"/>
+                </a:solidFill>
+                <a:latin typeface="Calibri" pitchFamily="34" charset="0"/>
+                <a:ea typeface="Calibri" pitchFamily="34" charset="-122"/>
+                <a:cs typeface="Calibri" pitchFamily="34" charset="-120"/>
+              </a:rPr>
+              <a:t>04 OPPORTUNITY</a:t>
             </a:r>
             <a:endParaRPr lang="en-US" sz="1100" dirty="0"/>
           </a:p>
@@ -4361,30 +5318,113 @@
       </p:sp>
       <p:sp>
         <p:nvSpPr>
-          <p:cNvPr id="9" name="Text 6"/>
-          <p:cNvSpPr txBox="1"/>
-          <p:nvPr/>
-        </p:nvSpPr>
-        <p:spPr>
-          <a:xfrm>
-            <a:off x="4270248" y="4663440"/>
-            <a:ext cx="1737360" cy="228600"/>
-          </a:xfrm>
-          <a:prstGeom prst="rect">
-            <a:avLst/>
-          </a:prstGeom>
-          <a:noFill/>
-          <a:ln/>
-        </p:spPr>
-        <p:txBody>
-          <a:bodyPr wrap="square" lIns="0" tIns="0" rIns="0" bIns="0" rtlCol="0" anchor="ctr"/>
-          <a:lstStyle/>
-          <a:p>
-            <a:pPr indent="0" marL="0">
-              <a:buNone/>
-            </a:pPr>
-            <a:r>
-              <a:rPr lang="en-US" sz="950" spc="100" kern="0" dirty="0">
+          <p:cNvPr id="20" name="Text 13"/>
+          <p:cNvSpPr txBox="1"/>
+          <p:nvPr/>
+        </p:nvSpPr>
+        <p:spPr>
+          <a:xfrm>
+            <a:off x="6085332" y="5440680"/>
+            <a:ext cx="1755648" cy="457200"/>
+          </a:xfrm>
+          <a:prstGeom prst="rect">
+            <a:avLst/>
+          </a:prstGeom>
+          <a:noFill/>
+          <a:ln/>
+        </p:spPr>
+        <p:txBody>
+          <a:bodyPr wrap="square" lIns="0" tIns="0" rIns="0" bIns="0" rtlCol="0" anchor="ctr"/>
+          <a:lstStyle/>
+          <a:p>
+            <a:pPr indent="0" marL="0">
+              <a:buNone/>
+            </a:pPr>
+            <a:r>
+              <a:rPr lang="en-US" sz="1250" dirty="0">
+                <a:solidFill>
+                  <a:srgbClr val="5E6976"/>
+                </a:solidFill>
+                <a:latin typeface="Calibri" pitchFamily="34" charset="0"/>
+                <a:ea typeface="Calibri" pitchFamily="34" charset="-122"/>
+                <a:cs typeface="Calibri" pitchFamily="34" charset="-120"/>
+              </a:rPr>
+              <a:t>what is unclaimed</a:t>
+            </a:r>
+            <a:endParaRPr lang="en-US" sz="1250" dirty="0"/>
+          </a:p>
+        </p:txBody>
+      </p:sp>
+      <p:sp>
+        <p:nvSpPr>
+          <p:cNvPr id="21" name="Shape 14"/>
+          <p:cNvSpPr/>
+          <p:nvPr/>
+        </p:nvSpPr>
+        <p:spPr>
+          <a:xfrm>
+            <a:off x="7900416" y="4617720"/>
+            <a:ext cx="475488" cy="475488"/>
+          </a:xfrm>
+          <a:prstGeom prst="ellipse">
+            <a:avLst/>
+          </a:prstGeom>
+          <a:solidFill>
+            <a:srgbClr val="E6EBF9"/>
+          </a:solidFill>
+          <a:ln/>
+        </p:spPr>
+      </p:sp>
+      <p:pic>
+        <p:nvPicPr>
+          <p:cNvPr id="22" name="Image 5" descr="icons/suitability-navy.png">    </p:cNvPr>
+          <p:cNvPicPr>
+            <a:picLocks noChangeAspect="1"/>
+          </p:cNvPicPr>
+          <p:nvPr/>
+        </p:nvPicPr>
+        <p:blipFill>
+          <a:blip r:embed="rId6"/>
+          <a:stretch>
+            <a:fillRect/>
+          </a:stretch>
+        </p:blipFill>
+        <p:spPr>
+          <a:xfrm>
+            <a:off x="8005572" y="4722876"/>
+            <a:ext cx="265176" cy="265176"/>
+          </a:xfrm>
+          <a:prstGeom prst="rect">
+            <a:avLst/>
+          </a:prstGeom>
+        </p:spPr>
+      </p:pic>
+      <p:sp>
+        <p:nvSpPr>
+          <p:cNvPr id="23" name="Text 15"/>
+          <p:cNvSpPr txBox="1"/>
+          <p:nvPr/>
+        </p:nvSpPr>
+        <p:spPr>
+          <a:xfrm>
+            <a:off x="7900416" y="5193792"/>
+            <a:ext cx="1755648" cy="237744"/>
+          </a:xfrm>
+          <a:prstGeom prst="rect">
+            <a:avLst/>
+          </a:prstGeom>
+          <a:noFill/>
+          <a:ln/>
+        </p:spPr>
+        <p:txBody>
+          <a:bodyPr wrap="square" lIns="0" tIns="0" rIns="0" bIns="0" rtlCol="0" anchor="ctr"/>
+          <a:lstStyle/>
+          <a:p>
+            <a:pPr indent="0" marL="0">
+              <a:buNone/>
+            </a:pPr>
+            <a:r>
+              <a:rPr lang="en-US" sz="1100" spc="100" kern="0" dirty="0">
                 <a:solidFill>
                   <a:srgbClr val="1D2A6D"/>
                 </a:solidFill>
@@ -4392,38 +5432,38 @@
                 <a:ea typeface="Calibri" pitchFamily="34" charset="-122"/>
                 <a:cs typeface="Calibri" pitchFamily="34" charset="-120"/>
               </a:rPr>
-              <a:t>03 RESILIENCE</a:t>
-            </a:r>
-            <a:endParaRPr lang="en-US" sz="950" dirty="0"/>
-          </a:p>
-        </p:txBody>
-      </p:sp>
-      <p:sp>
-        <p:nvSpPr>
-          <p:cNvPr id="10" name="Text 7"/>
-          <p:cNvSpPr txBox="1"/>
-          <p:nvPr/>
-        </p:nvSpPr>
-        <p:spPr>
-          <a:xfrm>
-            <a:off x="4270248" y="4919472"/>
-            <a:ext cx="1737360" cy="457200"/>
-          </a:xfrm>
-          <a:prstGeom prst="rect">
-            <a:avLst/>
-          </a:prstGeom>
-          <a:noFill/>
-          <a:ln/>
-        </p:spPr>
-        <p:txBody>
-          <a:bodyPr wrap="square" lIns="0" tIns="0" rIns="0" bIns="0" rtlCol="0" anchor="ctr"/>
-          <a:lstStyle/>
-          <a:p>
-            <a:pPr indent="0" marL="0">
-              <a:buNone/>
-            </a:pPr>
-            <a:r>
-              <a:rPr lang="en-US" sz="1100" dirty="0">
+              <a:t>05 SUITABILITY</a:t>
+            </a:r>
+            <a:endParaRPr lang="en-US" sz="1100" dirty="0"/>
+          </a:p>
+        </p:txBody>
+      </p:sp>
+      <p:sp>
+        <p:nvSpPr>
+          <p:cNvPr id="24" name="Text 16"/>
+          <p:cNvSpPr txBox="1"/>
+          <p:nvPr/>
+        </p:nvSpPr>
+        <p:spPr>
+          <a:xfrm>
+            <a:off x="7900416" y="5440680"/>
+            <a:ext cx="1755648" cy="457200"/>
+          </a:xfrm>
+          <a:prstGeom prst="rect">
+            <a:avLst/>
+          </a:prstGeom>
+          <a:noFill/>
+          <a:ln/>
+        </p:spPr>
+        <p:txBody>
+          <a:bodyPr wrap="square" lIns="0" tIns="0" rIns="0" bIns="0" rtlCol="0" anchor="ctr"/>
+          <a:lstStyle/>
+          <a:p>
+            <a:pPr indent="0" marL="0">
+              <a:buNone/>
+            </a:pPr>
+            <a:r>
+              <a:rPr lang="en-US" sz="1250" dirty="0">
                 <a:solidFill>
                   <a:srgbClr val="5E6976"/>
                 </a:solidFill>
@@ -4431,7 +5471,90 @@
                 <a:ea typeface="Calibri" pitchFamily="34" charset="-122"/>
                 <a:cs typeface="Calibri" pitchFamily="34" charset="-120"/>
               </a:rPr>
-              <a:t>what breaks first</a:t>
+              <a:t>breach or authorised</a:t>
+            </a:r>
+            <a:endParaRPr lang="en-US" sz="1250" dirty="0"/>
+          </a:p>
+        </p:txBody>
+      </p:sp>
+      <p:sp>
+        <p:nvSpPr>
+          <p:cNvPr id="25" name="Shape 17"/>
+          <p:cNvSpPr/>
+          <p:nvPr/>
+        </p:nvSpPr>
+        <p:spPr>
+          <a:xfrm>
+            <a:off x="9715500" y="4617720"/>
+            <a:ext cx="475488" cy="475488"/>
+          </a:xfrm>
+          <a:prstGeom prst="ellipse">
+            <a:avLst/>
+          </a:prstGeom>
+          <a:solidFill>
+            <a:srgbClr val="F6EFDC"/>
+          </a:solidFill>
+          <a:ln/>
+        </p:spPr>
+      </p:sp>
+      <p:pic>
+        <p:nvPicPr>
+          <p:cNvPr id="26" name="Image 6" descr="icons/relationship-gold.png">    </p:cNvPr>
+          <p:cNvPicPr>
+            <a:picLocks noChangeAspect="1"/>
+          </p:cNvPicPr>
+          <p:nvPr/>
+        </p:nvPicPr>
+        <p:blipFill>
+          <a:blip r:embed="rId7"/>
+          <a:stretch>
+            <a:fillRect/>
+          </a:stretch>
+        </p:blipFill>
+        <p:spPr>
+          <a:xfrm>
+            <a:off x="9820656" y="4722876"/>
+            <a:ext cx="265176" cy="265176"/>
+          </a:xfrm>
+          <a:prstGeom prst="rect">
+            <a:avLst/>
+          </a:prstGeom>
+        </p:spPr>
+      </p:pic>
+      <p:sp>
+        <p:nvSpPr>
+          <p:cNvPr id="27" name="Text 18"/>
+          <p:cNvSpPr txBox="1"/>
+          <p:nvPr/>
+        </p:nvSpPr>
+        <p:spPr>
+          <a:xfrm>
+            <a:off x="9715500" y="5193792"/>
+            <a:ext cx="1755648" cy="237744"/>
+          </a:xfrm>
+          <a:prstGeom prst="rect">
+            <a:avLst/>
+          </a:prstGeom>
+          <a:noFill/>
+          <a:ln/>
+        </p:spPr>
+        <p:txBody>
+          <a:bodyPr wrap="square" lIns="0" tIns="0" rIns="0" bIns="0" rtlCol="0" anchor="ctr"/>
+          <a:lstStyle/>
+          <a:p>
+            <a:pPr indent="0" marL="0">
+              <a:buNone/>
+            </a:pPr>
+            <a:r>
+              <a:rPr lang="en-US" sz="1100" spc="100" kern="0" dirty="0">
+                <a:solidFill>
+                  <a:srgbClr val="A68430"/>
+                </a:solidFill>
+                <a:latin typeface="Calibri" pitchFamily="34" charset="0"/>
+                <a:ea typeface="Calibri" pitchFamily="34" charset="-122"/>
+                <a:cs typeface="Calibri" pitchFamily="34" charset="-120"/>
+              </a:rPr>
+              <a:t>06 RELATIONSHIP</a:t>
             </a:r>
             <a:endParaRPr lang="en-US" sz="1100" dirty="0"/>
           </a:p>
@@ -4439,69 +5562,30 @@
       </p:sp>
       <p:sp>
         <p:nvSpPr>
-          <p:cNvPr id="11" name="Text 8"/>
-          <p:cNvSpPr txBox="1"/>
-          <p:nvPr/>
-        </p:nvSpPr>
-        <p:spPr>
-          <a:xfrm>
-            <a:off x="6085332" y="4663440"/>
-            <a:ext cx="1737360" cy="228600"/>
-          </a:xfrm>
-          <a:prstGeom prst="rect">
-            <a:avLst/>
-          </a:prstGeom>
-          <a:noFill/>
-          <a:ln/>
-        </p:spPr>
-        <p:txBody>
-          <a:bodyPr wrap="square" lIns="0" tIns="0" rIns="0" bIns="0" rtlCol="0" anchor="ctr"/>
-          <a:lstStyle/>
-          <a:p>
-            <a:pPr indent="0" marL="0">
-              <a:buNone/>
-            </a:pPr>
-            <a:r>
-              <a:rPr lang="en-US" sz="950" spc="100" kern="0" dirty="0">
-                <a:solidFill>
-                  <a:srgbClr val="1D2A6D"/>
-                </a:solidFill>
-                <a:latin typeface="Calibri" pitchFamily="34" charset="0"/>
-                <a:ea typeface="Calibri" pitchFamily="34" charset="-122"/>
-                <a:cs typeface="Calibri" pitchFamily="34" charset="-120"/>
-              </a:rPr>
-              <a:t>04 OPPORTUNITY</a:t>
-            </a:r>
-            <a:endParaRPr lang="en-US" sz="950" dirty="0"/>
-          </a:p>
-        </p:txBody>
-      </p:sp>
-      <p:sp>
-        <p:nvSpPr>
-          <p:cNvPr id="12" name="Text 9"/>
-          <p:cNvSpPr txBox="1"/>
-          <p:nvPr/>
-        </p:nvSpPr>
-        <p:spPr>
-          <a:xfrm>
-            <a:off x="6085332" y="4919472"/>
-            <a:ext cx="1737360" cy="457200"/>
-          </a:xfrm>
-          <a:prstGeom prst="rect">
-            <a:avLst/>
-          </a:prstGeom>
-          <a:noFill/>
-          <a:ln/>
-        </p:spPr>
-        <p:txBody>
-          <a:bodyPr wrap="square" lIns="0" tIns="0" rIns="0" bIns="0" rtlCol="0" anchor="ctr"/>
-          <a:lstStyle/>
-          <a:p>
-            <a:pPr indent="0" marL="0">
-              <a:buNone/>
-            </a:pPr>
-            <a:r>
-              <a:rPr lang="en-US" sz="1100" dirty="0">
+          <p:cNvPr id="28" name="Text 19"/>
+          <p:cNvSpPr txBox="1"/>
+          <p:nvPr/>
+        </p:nvSpPr>
+        <p:spPr>
+          <a:xfrm>
+            <a:off x="9715500" y="5440680"/>
+            <a:ext cx="1755648" cy="457200"/>
+          </a:xfrm>
+          <a:prstGeom prst="rect">
+            <a:avLst/>
+          </a:prstGeom>
+          <a:noFill/>
+          <a:ln/>
+        </p:spPr>
+        <p:txBody>
+          <a:bodyPr wrap="square" lIns="0" tIns="0" rIns="0" bIns="0" rtlCol="0" anchor="ctr"/>
+          <a:lstStyle/>
+          <a:p>
+            <a:pPr indent="0" marL="0">
+              <a:buNone/>
+            </a:pPr>
+            <a:r>
+              <a:rPr lang="en-US" sz="1250" dirty="0">
                 <a:solidFill>
                   <a:srgbClr val="5E6976"/>
                 </a:solidFill>
@@ -4509,177 +5593,21 @@
                 <a:ea typeface="Calibri" pitchFamily="34" charset="-122"/>
                 <a:cs typeface="Calibri" pitchFamily="34" charset="-120"/>
               </a:rPr>
-              <a:t>what is unclaimed</a:t>
-            </a:r>
-            <a:endParaRPr lang="en-US" sz="1100" dirty="0"/>
-          </a:p>
-        </p:txBody>
-      </p:sp>
-      <p:sp>
-        <p:nvSpPr>
-          <p:cNvPr id="13" name="Text 10"/>
-          <p:cNvSpPr txBox="1"/>
-          <p:nvPr/>
-        </p:nvSpPr>
-        <p:spPr>
-          <a:xfrm>
-            <a:off x="7900416" y="4663440"/>
-            <a:ext cx="1737360" cy="228600"/>
-          </a:xfrm>
-          <a:prstGeom prst="rect">
-            <a:avLst/>
-          </a:prstGeom>
-          <a:noFill/>
-          <a:ln/>
-        </p:spPr>
-        <p:txBody>
-          <a:bodyPr wrap="square" lIns="0" tIns="0" rIns="0" bIns="0" rtlCol="0" anchor="ctr"/>
-          <a:lstStyle/>
-          <a:p>
-            <a:pPr indent="0" marL="0">
-              <a:buNone/>
-            </a:pPr>
-            <a:r>
-              <a:rPr lang="en-US" sz="950" spc="100" kern="0" dirty="0">
-                <a:solidFill>
-                  <a:srgbClr val="1D2A6D"/>
-                </a:solidFill>
-                <a:latin typeface="Calibri" pitchFamily="34" charset="0"/>
-                <a:ea typeface="Calibri" pitchFamily="34" charset="-122"/>
-                <a:cs typeface="Calibri" pitchFamily="34" charset="-120"/>
-              </a:rPr>
-              <a:t>05 SUITABILITY</a:t>
-            </a:r>
-            <a:endParaRPr lang="en-US" sz="950" dirty="0"/>
-          </a:p>
-        </p:txBody>
-      </p:sp>
-      <p:sp>
-        <p:nvSpPr>
-          <p:cNvPr id="14" name="Text 11"/>
-          <p:cNvSpPr txBox="1"/>
-          <p:nvPr/>
-        </p:nvSpPr>
-        <p:spPr>
-          <a:xfrm>
-            <a:off x="7900416" y="4919472"/>
-            <a:ext cx="1737360" cy="457200"/>
-          </a:xfrm>
-          <a:prstGeom prst="rect">
-            <a:avLst/>
-          </a:prstGeom>
-          <a:noFill/>
-          <a:ln/>
-        </p:spPr>
-        <p:txBody>
-          <a:bodyPr wrap="square" lIns="0" tIns="0" rIns="0" bIns="0" rtlCol="0" anchor="ctr"/>
-          <a:lstStyle/>
-          <a:p>
-            <a:pPr indent="0" marL="0">
-              <a:buNone/>
-            </a:pPr>
-            <a:r>
-              <a:rPr lang="en-US" sz="1100" dirty="0">
-                <a:solidFill>
-                  <a:srgbClr val="5E6976"/>
-                </a:solidFill>
-                <a:latin typeface="Calibri" pitchFamily="34" charset="0"/>
-                <a:ea typeface="Calibri" pitchFamily="34" charset="-122"/>
-                <a:cs typeface="Calibri" pitchFamily="34" charset="-120"/>
-              </a:rPr>
-              <a:t>breach or authorised</a:t>
-            </a:r>
-            <a:endParaRPr lang="en-US" sz="1100" dirty="0"/>
-          </a:p>
-        </p:txBody>
-      </p:sp>
-      <p:sp>
-        <p:nvSpPr>
-          <p:cNvPr id="15" name="Text 12"/>
-          <p:cNvSpPr txBox="1"/>
-          <p:nvPr/>
-        </p:nvSpPr>
-        <p:spPr>
-          <a:xfrm>
-            <a:off x="9715500" y="4663440"/>
-            <a:ext cx="1737360" cy="228600"/>
-          </a:xfrm>
-          <a:prstGeom prst="rect">
-            <a:avLst/>
-          </a:prstGeom>
-          <a:noFill/>
-          <a:ln/>
-        </p:spPr>
-        <p:txBody>
-          <a:bodyPr wrap="square" lIns="0" tIns="0" rIns="0" bIns="0" rtlCol="0" anchor="ctr"/>
-          <a:lstStyle/>
-          <a:p>
-            <a:pPr indent="0" marL="0">
-              <a:buNone/>
-            </a:pPr>
-            <a:r>
-              <a:rPr lang="en-US" sz="950" spc="100" kern="0" dirty="0">
-                <a:solidFill>
-                  <a:srgbClr val="A68430"/>
-                </a:solidFill>
-                <a:latin typeface="Calibri" pitchFamily="34" charset="0"/>
-                <a:ea typeface="Calibri" pitchFamily="34" charset="-122"/>
-                <a:cs typeface="Calibri" pitchFamily="34" charset="-120"/>
-              </a:rPr>
-              <a:t>06 RELATIONSHIP</a:t>
-            </a:r>
-            <a:endParaRPr lang="en-US" sz="950" dirty="0"/>
-          </a:p>
-        </p:txBody>
-      </p:sp>
-      <p:sp>
-        <p:nvSpPr>
-          <p:cNvPr id="16" name="Text 13"/>
-          <p:cNvSpPr txBox="1"/>
-          <p:nvPr/>
-        </p:nvSpPr>
-        <p:spPr>
-          <a:xfrm>
-            <a:off x="9715500" y="4919472"/>
-            <a:ext cx="1737360" cy="457200"/>
-          </a:xfrm>
-          <a:prstGeom prst="rect">
-            <a:avLst/>
-          </a:prstGeom>
-          <a:noFill/>
-          <a:ln/>
-        </p:spPr>
-        <p:txBody>
-          <a:bodyPr wrap="square" lIns="0" tIns="0" rIns="0" bIns="0" rtlCol="0" anchor="ctr"/>
-          <a:lstStyle/>
-          <a:p>
-            <a:pPr indent="0" marL="0">
-              <a:buNone/>
-            </a:pPr>
-            <a:r>
-              <a:rPr lang="en-US" sz="1100" dirty="0">
-                <a:solidFill>
-                  <a:srgbClr val="5E6976"/>
-                </a:solidFill>
-                <a:latin typeface="Calibri" pitchFamily="34" charset="0"/>
-                <a:ea typeface="Calibri" pitchFamily="34" charset="-122"/>
-                <a:cs typeface="Calibri" pitchFamily="34" charset="-120"/>
-              </a:rPr>
               <a:t>how to say it</a:t>
             </a:r>
-            <a:endParaRPr lang="en-US" sz="1100" dirty="0"/>
-          </a:p>
-        </p:txBody>
-      </p:sp>
-      <p:sp>
-        <p:nvSpPr>
-          <p:cNvPr id="17" name="Text 14"/>
-          <p:cNvSpPr txBox="1"/>
-          <p:nvPr/>
-        </p:nvSpPr>
-        <p:spPr>
-          <a:xfrm>
-            <a:off x="640080" y="5623560"/>
+            <a:endParaRPr lang="en-US" sz="1250" dirty="0"/>
+          </a:p>
+        </p:txBody>
+      </p:sp>
+      <p:sp>
+        <p:nvSpPr>
+          <p:cNvPr id="29" name="Text 20"/>
+          <p:cNvSpPr txBox="1"/>
+          <p:nvPr/>
+        </p:nvSpPr>
+        <p:spPr>
+          <a:xfrm>
+            <a:off x="640080" y="6035040"/>
             <a:ext cx="10881360" cy="365760"/>
           </a:xfrm>
           <a:prstGeom prst="rect">
@@ -4696,7 +5624,7 @@
               <a:buNone/>
             </a:pPr>
             <a:r>
-              <a:rPr lang="en-US" sz="1500" spc="100" kern="0" dirty="0">
+              <a:rPr lang="en-US" sz="1650" spc="100" kern="0" dirty="0">
                 <a:solidFill>
                   <a:srgbClr val="141E55"/>
                 </a:solidFill>
@@ -4706,46 +5634,7 @@
               </a:rPr>
               <a:t>Detectors compute. Agents narrate. No agent originates a number.</a:t>
             </a:r>
-            <a:endParaRPr lang="en-US" sz="1500" dirty="0"/>
-          </a:p>
-        </p:txBody>
-      </p:sp>
-      <p:sp>
-        <p:nvSpPr>
-          <p:cNvPr id="18" name="Text 15"/>
-          <p:cNvSpPr txBox="1"/>
-          <p:nvPr/>
-        </p:nvSpPr>
-        <p:spPr>
-          <a:xfrm>
-            <a:off x="640080" y="6355080"/>
-            <a:ext cx="10881360" cy="274320"/>
-          </a:xfrm>
-          <a:prstGeom prst="rect">
-            <a:avLst/>
-          </a:prstGeom>
-          <a:noFill/>
-          <a:ln/>
-        </p:spPr>
-        <p:txBody>
-          <a:bodyPr wrap="square" lIns="0" tIns="0" rIns="0" bIns="0" rtlCol="0" anchor="ctr"/>
-          <a:lstStyle/>
-          <a:p>
-            <a:pPr indent="0" marL="0">
-              <a:buNone/>
-            </a:pPr>
-            <a:r>
-              <a:rPr lang="en-US" sz="950" dirty="0">
-                <a:solidFill>
-                  <a:srgbClr val="8B96A3"/>
-                </a:solidFill>
-                <a:latin typeface="Calibri" pitchFamily="34" charset="0"/>
-                <a:ea typeface="Calibri" pitchFamily="34" charset="-122"/>
-                <a:cs typeface="Calibri" pitchFamily="34" charset="-120"/>
-              </a:rPr>
-              <a:t>Screen: Priority Radar — 20 clients ranked by who needs attention today, not by size</a:t>
-            </a:r>
-            <a:endParaRPr lang="en-US" sz="950" dirty="0"/>
+            <a:endParaRPr lang="en-US" sz="1650" dirty="0"/>
           </a:p>
         </p:txBody>
       </p:sp>
@@ -4781,129 +5670,9 @@
           <a:chExt cx="0" cy="0"/>
         </a:xfrm>
       </p:grpSpPr>
-      <p:sp>
-        <p:nvSpPr>
-          <p:cNvPr id="2" name="Text 0"/>
-          <p:cNvSpPr txBox="1"/>
-          <p:nvPr/>
-        </p:nvSpPr>
-        <p:spPr>
-          <a:xfrm>
-            <a:off x="640080" y="502920"/>
-            <a:ext cx="8229600" cy="256032"/>
-          </a:xfrm>
-          <a:prstGeom prst="rect">
-            <a:avLst/>
-          </a:prstGeom>
-          <a:noFill/>
-          <a:ln/>
-        </p:spPr>
-        <p:txBody>
-          <a:bodyPr wrap="square" lIns="0" tIns="0" rIns="0" bIns="0" rtlCol="0" anchor="ctr"/>
-          <a:lstStyle/>
-          <a:p>
-            <a:pPr indent="0" marL="0">
-              <a:buNone/>
-            </a:pPr>
-            <a:r>
-              <a:rPr lang="en-US" sz="1100" spc="300" kern="0" dirty="0">
-                <a:solidFill>
-                  <a:srgbClr val="A8322B"/>
-                </a:solidFill>
-                <a:latin typeface="Calibri" pitchFamily="34" charset="0"/>
-                <a:ea typeface="Calibri" pitchFamily="34" charset="-122"/>
-                <a:cs typeface="Calibri" pitchFamily="34" charset="-120"/>
-              </a:rPr>
-              <a:t>THE DIFFERENTIATOR</a:t>
-            </a:r>
-            <a:endParaRPr lang="en-US" sz="1100" dirty="0"/>
-          </a:p>
-        </p:txBody>
-      </p:sp>
-      <p:sp>
-        <p:nvSpPr>
-          <p:cNvPr id="3" name="Text 1"/>
-          <p:cNvSpPr txBox="1"/>
-          <p:nvPr/>
-        </p:nvSpPr>
-        <p:spPr>
-          <a:xfrm>
-            <a:off x="640080" y="868680"/>
-            <a:ext cx="10881360" cy="777240"/>
-          </a:xfrm>
-          <a:prstGeom prst="rect">
-            <a:avLst/>
-          </a:prstGeom>
-          <a:noFill/>
-          <a:ln/>
-        </p:spPr>
-        <p:txBody>
-          <a:bodyPr wrap="square" lIns="0" tIns="0" rIns="0" bIns="0" rtlCol="0" anchor="t"/>
-          <a:lstStyle/>
-          <a:p>
-            <a:pPr indent="0" marL="0">
-              <a:buNone/>
-            </a:pPr>
-            <a:r>
-              <a:rPr lang="en-US" sz="3400" spc="350" kern="0" dirty="0">
-                <a:solidFill>
-                  <a:srgbClr val="141E55"/>
-                </a:solidFill>
-                <a:latin typeface="Calibri" pitchFamily="34" charset="0"/>
-                <a:ea typeface="Calibri" pitchFamily="34" charset="-122"/>
-                <a:cs typeface="Calibri" pitchFamily="34" charset="-120"/>
-              </a:rPr>
-              <a:t>OUR AI OVERRULES ITSELF</a:t>
-            </a:r>
-            <a:endParaRPr lang="en-US" sz="3400" dirty="0"/>
-          </a:p>
-        </p:txBody>
-      </p:sp>
-      <p:sp>
-        <p:nvSpPr>
-          <p:cNvPr id="4" name="Text 2"/>
-          <p:cNvSpPr txBox="1"/>
-          <p:nvPr/>
-        </p:nvSpPr>
-        <p:spPr>
-          <a:xfrm>
-            <a:off x="640080" y="1783080"/>
-            <a:ext cx="10881360" cy="777240"/>
-          </a:xfrm>
-          <a:prstGeom prst="rect">
-            <a:avLst/>
-          </a:prstGeom>
-          <a:noFill/>
-          <a:ln/>
-        </p:spPr>
-        <p:txBody>
-          <a:bodyPr wrap="square" lIns="0" tIns="0" rIns="0" bIns="0" rtlCol="0" anchor="ctr"/>
-          <a:lstStyle/>
-          <a:p>
-            <a:pPr indent="0" marL="0">
-              <a:lnSpc>
-                <a:spcPts val="2400"/>
-              </a:lnSpc>
-              <a:buNone/>
-            </a:pPr>
-            <a:r>
-              <a:rPr lang="en-US" sz="1400" dirty="0">
-                <a:solidFill>
-                  <a:srgbClr val="5E6976"/>
-                </a:solidFill>
-                <a:latin typeface="Calibri" pitchFamily="34" charset="0"/>
-                <a:ea typeface="Calibri" pitchFamily="34" charset="-122"/>
-                <a:cs typeface="Calibri" pitchFamily="34" charset="-120"/>
-              </a:rPr>
-              <a:t>Suitability calls Margarethe a critical breach: 71.46% equity against a 10–30% band. It is right. Relationship objects — she was widowed six months ago and asked that nothing be changed. The gate holds the finding, and gives the RM a different door in.</a:t>
-            </a:r>
-            <a:endParaRPr lang="en-US" sz="1400" dirty="0"/>
-          </a:p>
-        </p:txBody>
-      </p:sp>
       <p:pic>
         <p:nvPicPr>
-          <p:cNvPr id="5" name="Image 0" descr="screens/c-desk.png">    </p:cNvPr>
+          <p:cNvPr id="2" name="Image 0" descr="icons/gate-gold.png">    </p:cNvPr>
           <p:cNvPicPr>
             <a:picLocks noChangeAspect="1"/>
           </p:cNvPicPr>
@@ -4917,6 +5686,150 @@
         </p:blipFill>
         <p:spPr>
           <a:xfrm>
+            <a:off x="640080" y="457200"/>
+            <a:ext cx="274320" cy="274320"/>
+          </a:xfrm>
+          <a:prstGeom prst="rect">
+            <a:avLst/>
+          </a:prstGeom>
+        </p:spPr>
+      </p:pic>
+      <p:sp>
+        <p:nvSpPr>
+          <p:cNvPr id="3" name="Text 0"/>
+          <p:cNvSpPr txBox="1"/>
+          <p:nvPr/>
+        </p:nvSpPr>
+        <p:spPr>
+          <a:xfrm>
+            <a:off x="1024128" y="502920"/>
+            <a:ext cx="8229600" cy="256032"/>
+          </a:xfrm>
+          <a:prstGeom prst="rect">
+            <a:avLst/>
+          </a:prstGeom>
+          <a:noFill/>
+          <a:ln/>
+        </p:spPr>
+        <p:txBody>
+          <a:bodyPr wrap="square" lIns="0" tIns="0" rIns="0" bIns="0" rtlCol="0" anchor="ctr"/>
+          <a:lstStyle/>
+          <a:p>
+            <a:pPr indent="0" marL="0">
+              <a:buNone/>
+            </a:pPr>
+            <a:r>
+              <a:rPr lang="en-US" sz="1300" spc="300" kern="0" dirty="0">
+                <a:solidFill>
+                  <a:srgbClr val="A8322B"/>
+                </a:solidFill>
+                <a:latin typeface="Calibri" pitchFamily="34" charset="0"/>
+                <a:ea typeface="Calibri" pitchFamily="34" charset="-122"/>
+                <a:cs typeface="Calibri" pitchFamily="34" charset="-120"/>
+              </a:rPr>
+              <a:t>THE DIFFERENTIATOR</a:t>
+            </a:r>
+            <a:endParaRPr lang="en-US" sz="1300" dirty="0"/>
+          </a:p>
+        </p:txBody>
+      </p:sp>
+      <p:sp>
+        <p:nvSpPr>
+          <p:cNvPr id="4" name="Text 1"/>
+          <p:cNvSpPr txBox="1"/>
+          <p:nvPr/>
+        </p:nvSpPr>
+        <p:spPr>
+          <a:xfrm>
+            <a:off x="640080" y="868680"/>
+            <a:ext cx="10881360" cy="777240"/>
+          </a:xfrm>
+          <a:prstGeom prst="rect">
+            <a:avLst/>
+          </a:prstGeom>
+          <a:noFill/>
+          <a:ln/>
+        </p:spPr>
+        <p:txBody>
+          <a:bodyPr wrap="square" lIns="0" tIns="0" rIns="0" bIns="0" rtlCol="0" anchor="t"/>
+          <a:lstStyle/>
+          <a:p>
+            <a:pPr indent="0" marL="0">
+              <a:buNone/>
+            </a:pPr>
+            <a:r>
+              <a:rPr lang="en-US" sz="3400" spc="350" kern="0" dirty="0">
+                <a:solidFill>
+                  <a:srgbClr val="141E55"/>
+                </a:solidFill>
+                <a:latin typeface="Calibri" pitchFamily="34" charset="0"/>
+                <a:ea typeface="Calibri" pitchFamily="34" charset="-122"/>
+                <a:cs typeface="Calibri" pitchFamily="34" charset="-120"/>
+              </a:rPr>
+              <a:t>OUR AI OVERRULES ITSELF</a:t>
+            </a:r>
+            <a:endParaRPr lang="en-US" sz="3400" dirty="0"/>
+          </a:p>
+        </p:txBody>
+      </p:sp>
+      <p:sp>
+        <p:nvSpPr>
+          <p:cNvPr id="5" name="Text 2"/>
+          <p:cNvSpPr txBox="1"/>
+          <p:nvPr/>
+        </p:nvSpPr>
+        <p:spPr>
+          <a:xfrm>
+            <a:off x="640080" y="1783080"/>
+            <a:ext cx="10881360" cy="777240"/>
+          </a:xfrm>
+          <a:prstGeom prst="rect">
+            <a:avLst/>
+          </a:prstGeom>
+          <a:noFill/>
+          <a:ln/>
+        </p:spPr>
+        <p:txBody>
+          <a:bodyPr wrap="square" lIns="0" tIns="0" rIns="0" bIns="0" rtlCol="0" anchor="ctr"/>
+          <a:lstStyle/>
+          <a:p>
+            <a:pPr indent="0" marL="0">
+              <a:lnSpc>
+                <a:spcPts val="2400"/>
+              </a:lnSpc>
+              <a:buNone/>
+            </a:pPr>
+            <a:r>
+              <a:rPr lang="en-US" sz="1600" dirty="0">
+                <a:solidFill>
+                  <a:srgbClr val="5E6976"/>
+                </a:solidFill>
+                <a:latin typeface="Calibri" pitchFamily="34" charset="0"/>
+                <a:ea typeface="Calibri" pitchFamily="34" charset="-122"/>
+                <a:cs typeface="Calibri" pitchFamily="34" charset="-120"/>
+              </a:rPr>
+              <a:t>Suitability calls Margarethe a critical breach: 71.46% equity against a 10–30% band. It is right. Relationship objects — she was widowed six months ago and asked that nothing be changed. The gate holds the finding, and gives the RM a different door in.</a:t>
+            </a:r>
+            <a:endParaRPr lang="en-US" sz="1600" dirty="0"/>
+          </a:p>
+        </p:txBody>
+      </p:sp>
+      <p:pic>
+        <p:nvPicPr>
+          <p:cNvPr id="6" name="Image 1" descr="screens/c-desk.png">    </p:cNvPr>
+          <p:cNvPicPr>
+            <a:picLocks noChangeAspect="1"/>
+          </p:cNvPicPr>
+          <p:nvPr/>
+        </p:nvPicPr>
+        <p:blipFill>
+          <a:blip r:embed="rId2"/>
+          <a:stretch>
+            <a:fillRect/>
+          </a:stretch>
+        </p:blipFill>
+        <p:spPr>
+          <a:xfrm>
             <a:off x="1764792" y="2697480"/>
             <a:ext cx="8659368" cy="3611880"/>
           </a:xfrm>
@@ -4927,7 +5840,7 @@
       </p:pic>
       <p:sp>
         <p:nvSpPr>
-          <p:cNvPr id="6" name="Text 3"/>
+          <p:cNvPr id="7" name="Text 3"/>
           <p:cNvSpPr txBox="1"/>
           <p:nvPr/>
         </p:nvSpPr>
@@ -4950,7 +5863,7 @@
               <a:buNone/>
             </a:pPr>
             <a:r>
-              <a:rPr lang="en-US" sz="950" dirty="0">
+              <a:rPr lang="en-US" sz="1150" dirty="0">
                 <a:solidFill>
                   <a:srgbClr val="8B96A3"/>
                 </a:solidFill>
@@ -4960,7 +5873,7 @@
               </a:rPr>
               <a:t>Screen: The Desk — every objection is extracted from a dated, attributed RM note</a:t>
             </a:r>
-            <a:endParaRPr lang="en-US" sz="950" dirty="0"/>
+            <a:endParaRPr lang="en-US" sz="1150" dirty="0"/>
           </a:p>
         </p:txBody>
       </p:sp>
@@ -5021,7 +5934,7 @@
               <a:buNone/>
             </a:pPr>
             <a:r>
-              <a:rPr lang="en-US" sz="1100" spc="300" kern="0" dirty="0">
+              <a:rPr lang="en-US" sz="1300" spc="300" kern="0" dirty="0">
                 <a:solidFill>
                   <a:srgbClr val="A68430"/>
                 </a:solidFill>
@@ -5031,7 +5944,7 @@
               </a:rPr>
               <a:t>WHAT COULD HAPPEN NEXT</a:t>
             </a:r>
-            <a:endParaRPr lang="en-US" sz="1100" dirty="0"/>
+            <a:endParaRPr lang="en-US" sz="1300" dirty="0"/>
           </a:p>
         </p:txBody>
       </p:sp>
@@ -5102,7 +6015,7 @@
               <a:buNone/>
             </a:pPr>
             <a:r>
-              <a:rPr lang="en-US" sz="1500" dirty="0">
+              <a:rPr lang="en-US" sz="1650" dirty="0">
                 <a:solidFill>
                   <a:srgbClr val="5E6976"/>
                 </a:solidFill>
@@ -5112,7 +6025,7 @@
               </a:rPr>
               <a:t>His loan is secured on the very thing he is concentrated in.</a:t>
             </a:r>
-            <a:endParaRPr lang="en-US" sz="1500" dirty="0"/>
+            <a:endParaRPr lang="en-US" sz="1650" dirty="0"/>
           </a:p>
           <a:p>
             <a:pPr indent="0" marL="0">
@@ -5122,7 +6035,7 @@
               <a:buNone/>
             </a:pPr>
             <a:r>
-              <a:rPr lang="en-US" sz="1500" dirty="0">
+              <a:rPr lang="en-US" sz="1650" dirty="0">
                 <a:solidFill>
                   <a:srgbClr val="5E6976"/>
                 </a:solidFill>
@@ -5132,7 +6045,7 @@
               </a:rPr>
               <a:t>So the usual remedy — sell something to raise cash — makes</a:t>
             </a:r>
-            <a:endParaRPr lang="en-US" sz="1500" dirty="0"/>
+            <a:endParaRPr lang="en-US" sz="1650" dirty="0"/>
           </a:p>
           <a:p>
             <a:pPr indent="0" marL="0">
@@ -5142,7 +6055,7 @@
               <a:buNone/>
             </a:pPr>
             <a:r>
-              <a:rPr lang="en-US" sz="1500" dirty="0">
+              <a:rPr lang="en-US" sz="1650" dirty="0">
                 <a:solidFill>
                   <a:srgbClr val="5E6976"/>
                 </a:solidFill>
@@ -5152,7 +6065,7 @@
               </a:rPr>
               <a:t>the ratio worse, not better.</a:t>
             </a:r>
-            <a:endParaRPr lang="en-US" sz="1500" dirty="0"/>
+            <a:endParaRPr lang="en-US" sz="1650" dirty="0"/>
           </a:p>
         </p:txBody>
       </p:sp>
@@ -5181,7 +6094,7 @@
               <a:buNone/>
             </a:pPr>
             <a:r>
-              <a:rPr lang="en-US" sz="1400" dirty="0">
+              <a:rPr lang="en-US" sz="1600" dirty="0">
                 <a:solidFill>
                   <a:srgbClr val="5E6976"/>
                 </a:solidFill>
@@ -5191,7 +6104,7 @@
               </a:rPr>
               <a:t>Today</a:t>
             </a:r>
-            <a:endParaRPr lang="en-US" sz="1400" dirty="0"/>
+            <a:endParaRPr lang="en-US" sz="1600" dirty="0"/>
           </a:p>
         </p:txBody>
       </p:sp>
@@ -5259,7 +6172,7 @@
               <a:buNone/>
             </a:pPr>
             <a:r>
-              <a:rPr lang="en-US" sz="1400" dirty="0">
+              <a:rPr lang="en-US" sz="1600" dirty="0">
                 <a:solidFill>
                   <a:srgbClr val="5E6976"/>
                 </a:solidFill>
@@ -5269,7 +6182,7 @@
               </a:rPr>
               <a:t>−5%</a:t>
             </a:r>
-            <a:endParaRPr lang="en-US" sz="1400" dirty="0"/>
+            <a:endParaRPr lang="en-US" sz="1600" dirty="0"/>
           </a:p>
         </p:txBody>
       </p:sp>
@@ -5337,7 +6250,7 @@
               <a:buNone/>
             </a:pPr>
             <a:r>
-              <a:rPr lang="en-US" sz="1100" spc="100" kern="0" dirty="0">
+              <a:rPr lang="en-US" sz="1300" spc="100" kern="0" dirty="0">
                 <a:solidFill>
                   <a:srgbClr val="A8322B"/>
                 </a:solidFill>
@@ -5347,7 +6260,7 @@
               </a:rPr>
               <a:t>margin call</a:t>
             </a:r>
-            <a:endParaRPr lang="en-US" sz="1100" dirty="0"/>
+            <a:endParaRPr lang="en-US" sz="1300" dirty="0"/>
           </a:p>
         </p:txBody>
       </p:sp>
@@ -5376,7 +6289,7 @@
               <a:buNone/>
             </a:pPr>
             <a:r>
-              <a:rPr lang="en-US" sz="1400" dirty="0">
+              <a:rPr lang="en-US" sz="1600" dirty="0">
                 <a:solidFill>
                   <a:srgbClr val="5E6976"/>
                 </a:solidFill>
@@ -5386,7 +6299,7 @@
               </a:rPr>
               <a:t>−10%</a:t>
             </a:r>
-            <a:endParaRPr lang="en-US" sz="1400" dirty="0"/>
+            <a:endParaRPr lang="en-US" sz="1600" dirty="0"/>
           </a:p>
         </p:txBody>
       </p:sp>
@@ -5454,7 +6367,7 @@
               <a:buNone/>
             </a:pPr>
             <a:r>
-              <a:rPr lang="en-US" sz="1100" spc="100" kern="0" dirty="0">
+              <a:rPr lang="en-US" sz="1300" spc="100" kern="0" dirty="0">
                 <a:solidFill>
                   <a:srgbClr val="A8322B"/>
                 </a:solidFill>
@@ -5464,7 +6377,7 @@
               </a:rPr>
               <a:t>margin call</a:t>
             </a:r>
-            <a:endParaRPr lang="en-US" sz="1100" dirty="0"/>
+            <a:endParaRPr lang="en-US" sz="1300" dirty="0"/>
           </a:p>
         </p:txBody>
       </p:sp>
@@ -5493,7 +6406,7 @@
               <a:buNone/>
             </a:pPr>
             <a:r>
-              <a:rPr lang="en-US" sz="1400" dirty="0">
+              <a:rPr lang="en-US" sz="1600" dirty="0">
                 <a:solidFill>
                   <a:srgbClr val="5E6976"/>
                 </a:solidFill>
@@ -5503,7 +6416,7 @@
               </a:rPr>
               <a:t>−20%</a:t>
             </a:r>
-            <a:endParaRPr lang="en-US" sz="1400" dirty="0"/>
+            <a:endParaRPr lang="en-US" sz="1600" dirty="0"/>
           </a:p>
         </p:txBody>
       </p:sp>
@@ -5571,7 +6484,7 @@
               <a:buNone/>
             </a:pPr>
             <a:r>
-              <a:rPr lang="en-US" sz="1100" spc="100" kern="0" dirty="0">
+              <a:rPr lang="en-US" sz="1300" spc="100" kern="0" dirty="0">
                 <a:solidFill>
                   <a:srgbClr val="A8322B"/>
                 </a:solidFill>
@@ -5581,7 +6494,7 @@
               </a:rPr>
               <a:t>margin call</a:t>
             </a:r>
-            <a:endParaRPr lang="en-US" sz="1100" dirty="0"/>
+            <a:endParaRPr lang="en-US" sz="1300" dirty="0"/>
           </a:p>
         </p:txBody>
       </p:sp>
@@ -5634,7 +6547,7 @@
               <a:buNone/>
             </a:pPr>
             <a:r>
-              <a:rPr lang="en-US" sz="1300" spc="100" kern="0" dirty="0">
+              <a:rPr lang="en-US" sz="1450" spc="100" kern="0" dirty="0">
                 <a:solidFill>
                   <a:srgbClr val="A68430"/>
                 </a:solidFill>
@@ -5644,7 +6557,7 @@
               </a:rPr>
               <a:t>Computed from real lending values — not typed in.</a:t>
             </a:r>
-            <a:endParaRPr lang="en-US" sz="1300" dirty="0"/>
+            <a:endParaRPr lang="en-US" sz="1450" dirty="0"/>
           </a:p>
         </p:txBody>
       </p:sp>
@@ -5659,6 +6572,620 @@
 <file path=ppt/slides/slide8.xml><?xml version="1.0" encoding="utf-8"?>
 <p:sld xmlns:a="http://schemas.openxmlformats.org/drawingml/2006/main" xmlns:r="http://schemas.openxmlformats.org/officeDocument/2006/relationships" xmlns:p="http://schemas.openxmlformats.org/presentationml/2006/main">
   <p:cSld name="Slide 8">
+    <p:bg>
+      <p:bgPr>
+        <a:solidFill>
+          <a:srgbClr val="FFFFFF"/>
+        </a:solidFill>
+      </p:bgPr>
+    </p:bg>
+    <p:spTree>
+      <p:nvGrpSpPr>
+        <p:cNvPr id="1" name=""/>
+        <p:cNvGrpSpPr/>
+        <p:nvPr/>
+      </p:nvGrpSpPr>
+      <p:grpSpPr>
+        <a:xfrm>
+          <a:off x="0" y="0"/>
+          <a:ext cx="0" cy="0"/>
+          <a:chOff x="0" y="0"/>
+          <a:chExt cx="0" cy="0"/>
+        </a:xfrm>
+      </p:grpSpPr>
+      <p:pic>
+        <p:nvPicPr>
+          <p:cNvPr id="2" name="Image 0" descr="icons/bell-gold.png">    </p:cNvPr>
+          <p:cNvPicPr>
+            <a:picLocks noChangeAspect="1"/>
+          </p:cNvPicPr>
+          <p:nvPr/>
+        </p:nvPicPr>
+        <p:blipFill>
+          <a:blip r:embed="rId1"/>
+          <a:stretch>
+            <a:fillRect/>
+          </a:stretch>
+        </p:blipFill>
+        <p:spPr>
+          <a:xfrm>
+            <a:off x="640080" y="457200"/>
+            <a:ext cx="274320" cy="274320"/>
+          </a:xfrm>
+          <a:prstGeom prst="rect">
+            <a:avLst/>
+          </a:prstGeom>
+        </p:spPr>
+      </p:pic>
+      <p:sp>
+        <p:nvSpPr>
+          <p:cNvPr id="3" name="Text 0"/>
+          <p:cNvSpPr txBox="1"/>
+          <p:nvPr/>
+        </p:nvSpPr>
+        <p:spPr>
+          <a:xfrm>
+            <a:off x="1024128" y="502920"/>
+            <a:ext cx="8229600" cy="256032"/>
+          </a:xfrm>
+          <a:prstGeom prst="rect">
+            <a:avLst/>
+          </a:prstGeom>
+          <a:noFill/>
+          <a:ln/>
+        </p:spPr>
+        <p:txBody>
+          <a:bodyPr wrap="square" lIns="0" tIns="0" rIns="0" bIns="0" rtlCol="0" anchor="ctr"/>
+          <a:lstStyle/>
+          <a:p>
+            <a:pPr indent="0" marL="0">
+              <a:buNone/>
+            </a:pPr>
+            <a:r>
+              <a:rPr lang="en-US" sz="1300" spc="300" kern="0" dirty="0">
+                <a:solidFill>
+                  <a:srgbClr val="A68430"/>
+                </a:solidFill>
+                <a:latin typeface="Calibri" pitchFamily="34" charset="0"/>
+                <a:ea typeface="Calibri" pitchFamily="34" charset="-122"/>
+                <a:cs typeface="Calibri" pitchFamily="34" charset="-120"/>
+              </a:rPr>
+              <a:t>THE OTHER HALF OF THE JOB</a:t>
+            </a:r>
+            <a:endParaRPr lang="en-US" sz="1300" dirty="0"/>
+          </a:p>
+        </p:txBody>
+      </p:sp>
+      <p:sp>
+        <p:nvSpPr>
+          <p:cNvPr id="4" name="Text 1"/>
+          <p:cNvSpPr txBox="1"/>
+          <p:nvPr/>
+        </p:nvSpPr>
+        <p:spPr>
+          <a:xfrm>
+            <a:off x="640080" y="868680"/>
+            <a:ext cx="10881360" cy="777240"/>
+          </a:xfrm>
+          <a:prstGeom prst="rect">
+            <a:avLst/>
+          </a:prstGeom>
+          <a:noFill/>
+          <a:ln/>
+        </p:spPr>
+        <p:txBody>
+          <a:bodyPr wrap="square" lIns="0" tIns="0" rIns="0" bIns="0" rtlCol="0" anchor="t"/>
+          <a:lstStyle/>
+          <a:p>
+            <a:pPr indent="0" marL="0">
+              <a:buNone/>
+            </a:pPr>
+            <a:r>
+              <a:rPr lang="en-US" sz="3400" spc="350" kern="0" dirty="0">
+                <a:solidFill>
+                  <a:srgbClr val="141E55"/>
+                </a:solidFill>
+                <a:latin typeface="Calibri" pitchFamily="34" charset="0"/>
+                <a:ea typeface="Calibri" pitchFamily="34" charset="-122"/>
+                <a:cs typeface="Calibri" pitchFamily="34" charset="-120"/>
+              </a:rPr>
+              <a:t>NOT EVERY REASON TO CALL IS A RISK</a:t>
+            </a:r>
+            <a:endParaRPr lang="en-US" sz="3400" dirty="0"/>
+          </a:p>
+        </p:txBody>
+      </p:sp>
+      <p:sp>
+        <p:nvSpPr>
+          <p:cNvPr id="5" name="Text 2"/>
+          <p:cNvSpPr txBox="1"/>
+          <p:nvPr/>
+        </p:nvSpPr>
+        <p:spPr>
+          <a:xfrm>
+            <a:off x="640080" y="1828800"/>
+            <a:ext cx="5852160" cy="1005840"/>
+          </a:xfrm>
+          <a:prstGeom prst="rect">
+            <a:avLst/>
+          </a:prstGeom>
+          <a:noFill/>
+          <a:ln/>
+        </p:spPr>
+        <p:txBody>
+          <a:bodyPr wrap="square" lIns="0" tIns="0" rIns="0" bIns="0" rtlCol="0" anchor="ctr"/>
+          <a:lstStyle/>
+          <a:p>
+            <a:pPr indent="0" marL="0">
+              <a:lnSpc>
+                <a:spcPts val="2600"/>
+              </a:lnSpc>
+              <a:buNone/>
+            </a:pPr>
+            <a:r>
+              <a:rPr lang="en-US" sz="1600" dirty="0">
+                <a:solidFill>
+                  <a:srgbClr val="5E6976"/>
+                </a:solidFill>
+                <a:latin typeface="Calibri" pitchFamily="34" charset="0"/>
+                <a:ea typeface="Calibri" pitchFamily="34" charset="-122"/>
+                <a:cs typeface="Calibri" pitchFamily="34" charset="-120"/>
+              </a:rPr>
+              <a:t>A risk engine only ever tells her something is wrong. Most of an RM’s job is the opposite — the client she has not spoken to in six months, the review falling due, the festival worth a note in their own language.</a:t>
+            </a:r>
+            <a:endParaRPr lang="en-US" sz="1600" dirty="0"/>
+          </a:p>
+        </p:txBody>
+      </p:sp>
+      <p:sp>
+        <p:nvSpPr>
+          <p:cNvPr id="6" name="Shape 3"/>
+          <p:cNvSpPr/>
+          <p:nvPr/>
+        </p:nvSpPr>
+        <p:spPr>
+          <a:xfrm>
+            <a:off x="640080" y="3063240"/>
+            <a:ext cx="457200" cy="457200"/>
+          </a:xfrm>
+          <a:prstGeom prst="ellipse">
+            <a:avLst/>
+          </a:prstGeom>
+          <a:solidFill>
+            <a:srgbClr val="E6EBF9"/>
+          </a:solidFill>
+          <a:ln/>
+        </p:spPr>
+      </p:sp>
+      <p:pic>
+        <p:nvPicPr>
+          <p:cNvPr id="7" name="Image 1" descr="icons/clock-navy.png">    </p:cNvPr>
+          <p:cNvPicPr>
+            <a:picLocks noChangeAspect="1"/>
+          </p:cNvPicPr>
+          <p:nvPr/>
+        </p:nvPicPr>
+        <p:blipFill>
+          <a:blip r:embed="rId2"/>
+          <a:stretch>
+            <a:fillRect/>
+          </a:stretch>
+        </p:blipFill>
+        <p:spPr>
+          <a:xfrm>
+            <a:off x="740664" y="3163824"/>
+            <a:ext cx="256032" cy="256032"/>
+          </a:xfrm>
+          <a:prstGeom prst="rect">
+            <a:avLst/>
+          </a:prstGeom>
+        </p:spPr>
+      </p:pic>
+      <p:sp>
+        <p:nvSpPr>
+          <p:cNvPr id="8" name="Text 4"/>
+          <p:cNvSpPr txBox="1"/>
+          <p:nvPr/>
+        </p:nvSpPr>
+        <p:spPr>
+          <a:xfrm>
+            <a:off x="1280160" y="3026664"/>
+            <a:ext cx="5120640" cy="310896"/>
+          </a:xfrm>
+          <a:prstGeom prst="rect">
+            <a:avLst/>
+          </a:prstGeom>
+          <a:noFill/>
+          <a:ln/>
+        </p:spPr>
+        <p:txBody>
+          <a:bodyPr wrap="square" lIns="0" tIns="0" rIns="0" bIns="0" rtlCol="0" anchor="ctr"/>
+          <a:lstStyle/>
+          <a:p>
+            <a:pPr indent="0" marL="0">
+              <a:buNone/>
+            </a:pPr>
+            <a:r>
+              <a:rPr lang="en-US" sz="1700" dirty="0">
+                <a:solidFill>
+                  <a:srgbClr val="141E55"/>
+                </a:solidFill>
+                <a:latin typeface="Calibri" pitchFamily="34" charset="0"/>
+                <a:ea typeface="Calibri" pitchFamily="34" charset="-122"/>
+                <a:cs typeface="Calibri" pitchFamily="34" charset="-120"/>
+              </a:rPr>
+              <a:t>196 days</a:t>
+            </a:r>
+            <a:endParaRPr lang="en-US" sz="1700" dirty="0"/>
+          </a:p>
+        </p:txBody>
+      </p:sp>
+      <p:sp>
+        <p:nvSpPr>
+          <p:cNvPr id="9" name="Text 5"/>
+          <p:cNvSpPr txBox="1"/>
+          <p:nvPr/>
+        </p:nvSpPr>
+        <p:spPr>
+          <a:xfrm>
+            <a:off x="1280160" y="3355848"/>
+            <a:ext cx="5120640" cy="566928"/>
+          </a:xfrm>
+          <a:prstGeom prst="rect">
+            <a:avLst/>
+          </a:prstGeom>
+          <a:noFill/>
+          <a:ln/>
+        </p:spPr>
+        <p:txBody>
+          <a:bodyPr wrap="square" lIns="0" tIns="0" rIns="0" bIns="0" rtlCol="0" anchor="ctr"/>
+          <a:lstStyle/>
+          <a:p>
+            <a:pPr indent="0" marL="0">
+              <a:lnSpc>
+                <a:spcPts val="1900"/>
+              </a:lnSpc>
+              <a:buNone/>
+            </a:pPr>
+            <a:r>
+              <a:rPr lang="en-US" sz="1300" dirty="0">
+                <a:solidFill>
+                  <a:srgbClr val="5E6976"/>
+                </a:solidFill>
+                <a:latin typeface="Calibri" pitchFamily="34" charset="0"/>
+                <a:ea typeface="Calibri" pitchFamily="34" charset="-122"/>
+                <a:cs typeface="Calibri" pitchFamily="34" charset="-120"/>
+              </a:rPr>
+              <a:t>since anyone spoke to Aishah binti Rahman — USD 19.4m, and nothing is wrong</a:t>
+            </a:r>
+            <a:endParaRPr lang="en-US" sz="1300" dirty="0"/>
+          </a:p>
+        </p:txBody>
+      </p:sp>
+      <p:sp>
+        <p:nvSpPr>
+          <p:cNvPr id="10" name="Shape 6"/>
+          <p:cNvSpPr/>
+          <p:nvPr/>
+        </p:nvSpPr>
+        <p:spPr>
+          <a:xfrm>
+            <a:off x="640080" y="4114800"/>
+            <a:ext cx="457200" cy="457200"/>
+          </a:xfrm>
+          <a:prstGeom prst="ellipse">
+            <a:avLst/>
+          </a:prstGeom>
+          <a:solidFill>
+            <a:srgbClr val="E6EBF9"/>
+          </a:solidFill>
+          <a:ln/>
+        </p:spPr>
+      </p:sp>
+      <p:pic>
+        <p:nvPicPr>
+          <p:cNvPr id="11" name="Image 2" descr="icons/bell-navy.png">    </p:cNvPr>
+          <p:cNvPicPr>
+            <a:picLocks noChangeAspect="1"/>
+          </p:cNvPicPr>
+          <p:nvPr/>
+        </p:nvPicPr>
+        <p:blipFill>
+          <a:blip r:embed="rId3"/>
+          <a:stretch>
+            <a:fillRect/>
+          </a:stretch>
+        </p:blipFill>
+        <p:spPr>
+          <a:xfrm>
+            <a:off x="740664" y="4215384"/>
+            <a:ext cx="256032" cy="256032"/>
+          </a:xfrm>
+          <a:prstGeom prst="rect">
+            <a:avLst/>
+          </a:prstGeom>
+        </p:spPr>
+      </p:pic>
+      <p:sp>
+        <p:nvSpPr>
+          <p:cNvPr id="12" name="Text 7"/>
+          <p:cNvSpPr txBox="1"/>
+          <p:nvPr/>
+        </p:nvSpPr>
+        <p:spPr>
+          <a:xfrm>
+            <a:off x="1280160" y="4078224"/>
+            <a:ext cx="5120640" cy="310896"/>
+          </a:xfrm>
+          <a:prstGeom prst="rect">
+            <a:avLst/>
+          </a:prstGeom>
+          <a:noFill/>
+          <a:ln/>
+        </p:spPr>
+        <p:txBody>
+          <a:bodyPr wrap="square" lIns="0" tIns="0" rIns="0" bIns="0" rtlCol="0" anchor="ctr"/>
+          <a:lstStyle/>
+          <a:p>
+            <a:pPr indent="0" marL="0">
+              <a:buNone/>
+            </a:pPr>
+            <a:r>
+              <a:rPr lang="en-US" sz="1700" dirty="0">
+                <a:solidFill>
+                  <a:srgbClr val="141E55"/>
+                </a:solidFill>
+                <a:latin typeface="Calibri" pitchFamily="34" charset="0"/>
+                <a:ea typeface="Calibri" pitchFamily="34" charset="-122"/>
+                <a:cs typeface="Calibri" pitchFamily="34" charset="-120"/>
+              </a:rPr>
+              <a:t>5 days</a:t>
+            </a:r>
+            <a:endParaRPr lang="en-US" sz="1700" dirty="0"/>
+          </a:p>
+        </p:txBody>
+      </p:sp>
+      <p:sp>
+        <p:nvSpPr>
+          <p:cNvPr id="13" name="Text 8"/>
+          <p:cNvSpPr txBox="1"/>
+          <p:nvPr/>
+        </p:nvSpPr>
+        <p:spPr>
+          <a:xfrm>
+            <a:off x="1280160" y="4407408"/>
+            <a:ext cx="5120640" cy="566928"/>
+          </a:xfrm>
+          <a:prstGeom prst="rect">
+            <a:avLst/>
+          </a:prstGeom>
+          <a:noFill/>
+          <a:ln/>
+        </p:spPr>
+        <p:txBody>
+          <a:bodyPr wrap="square" lIns="0" tIns="0" rIns="0" bIns="0" rtlCol="0" anchor="ctr"/>
+          <a:lstStyle/>
+          <a:p>
+            <a:pPr indent="0" marL="0">
+              <a:lnSpc>
+                <a:spcPts val="1900"/>
+              </a:lnSpc>
+              <a:buNone/>
+            </a:pPr>
+            <a:r>
+              <a:rPr lang="en-US" sz="1300" dirty="0">
+                <a:solidFill>
+                  <a:srgbClr val="5E6976"/>
+                </a:solidFill>
+                <a:latin typeface="Calibri" pitchFamily="34" charset="0"/>
+                <a:ea typeface="Calibri" pitchFamily="34" charset="-122"/>
+                <a:cs typeface="Calibri" pitchFamily="34" charset="-120"/>
+              </a:rPr>
+              <a:t>until Tan Boon Huat’s review falls due, on the anniversary of a 23-year relationship</a:t>
+            </a:r>
+            <a:endParaRPr lang="en-US" sz="1300" dirty="0"/>
+          </a:p>
+        </p:txBody>
+      </p:sp>
+      <p:sp>
+        <p:nvSpPr>
+          <p:cNvPr id="14" name="Shape 9"/>
+          <p:cNvSpPr/>
+          <p:nvPr/>
+        </p:nvSpPr>
+        <p:spPr>
+          <a:xfrm>
+            <a:off x="640080" y="5166360"/>
+            <a:ext cx="457200" cy="457200"/>
+          </a:xfrm>
+          <a:prstGeom prst="ellipse">
+            <a:avLst/>
+          </a:prstGeom>
+          <a:solidFill>
+            <a:srgbClr val="E6EBF9"/>
+          </a:solidFill>
+          <a:ln/>
+        </p:spPr>
+      </p:sp>
+      <p:pic>
+        <p:nvPicPr>
+          <p:cNvPr id="15" name="Image 3" descr="icons/globe-navy.png">    </p:cNvPr>
+          <p:cNvPicPr>
+            <a:picLocks noChangeAspect="1"/>
+          </p:cNvPicPr>
+          <p:nvPr/>
+        </p:nvPicPr>
+        <p:blipFill>
+          <a:blip r:embed="rId4"/>
+          <a:stretch>
+            <a:fillRect/>
+          </a:stretch>
+        </p:blipFill>
+        <p:spPr>
+          <a:xfrm>
+            <a:off x="740664" y="5266944"/>
+            <a:ext cx="256032" cy="256032"/>
+          </a:xfrm>
+          <a:prstGeom prst="rect">
+            <a:avLst/>
+          </a:prstGeom>
+        </p:spPr>
+      </p:pic>
+      <p:sp>
+        <p:nvSpPr>
+          <p:cNvPr id="16" name="Text 10"/>
+          <p:cNvSpPr txBox="1"/>
+          <p:nvPr/>
+        </p:nvSpPr>
+        <p:spPr>
+          <a:xfrm>
+            <a:off x="1280160" y="5129784"/>
+            <a:ext cx="5120640" cy="310896"/>
+          </a:xfrm>
+          <a:prstGeom prst="rect">
+            <a:avLst/>
+          </a:prstGeom>
+          <a:noFill/>
+          <a:ln/>
+        </p:spPr>
+        <p:txBody>
+          <a:bodyPr wrap="square" lIns="0" tIns="0" rIns="0" bIns="0" rtlCol="0" anchor="ctr"/>
+          <a:lstStyle/>
+          <a:p>
+            <a:pPr indent="0" marL="0">
+              <a:buNone/>
+            </a:pPr>
+            <a:r>
+              <a:rPr lang="en-US" sz="1700" dirty="0">
+                <a:solidFill>
+                  <a:srgbClr val="141E55"/>
+                </a:solidFill>
+                <a:latin typeface="Calibri" pitchFamily="34" charset="0"/>
+                <a:ea typeface="Calibri" pitchFamily="34" charset="-122"/>
+                <a:cs typeface="Calibri" pitchFamily="34" charset="-120"/>
+              </a:rPr>
+              <a:t>Mid-Autumn</a:t>
+            </a:r>
+            <a:endParaRPr lang="en-US" sz="1700" dirty="0"/>
+          </a:p>
+        </p:txBody>
+      </p:sp>
+      <p:sp>
+        <p:nvSpPr>
+          <p:cNvPr id="17" name="Text 11"/>
+          <p:cNvSpPr txBox="1"/>
+          <p:nvPr/>
+        </p:nvSpPr>
+        <p:spPr>
+          <a:xfrm>
+            <a:off x="1280160" y="5458968"/>
+            <a:ext cx="5120640" cy="566928"/>
+          </a:xfrm>
+          <a:prstGeom prst="rect">
+            <a:avLst/>
+          </a:prstGeom>
+          <a:noFill/>
+          <a:ln/>
+        </p:spPr>
+        <p:txBody>
+          <a:bodyPr wrap="square" lIns="0" tIns="0" rIns="0" bIns="0" rtlCol="0" anchor="ctr"/>
+          <a:lstStyle/>
+          <a:p>
+            <a:pPr indent="0" marL="0">
+              <a:lnSpc>
+                <a:spcPts val="1900"/>
+              </a:lnSpc>
+              <a:buNone/>
+            </a:pPr>
+            <a:r>
+              <a:rPr lang="en-US" sz="1300" dirty="0">
+                <a:solidFill>
+                  <a:srgbClr val="5E6976"/>
+                </a:solidFill>
+                <a:latin typeface="Calibri" pitchFamily="34" charset="0"/>
+                <a:ea typeface="Calibri" pitchFamily="34" charset="-122"/>
+                <a:cs typeface="Calibri" pitchFamily="34" charset="-120"/>
+              </a:rPr>
+              <a:t>drafted in Traditional and Simplified Chinese for the clients booked where it is a holiday</a:t>
+            </a:r>
+            <a:endParaRPr lang="en-US" sz="1300" dirty="0"/>
+          </a:p>
+        </p:txBody>
+      </p:sp>
+      <p:pic>
+        <p:nvPicPr>
+          <p:cNvPr id="18" name="Image 4" descr="screens/c-concierge.png">    </p:cNvPr>
+          <p:cNvPicPr>
+            <a:picLocks noChangeAspect="1"/>
+          </p:cNvPicPr>
+          <p:nvPr/>
+        </p:nvPicPr>
+        <p:blipFill>
+          <a:blip r:embed="rId5"/>
+          <a:stretch>
+            <a:fillRect/>
+          </a:stretch>
+        </p:blipFill>
+        <p:spPr>
+          <a:xfrm>
+            <a:off x="7360920" y="1371600"/>
+            <a:ext cx="2331720" cy="4782312"/>
+          </a:xfrm>
+          <a:prstGeom prst="rect">
+            <a:avLst/>
+          </a:prstGeom>
+        </p:spPr>
+      </p:pic>
+      <p:sp>
+        <p:nvSpPr>
+          <p:cNvPr id="19" name="Text 12"/>
+          <p:cNvSpPr txBox="1"/>
+          <p:nvPr/>
+        </p:nvSpPr>
+        <p:spPr>
+          <a:xfrm>
+            <a:off x="640080" y="6355080"/>
+            <a:ext cx="10881360" cy="274320"/>
+          </a:xfrm>
+          <a:prstGeom prst="rect">
+            <a:avLst/>
+          </a:prstGeom>
+          <a:noFill/>
+          <a:ln/>
+        </p:spPr>
+        <p:txBody>
+          <a:bodyPr wrap="square" lIns="0" tIns="0" rIns="0" bIns="0" rtlCol="0" anchor="ctr"/>
+          <a:lstStyle/>
+          <a:p>
+            <a:pPr indent="0" marL="0">
+              <a:buNone/>
+            </a:pPr>
+            <a:r>
+              <a:rPr lang="en-US" sz="1150" dirty="0">
+                <a:solidFill>
+                  <a:srgbClr val="8B96A3"/>
+                </a:solidFill>
+                <a:latin typeface="Calibri" pitchFamily="34" charset="0"/>
+                <a:ea typeface="Calibri" pitchFamily="34" charset="-122"/>
+                <a:cs typeface="Calibri" pitchFamily="34" charset="-120"/>
+              </a:rPr>
+              <a:t>Screen: Relationship Concierge — contact gaps, compliance dates and greetings, in one panel</a:t>
+            </a:r>
+            <a:endParaRPr lang="en-US" sz="1150" dirty="0"/>
+          </a:p>
+        </p:txBody>
+      </p:sp>
+    </p:spTree>
+  </p:cSld>
+  <p:clrMapOvr>
+    <a:masterClrMapping/>
+  </p:clrMapOvr>
+</p:sld>
+</file>
+
+<file path=ppt/slides/slide9.xml><?xml version="1.0" encoding="utf-8"?>
+<p:sld xmlns:a="http://schemas.openxmlformats.org/drawingml/2006/main" xmlns:r="http://schemas.openxmlformats.org/officeDocument/2006/relationships" xmlns:p="http://schemas.openxmlformats.org/presentationml/2006/main">
+  <p:cSld name="Slide 9">
     <p:bg>
       <p:bgPr>
         <a:solidFill>
@@ -5705,7 +7232,7 @@
               <a:buNone/>
             </a:pPr>
             <a:r>
-              <a:rPr lang="en-US" sz="1100" spc="300" kern="0" dirty="0">
+              <a:rPr lang="en-US" sz="1300" spc="300" kern="0" dirty="0">
                 <a:solidFill>
                   <a:srgbClr val="A68430"/>
                 </a:solidFill>
@@ -5715,7 +7242,7 @@
               </a:rPr>
               <a:t>WHY A BANK COULD RUN THIS</a:t>
             </a:r>
-            <a:endParaRPr lang="en-US" sz="1100" dirty="0"/>
+            <a:endParaRPr lang="en-US" sz="1300" dirty="0"/>
           </a:p>
         </p:txBody>
       </p:sp>
@@ -5825,7 +7352,7 @@
               <a:buNone/>
             </a:pPr>
             <a:r>
-              <a:rPr lang="en-US" sz="1350" dirty="0">
+              <a:rPr lang="en-US" sz="1500" dirty="0">
                 <a:solidFill>
                   <a:srgbClr val="5E6976"/>
                 </a:solidFill>
@@ -5835,7 +7362,7 @@
               </a:rPr>
               <a:t>deliberate data traps in the dataset, each handled in named code</a:t>
             </a:r>
-            <a:endParaRPr lang="en-US" sz="1350" dirty="0"/>
+            <a:endParaRPr lang="en-US" sz="1500" dirty="0"/>
           </a:p>
         </p:txBody>
       </p:sp>
@@ -5906,7 +7433,7 @@
               <a:buNone/>
             </a:pPr>
             <a:r>
-              <a:rPr lang="en-US" sz="1350" dirty="0">
+              <a:rPr lang="en-US" sz="1500" dirty="0">
                 <a:solidFill>
                   <a:srgbClr val="5E6976"/>
                 </a:solidFill>
@@ -5916,7 +7443,7 @@
               </a:rPr>
               <a:t>findings, every one carrying its file, row and dated note</a:t>
             </a:r>
-            <a:endParaRPr lang="en-US" sz="1350" dirty="0"/>
+            <a:endParaRPr lang="en-US" sz="1500" dirty="0"/>
           </a:p>
         </p:txBody>
       </p:sp>
@@ -5987,7 +7514,7 @@
               <a:buNone/>
             </a:pPr>
             <a:r>
-              <a:rPr lang="en-US" sz="1350" dirty="0">
+              <a:rPr lang="en-US" sz="1500" dirty="0">
                 <a:solidFill>
                   <a:srgbClr val="5E6976"/>
                 </a:solidFill>
@@ -5997,7 +7524,7 @@
               </a:rPr>
               <a:t>command — python backend/verify.py — prints every claim with its source rows</a:t>
             </a:r>
-            <a:endParaRPr lang="en-US" sz="1350" dirty="0"/>
+            <a:endParaRPr lang="en-US" sz="1500" dirty="0"/>
           </a:p>
         </p:txBody>
       </p:sp>
@@ -6053,7 +7580,7 @@
               <a:buNone/>
             </a:pPr>
             <a:r>
-              <a:rPr lang="en-US" sz="1400" i="1" dirty="0">
+              <a:rPr lang="en-US" sz="1600" i="1" dirty="0">
                 <a:solidFill>
                   <a:srgbClr val="141E55"/>
                 </a:solidFill>
@@ -6063,355 +7590,7 @@
               </a:rPr>
               <a:t>Custody accounts carry no mandate. A documented waiver is not a breach. Missing cost basis means we decline to quote a gain.</a:t>
             </a:r>
-            <a:endParaRPr lang="en-US" sz="1400" dirty="0"/>
-          </a:p>
-        </p:txBody>
-      </p:sp>
-    </p:spTree>
-  </p:cSld>
-  <p:clrMapOvr>
-    <a:masterClrMapping/>
-  </p:clrMapOvr>
-</p:sld>
-</file>
-
-<file path=ppt/slides/slide9.xml><?xml version="1.0" encoding="utf-8"?>
-<p:sld xmlns:a="http://schemas.openxmlformats.org/drawingml/2006/main" xmlns:r="http://schemas.openxmlformats.org/officeDocument/2006/relationships" xmlns:p="http://schemas.openxmlformats.org/presentationml/2006/main">
-  <p:cSld name="Slide 9">
-    <p:bg>
-      <p:bgPr>
-        <a:solidFill>
-          <a:srgbClr val="FFFFFF"/>
-        </a:solidFill>
-      </p:bgPr>
-    </p:bg>
-    <p:spTree>
-      <p:nvGrpSpPr>
-        <p:cNvPr id="1" name=""/>
-        <p:cNvGrpSpPr/>
-        <p:nvPr/>
-      </p:nvGrpSpPr>
-      <p:grpSpPr>
-        <a:xfrm>
-          <a:off x="0" y="0"/>
-          <a:ext cx="0" cy="0"/>
-          <a:chOff x="0" y="0"/>
-          <a:chExt cx="0" cy="0"/>
-        </a:xfrm>
-      </p:grpSpPr>
-      <p:sp>
-        <p:nvSpPr>
-          <p:cNvPr id="2" name="Text 0"/>
-          <p:cNvSpPr txBox="1"/>
-          <p:nvPr/>
-        </p:nvSpPr>
-        <p:spPr>
-          <a:xfrm>
-            <a:off x="640080" y="502920"/>
-            <a:ext cx="8229600" cy="256032"/>
-          </a:xfrm>
-          <a:prstGeom prst="rect">
-            <a:avLst/>
-          </a:prstGeom>
-          <a:noFill/>
-          <a:ln/>
-        </p:spPr>
-        <p:txBody>
-          <a:bodyPr wrap="square" lIns="0" tIns="0" rIns="0" bIns="0" rtlCol="0" anchor="ctr"/>
-          <a:lstStyle/>
-          <a:p>
-            <a:pPr indent="0" marL="0">
-              <a:buNone/>
-            </a:pPr>
-            <a:r>
-              <a:rPr lang="en-US" sz="1100" spc="300" kern="0" dirty="0">
-                <a:solidFill>
-                  <a:srgbClr val="A68430"/>
-                </a:solidFill>
-                <a:latin typeface="Calibri" pitchFamily="34" charset="0"/>
-                <a:ea typeface="Calibri" pitchFamily="34" charset="-122"/>
-                <a:cs typeface="Calibri" pitchFamily="34" charset="-120"/>
-              </a:rPr>
-              <a:t>STRATEGIC IMPACT</a:t>
-            </a:r>
-            <a:endParaRPr lang="en-US" sz="1100" dirty="0"/>
-          </a:p>
-        </p:txBody>
-      </p:sp>
-      <p:sp>
-        <p:nvSpPr>
-          <p:cNvPr id="3" name="Text 1"/>
-          <p:cNvSpPr txBox="1"/>
-          <p:nvPr/>
-        </p:nvSpPr>
-        <p:spPr>
-          <a:xfrm>
-            <a:off x="640080" y="868680"/>
-            <a:ext cx="10881360" cy="777240"/>
-          </a:xfrm>
-          <a:prstGeom prst="rect">
-            <a:avLst/>
-          </a:prstGeom>
-          <a:noFill/>
-          <a:ln/>
-        </p:spPr>
-        <p:txBody>
-          <a:bodyPr wrap="square" lIns="0" tIns="0" rIns="0" bIns="0" rtlCol="0" anchor="t"/>
-          <a:lstStyle/>
-          <a:p>
-            <a:pPr indent="0" marL="0">
-              <a:buNone/>
-            </a:pPr>
-            <a:r>
-              <a:rPr lang="en-US" sz="3400" spc="350" kern="0" dirty="0">
-                <a:solidFill>
-                  <a:srgbClr val="141E55"/>
-                </a:solidFill>
-                <a:latin typeface="Calibri" pitchFamily="34" charset="0"/>
-                <a:ea typeface="Calibri" pitchFamily="34" charset="-122"/>
-                <a:cs typeface="Calibri" pitchFamily="34" charset="-120"/>
-              </a:rPr>
-              <a:t>THE RELATIONSHIP MANAGER STAYS AT THE CENTRE</a:t>
-            </a:r>
-            <a:endParaRPr lang="en-US" sz="3400" dirty="0"/>
-          </a:p>
-        </p:txBody>
-      </p:sp>
-      <p:sp>
-        <p:nvSpPr>
-          <p:cNvPr id="4" name="Text 2"/>
-          <p:cNvSpPr txBox="1"/>
-          <p:nvPr/>
-        </p:nvSpPr>
-        <p:spPr>
-          <a:xfrm>
-            <a:off x="777240" y="1874520"/>
-            <a:ext cx="4572000" cy="1828800"/>
-          </a:xfrm>
-          <a:prstGeom prst="rect">
-            <a:avLst/>
-          </a:prstGeom>
-          <a:noFill/>
-          <a:ln/>
-        </p:spPr>
-        <p:txBody>
-          <a:bodyPr wrap="square" lIns="0" tIns="0" rIns="0" bIns="0" rtlCol="0" anchor="ctr"/>
-          <a:lstStyle/>
-          <a:p>
-            <a:pPr marL="342900" indent="-342900">
-              <a:spcAft>
-                <a:spcPts val="1200"/>
-              </a:spcAft>
-              <a:buSzPct val="100000"/>
-              <a:buChar char="•"/>
-            </a:pPr>
-            <a:r>
-              <a:rPr lang="en-US" sz="1400" dirty="0">
-                <a:solidFill>
-                  <a:srgbClr val="5E6976"/>
-                </a:solidFill>
-                <a:latin typeface="Calibri" pitchFamily="34" charset="0"/>
-                <a:ea typeface="Calibri" pitchFamily="34" charset="-122"/>
-                <a:cs typeface="Calibri" pitchFamily="34" charset="-120"/>
-              </a:rPr>
-              <a:t>Nothing reaches a client without her approval.</a:t>
-            </a:r>
-            <a:endParaRPr lang="en-US" sz="1400" dirty="0"/>
-          </a:p>
-          <a:p>
-            <a:pPr marL="342900" indent="-342900">
-              <a:spcAft>
-                <a:spcPts val="1200"/>
-              </a:spcAft>
-              <a:buSzPct val="100000"/>
-              <a:buChar char="•"/>
-            </a:pPr>
-            <a:r>
-              <a:rPr lang="en-US" sz="1400" dirty="0">
-                <a:solidFill>
-                  <a:srgbClr val="5E6976"/>
-                </a:solidFill>
-                <a:latin typeface="Calibri" pitchFamily="34" charset="0"/>
-                <a:ea typeface="Calibri" pitchFamily="34" charset="-122"/>
-                <a:cs typeface="Calibri" pitchFamily="34" charset="-120"/>
-              </a:rPr>
-              <a:t>Drafts are written in the client’s own reporting language.</a:t>
-            </a:r>
-            <a:endParaRPr lang="en-US" sz="1400" dirty="0"/>
-          </a:p>
-          <a:p>
-            <a:pPr marL="342900" indent="-342900">
-              <a:spcAft>
-                <a:spcPts val="1200"/>
-              </a:spcAft>
-              <a:buSzPct val="100000"/>
-              <a:buChar char="•"/>
-            </a:pPr>
-            <a:r>
-              <a:rPr lang="en-US" sz="1400" dirty="0">
-                <a:solidFill>
-                  <a:srgbClr val="5E6976"/>
-                </a:solidFill>
-                <a:latin typeface="Calibri" pitchFamily="34" charset="0"/>
-                <a:ea typeface="Calibri" pitchFamily="34" charset="-122"/>
-                <a:cs typeface="Calibri" pitchFamily="34" charset="-120"/>
-              </a:rPr>
-              <a:t>Every approval is stored with the original AI draft beside it.</a:t>
-            </a:r>
-            <a:endParaRPr lang="en-US" sz="1400" dirty="0"/>
-          </a:p>
-          <a:p>
-            <a:pPr marL="342900" indent="-342900">
-              <a:spcAft>
-                <a:spcPts val="1200"/>
-              </a:spcAft>
-              <a:buSzPct val="100000"/>
-              <a:buChar char="•"/>
-            </a:pPr>
-            <a:r>
-              <a:rPr lang="en-US" sz="1400" dirty="0">
-                <a:solidFill>
-                  <a:srgbClr val="5E6976"/>
-                </a:solidFill>
-                <a:latin typeface="Calibri" pitchFamily="34" charset="0"/>
-                <a:ea typeface="Calibri" pitchFamily="34" charset="-122"/>
-                <a:cs typeface="Calibri" pitchFamily="34" charset="-120"/>
-              </a:rPr>
-              <a:t>If she leaves, 23 years of relationship does not leave with her.</a:t>
-            </a:r>
-            <a:endParaRPr lang="en-US" sz="1400" dirty="0"/>
-          </a:p>
-        </p:txBody>
-      </p:sp>
-      <p:sp>
-        <p:nvSpPr>
-          <p:cNvPr id="5" name="Shape 3"/>
-          <p:cNvSpPr/>
-          <p:nvPr/>
-        </p:nvSpPr>
-        <p:spPr>
-          <a:xfrm>
-            <a:off x="640080" y="4023360"/>
-            <a:ext cx="4846320" cy="1737360"/>
-          </a:xfrm>
-          <a:prstGeom prst="roundRect">
-            <a:avLst>
-              <a:gd name="adj" fmla="val 3158"/>
-            </a:avLst>
-          </a:prstGeom>
-          <a:solidFill>
-            <a:srgbClr val="FBF8F0"/>
-          </a:solidFill>
-          <a:ln w="12700">
-            <a:solidFill>
-              <a:srgbClr val="A68430"/>
-            </a:solidFill>
-            <a:prstDash val="solid"/>
-          </a:ln>
-        </p:spPr>
-      </p:sp>
-      <p:sp>
-        <p:nvSpPr>
-          <p:cNvPr id="6" name="Text 4"/>
-          <p:cNvSpPr txBox="1"/>
-          <p:nvPr/>
-        </p:nvSpPr>
-        <p:spPr>
-          <a:xfrm>
-            <a:off x="914400" y="4297680"/>
-            <a:ext cx="4343400" cy="1234440"/>
-          </a:xfrm>
-          <a:prstGeom prst="rect">
-            <a:avLst/>
-          </a:prstGeom>
-          <a:noFill/>
-          <a:ln/>
-        </p:spPr>
-        <p:txBody>
-          <a:bodyPr wrap="square" lIns="0" tIns="0" rIns="0" bIns="0" rtlCol="0" anchor="ctr"/>
-          <a:lstStyle/>
-          <a:p>
-            <a:pPr indent="0" marL="0">
-              <a:lnSpc>
-                <a:spcPts val="2500"/>
-              </a:lnSpc>
-              <a:buNone/>
-            </a:pPr>
-            <a:r>
-              <a:rPr lang="en-US" sz="1500" dirty="0">
-                <a:solidFill>
-                  <a:srgbClr val="141E55"/>
-                </a:solidFill>
-                <a:latin typeface="Calibri" pitchFamily="34" charset="0"/>
-                <a:ea typeface="Calibri" pitchFamily="34" charset="-122"/>
-                <a:cs typeface="Calibri" pitchFamily="34" charset="-120"/>
-              </a:rPr>
-              <a:t>Relationship is the only agent that can veto another. A financial finding can be suppressed by a human fact — never the reverse.</a:t>
-            </a:r>
-            <a:endParaRPr lang="en-US" sz="1500" dirty="0"/>
-          </a:p>
-        </p:txBody>
-      </p:sp>
-      <p:pic>
-        <p:nvPicPr>
-          <p:cNvPr id="7" name="Image 0" descr="screens/c-brief.png">    </p:cNvPr>
-          <p:cNvPicPr>
-            <a:picLocks noChangeAspect="1"/>
-          </p:cNvPicPr>
-          <p:nvPr/>
-        </p:nvPicPr>
-        <p:blipFill>
-          <a:blip r:embed="rId1"/>
-          <a:stretch>
-            <a:fillRect/>
-          </a:stretch>
-        </p:blipFill>
-        <p:spPr>
-          <a:xfrm>
-            <a:off x="5806440" y="1737360"/>
-            <a:ext cx="5760720" cy="2971800"/>
-          </a:xfrm>
-          <a:prstGeom prst="rect">
-            <a:avLst/>
-          </a:prstGeom>
-        </p:spPr>
-      </p:pic>
-      <p:sp>
-        <p:nvSpPr>
-          <p:cNvPr id="8" name="Text 5"/>
-          <p:cNvSpPr txBox="1"/>
-          <p:nvPr/>
-        </p:nvSpPr>
-        <p:spPr>
-          <a:xfrm>
-            <a:off x="640080" y="6355080"/>
-            <a:ext cx="10881360" cy="274320"/>
-          </a:xfrm>
-          <a:prstGeom prst="rect">
-            <a:avLst/>
-          </a:prstGeom>
-          <a:noFill/>
-          <a:ln/>
-        </p:spPr>
-        <p:txBody>
-          <a:bodyPr wrap="square" lIns="0" tIns="0" rIns="0" bIns="0" rtlCol="0" anchor="ctr"/>
-          <a:lstStyle/>
-          <a:p>
-            <a:pPr indent="0" marL="0">
-              <a:buNone/>
-            </a:pPr>
-            <a:r>
-              <a:rPr lang="en-US" sz="950" dirty="0">
-                <a:solidFill>
-                  <a:srgbClr val="8B96A3"/>
-                </a:solidFill>
-                <a:latin typeface="Calibri" pitchFamily="34" charset="0"/>
-                <a:ea typeface="Calibri" pitchFamily="34" charset="-122"/>
-                <a:cs typeface="Calibri" pitchFamily="34" charset="-120"/>
-              </a:rPr>
-              <a:t>Screen: Conversation brief — drafted in Traditional Chinese, approved by the RM before it is sent</a:t>
-            </a:r>
-            <a:endParaRPr lang="en-US" sz="950" dirty="0"/>
+            <a:endParaRPr lang="en-US" sz="1600" dirty="0"/>
           </a:p>
         </p:txBody>
       </p:sp>

--- a/docs/Foresight-RM-Pitch.pptx
+++ b/docs/Foresight-RM-Pitch.pptx
@@ -2852,88 +2852,43 @@
         </p:blipFill>
         <p:spPr>
           <a:xfrm>
-            <a:off x="1234440" y="4983480"/>
-            <a:ext cx="969264" cy="1225296"/>
+            <a:off x="640080" y="5029200"/>
+            <a:ext cx="941832" cy="1188720"/>
           </a:xfrm>
           <a:prstGeom prst="rect">
             <a:avLst/>
           </a:prstGeom>
         </p:spPr>
       </p:pic>
-      <p:pic>
-        <p:nvPicPr>
-          <p:cNvPr id="13" name="Image 2" descr="screens/c-recording.png">    </p:cNvPr>
-          <p:cNvPicPr>
-            <a:picLocks noChangeAspect="1"/>
-          </p:cNvPicPr>
-          <p:nvPr/>
-        </p:nvPicPr>
-        <p:blipFill>
-          <a:blip r:embed="rId3"/>
-          <a:stretch>
-            <a:fillRect/>
-          </a:stretch>
-        </p:blipFill>
-        <p:spPr>
-          <a:xfrm>
-            <a:off x="2377440" y="4983480"/>
-            <a:ext cx="850392" cy="1225296"/>
-          </a:xfrm>
-          <a:prstGeom prst="rect">
-            <a:avLst/>
-          </a:prstGeom>
-        </p:spPr>
-      </p:pic>
-      <p:pic>
-        <p:nvPicPr>
-          <p:cNvPr id="14" name="Image 3" descr="screens/c-recorder-saved.png">    </p:cNvPr>
-          <p:cNvPicPr>
-            <a:picLocks noChangeAspect="1"/>
-          </p:cNvPicPr>
-          <p:nvPr/>
-        </p:nvPicPr>
-        <p:blipFill>
-          <a:blip r:embed="rId4"/>
-          <a:stretch>
-            <a:fillRect/>
-          </a:stretch>
-        </p:blipFill>
-        <p:spPr>
-          <a:xfrm>
-            <a:off x="3401568" y="4983480"/>
-            <a:ext cx="850392" cy="1225296"/>
-          </a:xfrm>
-          <a:prstGeom prst="rect">
-            <a:avLst/>
-          </a:prstGeom>
-        </p:spPr>
-      </p:pic>
-      <p:sp>
-        <p:nvSpPr>
-          <p:cNvPr id="15" name="Text 9"/>
-          <p:cNvSpPr txBox="1"/>
-          <p:nvPr/>
-        </p:nvSpPr>
-        <p:spPr>
-          <a:xfrm>
-            <a:off x="1234440" y="6263640"/>
-            <a:ext cx="3017520" cy="274320"/>
-          </a:xfrm>
-          <a:prstGeom prst="rect">
-            <a:avLst/>
-          </a:prstGeom>
-          <a:noFill/>
-          <a:ln/>
-        </p:spPr>
-        <p:txBody>
-          <a:bodyPr wrap="square" lIns="0" tIns="0" rIns="0" bIns="0" rtlCol="0" anchor="ctr"/>
-          <a:lstStyle/>
-          <a:p>
-            <a:pPr algn="ctr" indent="0" marL="0">
-              <a:buNone/>
-            </a:pPr>
-            <a:r>
-              <a:rPr lang="en-US" sz="1100" spc="200" kern="0" dirty="0">
+      <p:sp>
+        <p:nvSpPr>
+          <p:cNvPr id="13" name="Text 9"/>
+          <p:cNvSpPr txBox="1"/>
+          <p:nvPr/>
+        </p:nvSpPr>
+        <p:spPr>
+          <a:xfrm>
+            <a:off x="1783080" y="5074920"/>
+            <a:ext cx="4023360" cy="548640"/>
+          </a:xfrm>
+          <a:prstGeom prst="rect">
+            <a:avLst/>
+          </a:prstGeom>
+          <a:noFill/>
+          <a:ln/>
+        </p:spPr>
+        <p:txBody>
+          <a:bodyPr wrap="square" lIns="0" tIns="0" rIns="0" bIns="0" rtlCol="0" anchor="ctr"/>
+          <a:lstStyle/>
+          <a:p>
+            <a:pPr indent="0" marL="0">
+              <a:lnSpc>
+                <a:spcPts val="2000"/>
+              </a:lnSpc>
+              <a:buNone/>
+            </a:pPr>
+            <a:r>
+              <a:rPr lang="en-US" sz="1350" dirty="0">
                 <a:solidFill>
                   <a:srgbClr val="5E6976"/>
                 </a:solidFill>
@@ -2941,22 +2896,22 @@
                 <a:ea typeface="Calibri" pitchFamily="34" charset="-122"/>
                 <a:cs typeface="Calibri" pitchFamily="34" charset="-120"/>
               </a:rPr>
-              <a:t>consent  ·  capture  ·  filed</a:t>
-            </a:r>
-            <a:endParaRPr lang="en-US" sz="1100" dirty="0"/>
-          </a:p>
-        </p:txBody>
-      </p:sp>
-      <p:sp>
-        <p:nvSpPr>
-          <p:cNvPr id="16" name="Text 10"/>
-          <p:cNvSpPr txBox="1"/>
-          <p:nvPr/>
-        </p:nvSpPr>
-        <p:spPr>
-          <a:xfrm>
-            <a:off x="4846320" y="5120640"/>
-            <a:ext cx="6675120" cy="914400"/>
+              <a:t>Consent is captured and logged before the microphone opens.</a:t>
+            </a:r>
+            <a:endParaRPr lang="en-US" sz="1350" dirty="0"/>
+          </a:p>
+        </p:txBody>
+      </p:sp>
+      <p:sp>
+        <p:nvSpPr>
+          <p:cNvPr id="14" name="Text 10"/>
+          <p:cNvSpPr txBox="1"/>
+          <p:nvPr/>
+        </p:nvSpPr>
+        <p:spPr>
+          <a:xfrm>
+            <a:off x="6035040" y="5029200"/>
+            <a:ext cx="5486400" cy="914400"/>
           </a:xfrm>
           <a:prstGeom prst="rect">
             <a:avLst/>
@@ -2970,12 +2925,12 @@
           <a:p>
             <a:pPr indent="0" marL="0">
               <a:lnSpc>
-                <a:spcPts val="2800"/>
+                <a:spcPts val="2600"/>
               </a:lnSpc>
               <a:buNone/>
             </a:pPr>
             <a:r>
-              <a:rPr lang="en-US" sz="1750" dirty="0">
+              <a:rPr lang="en-US" sz="1650" dirty="0">
                 <a:solidFill>
                   <a:srgbClr val="141E55"/>
                 </a:solidFill>
@@ -2985,17 +2940,17 @@
               </a:rPr>
               <a:t>Every other tool summarises the meeting and files a note.</a:t>
             </a:r>
-            <a:endParaRPr lang="en-US" sz="1750" dirty="0"/>
+            <a:endParaRPr lang="en-US" sz="1650" dirty="0"/>
           </a:p>
           <a:p>
             <a:pPr indent="0" marL="0">
               <a:lnSpc>
-                <a:spcPts val="2800"/>
+                <a:spcPts val="2600"/>
               </a:lnSpc>
               <a:buNone/>
             </a:pPr>
             <a:r>
-              <a:rPr lang="en-US" sz="1750" dirty="0">
+              <a:rPr lang="en-US" sz="1650" dirty="0">
                 <a:solidFill>
                   <a:srgbClr val="141E55"/>
                 </a:solidFill>
@@ -3005,13 +2960,13 @@
               </a:rPr>
               <a:t>Ours feeds what was said back into what may be said next.</a:t>
             </a:r>
-            <a:endParaRPr lang="en-US" sz="1750" dirty="0"/>
-          </a:p>
-        </p:txBody>
-      </p:sp>
-      <p:sp>
-        <p:nvSpPr>
-          <p:cNvPr id="17" name="Text 11"/>
+            <a:endParaRPr lang="en-US" sz="1650" dirty="0"/>
+          </a:p>
+        </p:txBody>
+      </p:sp>
+      <p:sp>
+        <p:nvSpPr>
+          <p:cNvPr id="15" name="Text 11"/>
           <p:cNvSpPr txBox="1"/>
           <p:nvPr/>
         </p:nvSpPr>
@@ -4859,8 +4814,8 @@
         </p:blipFill>
         <p:spPr>
           <a:xfrm>
-            <a:off x="640080" y="1874520"/>
-            <a:ext cx="10881360" cy="2569464"/>
+            <a:off x="640080" y="2377440"/>
+            <a:ext cx="10881360" cy="978408"/>
           </a:xfrm>
           <a:prstGeom prst="rect">
             <a:avLst/>
@@ -4875,7 +4830,7 @@
         </p:nvSpPr>
         <p:spPr>
           <a:xfrm>
-            <a:off x="640080" y="4617720"/>
+            <a:off x="640080" y="3977640"/>
             <a:ext cx="475488" cy="475488"/>
           </a:xfrm>
           <a:prstGeom prst="ellipse">
@@ -4903,7 +4858,7 @@
         </p:blipFill>
         <p:spPr>
           <a:xfrm>
-            <a:off x="745236" y="4722876"/>
+            <a:off x="745236" y="4082796"/>
             <a:ext cx="265176" cy="265176"/>
           </a:xfrm>
           <a:prstGeom prst="rect">
@@ -4919,7 +4874,7 @@
         </p:nvSpPr>
         <p:spPr>
           <a:xfrm>
-            <a:off x="640080" y="5193792"/>
+            <a:off x="640080" y="4553712"/>
             <a:ext cx="1755648" cy="237744"/>
           </a:xfrm>
           <a:prstGeom prst="rect">
@@ -4958,7 +4913,7 @@
         </p:nvSpPr>
         <p:spPr>
           <a:xfrm>
-            <a:off x="640080" y="5440680"/>
+            <a:off x="640080" y="4800600"/>
             <a:ext cx="1755648" cy="457200"/>
           </a:xfrm>
           <a:prstGeom prst="rect">
@@ -4997,7 +4952,7 @@
         </p:nvSpPr>
         <p:spPr>
           <a:xfrm>
-            <a:off x="2455164" y="4617720"/>
+            <a:off x="2455164" y="3977640"/>
             <a:ext cx="475488" cy="475488"/>
           </a:xfrm>
           <a:prstGeom prst="ellipse">
@@ -5025,7 +4980,7 @@
         </p:blipFill>
         <p:spPr>
           <a:xfrm>
-            <a:off x="2560320" y="4722876"/>
+            <a:off x="2560320" y="4082796"/>
             <a:ext cx="265176" cy="265176"/>
           </a:xfrm>
           <a:prstGeom prst="rect">
@@ -5041,7 +4996,7 @@
         </p:nvSpPr>
         <p:spPr>
           <a:xfrm>
-            <a:off x="2455164" y="5193792"/>
+            <a:off x="2455164" y="4553712"/>
             <a:ext cx="1755648" cy="237744"/>
           </a:xfrm>
           <a:prstGeom prst="rect">
@@ -5080,7 +5035,7 @@
         </p:nvSpPr>
         <p:spPr>
           <a:xfrm>
-            <a:off x="2455164" y="5440680"/>
+            <a:off x="2455164" y="4800600"/>
             <a:ext cx="1755648" cy="457200"/>
           </a:xfrm>
           <a:prstGeom prst="rect">
@@ -5119,7 +5074,7 @@
         </p:nvSpPr>
         <p:spPr>
           <a:xfrm>
-            <a:off x="4270248" y="4617720"/>
+            <a:off x="4270248" y="3977640"/>
             <a:ext cx="475488" cy="475488"/>
           </a:xfrm>
           <a:prstGeom prst="ellipse">
@@ -5147,7 +5102,7 @@
         </p:blipFill>
         <p:spPr>
           <a:xfrm>
-            <a:off x="4375404" y="4722876"/>
+            <a:off x="4375404" y="4082796"/>
             <a:ext cx="265176" cy="265176"/>
           </a:xfrm>
           <a:prstGeom prst="rect">
@@ -5163,7 +5118,7 @@
         </p:nvSpPr>
         <p:spPr>
           <a:xfrm>
-            <a:off x="4270248" y="5193792"/>
+            <a:off x="4270248" y="4553712"/>
             <a:ext cx="1755648" cy="237744"/>
           </a:xfrm>
           <a:prstGeom prst="rect">
@@ -5202,7 +5157,7 @@
         </p:nvSpPr>
         <p:spPr>
           <a:xfrm>
-            <a:off x="4270248" y="5440680"/>
+            <a:off x="4270248" y="4800600"/>
             <a:ext cx="1755648" cy="457200"/>
           </a:xfrm>
           <a:prstGeom prst="rect">
@@ -5241,7 +5196,7 @@
         </p:nvSpPr>
         <p:spPr>
           <a:xfrm>
-            <a:off x="6085332" y="4617720"/>
+            <a:off x="6085332" y="3977640"/>
             <a:ext cx="475488" cy="475488"/>
           </a:xfrm>
           <a:prstGeom prst="ellipse">
@@ -5269,7 +5224,7 @@
         </p:blipFill>
         <p:spPr>
           <a:xfrm>
-            <a:off x="6190488" y="4722876"/>
+            <a:off x="6190488" y="4082796"/>
             <a:ext cx="265176" cy="265176"/>
           </a:xfrm>
           <a:prstGeom prst="rect">
@@ -5285,7 +5240,7 @@
         </p:nvSpPr>
         <p:spPr>
           <a:xfrm>
-            <a:off x="6085332" y="5193792"/>
+            <a:off x="6085332" y="4553712"/>
             <a:ext cx="1755648" cy="237744"/>
           </a:xfrm>
           <a:prstGeom prst="rect">
@@ -5324,7 +5279,7 @@
         </p:nvSpPr>
         <p:spPr>
           <a:xfrm>
-            <a:off x="6085332" y="5440680"/>
+            <a:off x="6085332" y="4800600"/>
             <a:ext cx="1755648" cy="457200"/>
           </a:xfrm>
           <a:prstGeom prst="rect">
@@ -5363,7 +5318,7 @@
         </p:nvSpPr>
         <p:spPr>
           <a:xfrm>
-            <a:off x="7900416" y="4617720"/>
+            <a:off x="7900416" y="3977640"/>
             <a:ext cx="475488" cy="475488"/>
           </a:xfrm>
           <a:prstGeom prst="ellipse">
@@ -5391,7 +5346,7 @@
         </p:blipFill>
         <p:spPr>
           <a:xfrm>
-            <a:off x="8005572" y="4722876"/>
+            <a:off x="8005572" y="4082796"/>
             <a:ext cx="265176" cy="265176"/>
           </a:xfrm>
           <a:prstGeom prst="rect">
@@ -5407,7 +5362,7 @@
         </p:nvSpPr>
         <p:spPr>
           <a:xfrm>
-            <a:off x="7900416" y="5193792"/>
+            <a:off x="7900416" y="4553712"/>
             <a:ext cx="1755648" cy="237744"/>
           </a:xfrm>
           <a:prstGeom prst="rect">
@@ -5446,7 +5401,7 @@
         </p:nvSpPr>
         <p:spPr>
           <a:xfrm>
-            <a:off x="7900416" y="5440680"/>
+            <a:off x="7900416" y="4800600"/>
             <a:ext cx="1755648" cy="457200"/>
           </a:xfrm>
           <a:prstGeom prst="rect">
@@ -5485,7 +5440,7 @@
         </p:nvSpPr>
         <p:spPr>
           <a:xfrm>
-            <a:off x="9715500" y="4617720"/>
+            <a:off x="9715500" y="3977640"/>
             <a:ext cx="475488" cy="475488"/>
           </a:xfrm>
           <a:prstGeom prst="ellipse">
@@ -5513,7 +5468,7 @@
         </p:blipFill>
         <p:spPr>
           <a:xfrm>
-            <a:off x="9820656" y="4722876"/>
+            <a:off x="9820656" y="4082796"/>
             <a:ext cx="265176" cy="265176"/>
           </a:xfrm>
           <a:prstGeom prst="rect">
@@ -5529,7 +5484,7 @@
         </p:nvSpPr>
         <p:spPr>
           <a:xfrm>
-            <a:off x="9715500" y="5193792"/>
+            <a:off x="9715500" y="4553712"/>
             <a:ext cx="1755648" cy="237744"/>
           </a:xfrm>
           <a:prstGeom prst="rect">
@@ -5568,7 +5523,7 @@
         </p:nvSpPr>
         <p:spPr>
           <a:xfrm>
-            <a:off x="9715500" y="5440680"/>
+            <a:off x="9715500" y="4800600"/>
             <a:ext cx="1755648" cy="457200"/>
           </a:xfrm>
           <a:prstGeom prst="rect">
@@ -5607,7 +5562,7 @@
         </p:nvSpPr>
         <p:spPr>
           <a:xfrm>
-            <a:off x="640080" y="6035040"/>
+            <a:off x="640080" y="5623560"/>
             <a:ext cx="10881360" cy="365760"/>
           </a:xfrm>
           <a:prstGeom prst="rect">

--- a/docs/Foresight-RM-Pitch.pptx
+++ b/docs/Foresight-RM-Pitch.pptx
@@ -513,7 +513,7 @@
           <a:p>
             <a:r>
               <a:rPr lang="en-US" dirty="0"/>
-              <a:t>Foresight RM. The line on screen is the whole thesis: the information already exists inside the bank. Nothing joins it up.</a:t>
+              <a:t>Open on the thesis: the information already exists inside the bank. It is held in systems that do not speak to each other.</a:t>
             </a:r>
             <a:endParaRPr lang="en-US" dirty="0"/>
           </a:p>
@@ -601,7 +601,7 @@
           <a:p>
             <a:r>
               <a:rPr lang="en-US" dirty="0"/>
-              <a:t>Preserving the central role of the RM is in the rubric. For us it is the architecture, not a caveat.</a:t>
+              <a:t>Preserving the central role of the Relationship Manager is a rubric criterion. Here it is architectural: the Relationship agent is the only one able to veto another, and no client communication is sent without RM approval.</a:t>
             </a:r>
             <a:endParaRPr lang="en-US" dirty="0"/>
           </a:p>
@@ -689,7 +689,7 @@
           <a:p>
             <a:r>
               <a:rPr lang="en-US" dirty="0"/>
-              <a:t>If asked about the recorder: consent capture is built, the analysis is built and running on written notes today. The audio input is the piece we did not wire, deliberately, because there is no transcript in the dataset and we were not going to fake one.</a:t>
+              <a:t>The same relationship agent currently runs on written RM notes; a consented transcript is the next input channel. Consent capture is built. No transcript exists in the supplied dataset, so none was fabricated.</a:t>
             </a:r>
             <a:endParaRPr lang="en-US" dirty="0"/>
           </a:p>
@@ -777,7 +777,7 @@
           <a:p>
             <a:r>
               <a:rPr lang="en-US" dirty="0"/>
-              <a:t>Close on these three sentences. Then hand over to the demo.</a:t>
+              <a:t>Close on these three sentences, then move to the demonstration.</a:t>
             </a:r>
             <a:endParaRPr lang="en-US" dirty="0"/>
           </a:p>
@@ -865,7 +865,7 @@
           <a:p>
             <a:r>
               <a:rPr lang="en-US" dirty="0"/>
-              <a:t>Start here. Six rows, all green, all within limit. This is the state of the art.</a:t>
+              <a:t>Six positions, each within its own limit, nothing flagged. This is what a wealth platform shows today. Pause here before the next slide.</a:t>
             </a:r>
             <a:endParaRPr lang="en-US" dirty="0"/>
           </a:p>
@@ -953,7 +953,7 @@
           <a:p>
             <a:r>
               <a:rPr lang="en-US" dirty="0"/>
-              <a:t>One click. The six rows collapse into one bar. 49% against a 10% limit — and three more exposures that were never in the portfolio at all.</a:t>
+              <a:t>One click resolves the six positions into a single correlated bet: 49.0% of wealth against a 10% single-position limit, plus three exposures held outside the portfolio entirely. Pause after the limit figure.</a:t>
             </a:r>
             <a:endParaRPr lang="en-US" dirty="0"/>
           </a:p>
@@ -1041,7 +1041,7 @@
           <a:p>
             <a:r>
               <a:rPr lang="en-US" dirty="0"/>
-              <a:t>The information existed. It sat in three places that never meet. She wrote it down in March.</a:t>
+              <a:t>Three systems each report no problem. The Relationship Manager had already identified the correlation herself and recorded it on 5 March. Nothing read that note against the portfolio.</a:t>
             </a:r>
             <a:endParaRPr lang="en-US" dirty="0"/>
           </a:p>
@@ -1129,7 +1129,7 @@
           <a:p>
             <a:r>
               <a:rPr lang="en-US" dirty="0"/>
-              <a:t>Six agents, twelve files. Every figure computed in Python. The model only writes sentences and translates.</a:t>
+              <a:t>Six agents read all twelve source files together. Every figure is computed in Python; the model narrates and translates but never originates a number.</a:t>
             </a:r>
             <a:endParaRPr lang="en-US" dirty="0"/>
           </a:p>
@@ -1217,7 +1217,7 @@
           <a:p>
             <a:r>
               <a:rPr lang="en-US" dirty="0"/>
-              <a:t>This is the slide that wins it. Every other team's AI shouts alerts. Ours knows when to stay quiet, says why, and says when to come back.</a:t>
+              <a:t>Suitability correctly identifies a critical breach. The Relationship agent objects on a dated client instruction, and the gate holds the finding with a reason and a revisit date. The system can overrule its own analysis when a human fact requires it.</a:t>
             </a:r>
             <a:endParaRPr lang="en-US" dirty="0"/>
           </a:p>
@@ -1305,7 +1305,7 @@
           <a:p>
             <a:r>
               <a:rPr lang="en-US" dirty="0"/>
-              <a:t>The brief asks for what could happen next. These come from the actual credit file, shocked.</a:t>
+              <a:t>The brief asks what could happen next. These loan-to-value figures are computed from the actual credit facility under collateral shocks, not estimated.</a:t>
             </a:r>
             <a:endParaRPr lang="en-US" dirty="0"/>
           </a:p>
@@ -1393,7 +1393,7 @@
           <a:p>
             <a:r>
               <a:rPr lang="en-US" dirty="0"/>
-              <a:t>The deck is otherwise all risk. This is the relationship half — the reasons to call when nothing is wrong.</a:t>
+              <a:t>Contact gaps and compliance dates are computed from the data. Greetings are drafted for the RM to select; the system does not assume a client observes any particular occasion.</a:t>
             </a:r>
             <a:endParaRPr lang="en-US" dirty="0"/>
           </a:p>
@@ -1481,7 +1481,7 @@
           <a:p>
             <a:r>
               <a:rPr lang="en-US" dirty="0"/>
-              <a:t>Judges will ask whether they can trust the numbers. This is the answer.</a:t>
+              <a:t>The dataset contains deliberate production artefacts. Each is handled in named code, and a single command reproduces every headline figure with its source rows.</a:t>
             </a:r>
             <a:endParaRPr lang="en-US" dirty="0"/>
           </a:p>
@@ -2137,7 +2137,7 @@
                 <a:ea typeface="Calibri" pitchFamily="34" charset="-122"/>
                 <a:cs typeface="Calibri" pitchFamily="34" charset="-120"/>
               </a:rPr>
-              <a:t>THE RELATIONSHIP MANAGER STAYS AT THE CENTRE</a:t>
+              <a:t>THE RM STAYS AT THE CENTRE</a:t>
             </a:r>
             <a:endParaRPr lang="en-US" sz="3400" dirty="0"/>
           </a:p>
@@ -2334,8 +2334,8 @@
         </p:blipFill>
         <p:spPr>
           <a:xfrm>
-            <a:off x="5806440" y="1737360"/>
-            <a:ext cx="5760720" cy="2971800"/>
+            <a:off x="5806440" y="1783080"/>
+            <a:ext cx="5742432" cy="3291840"/>
           </a:xfrm>
           <a:prstGeom prst="rect">
             <a:avLst/>
@@ -2375,7 +2375,7 @@
                 <a:ea typeface="Calibri" pitchFamily="34" charset="-122"/>
                 <a:cs typeface="Calibri" pitchFamily="34" charset="-120"/>
               </a:rPr>
-              <a:t>Screen: Conversation brief — drafted in Traditional Chinese, approved by the RM before it is sent</a:t>
+              <a:t>Screen: the client-facing draft in Traditional Chinese — every figure in it was computed, and it stays a draft until the RM approves</a:t>
             </a:r>
             <a:endParaRPr lang="en-US" sz="1150" dirty="0"/>
           </a:p>
@@ -3732,7 +3732,7 @@
                 <a:ea typeface="Calibri" pitchFamily="34" charset="-122"/>
                 <a:cs typeface="Calibri" pitchFamily="34" charset="-120"/>
               </a:rPr>
-              <a:t>of his wealth is one Hong Kong property developer</a:t>
+              <a:t>of his wealth is one Hong Kong property bet</a:t>
             </a:r>
             <a:endParaRPr lang="en-US" sz="1800" dirty="0"/>
           </a:p>
@@ -6686,7 +6686,7 @@
                 <a:ea typeface="Calibri" pitchFamily="34" charset="-122"/>
                 <a:cs typeface="Calibri" pitchFamily="34" charset="-120"/>
               </a:rPr>
-              <a:t>A risk engine only ever tells her something is wrong. Most of an RM’s job is the opposite — the client she has not spoken to in six months, the review falling due, the festival worth a note in their own language.</a:t>
+              <a:t>A risk engine only ever tells her something is wrong. Much of an RM’s job is the opposite — a relationship reason to call when no finding is outstanding: months of silence, a review falling due, a holiday in the client’s own jurisdiction.</a:t>
             </a:r>
             <a:endParaRPr lang="en-US" sz="1600" dirty="0"/>
           </a:p>
@@ -6769,7 +6769,7 @@
                 <a:ea typeface="Calibri" pitchFamily="34" charset="-122"/>
                 <a:cs typeface="Calibri" pitchFamily="34" charset="-120"/>
               </a:rPr>
-              <a:t>196 days</a:t>
+              <a:t>180 days</a:t>
             </a:r>
             <a:endParaRPr lang="en-US" sz="1700" dirty="0"/>
           </a:p>
@@ -6811,7 +6811,7 @@
                 <a:ea typeface="Calibri" pitchFamily="34" charset="-122"/>
                 <a:cs typeface="Calibri" pitchFamily="34" charset="-120"/>
               </a:rPr>
-              <a:t>since anyone spoke to Aishah binti Rahman — USD 19.4m, and nothing is wrong</a:t>
+              <a:t>since anyone spoke to Grace Adeyemi-Lim — USD 19.1m, and no finding is above threshold</a:t>
             </a:r>
             <a:endParaRPr lang="en-US" sz="1300" dirty="0"/>
           </a:p>
@@ -7061,7 +7061,7 @@
                 <a:ea typeface="Calibri" pitchFamily="34" charset="-122"/>
                 <a:cs typeface="Calibri" pitchFamily="34" charset="-120"/>
               </a:rPr>
-              <a:t>drafted in Traditional and Simplified Chinese for the clients booked where it is a holiday</a:t>
+              <a:t>a public holiday in the Hong Kong booking centre — greeting drafted, the RM chooses who receives it</a:t>
             </a:r>
             <a:endParaRPr lang="en-US" sz="1300" dirty="0"/>
           </a:p>
@@ -7124,7 +7124,7 @@
                 <a:ea typeface="Calibri" pitchFamily="34" charset="-122"/>
                 <a:cs typeface="Calibri" pitchFamily="34" charset="-120"/>
               </a:rPr>
-              <a:t>Screen: Relationship Concierge — contact gaps, compliance dates and greetings, in one panel</a:t>
+              <a:t>Screen: Relationship Concierge — contact gaps and compliance dates are computed from the data; greetings are drafted for the RM to choose</a:t>
             </a:r>
             <a:endParaRPr lang="en-US" sz="1150" dirty="0"/>
           </a:p>

--- a/docs/Foresight-RM-Pitch.pptx
+++ b/docs/Foresight-RM-Pitch.pptx
@@ -1305,7 +1305,7 @@
           <a:p>
             <a:r>
               <a:rPr lang="en-US" dirty="0"/>
-              <a:t>The brief asks what could happen next. These loan-to-value figures are computed from the actual credit facility under collateral shocks, not estimated.</a:t>
+              <a:t>The brief asks what could happen next, and the answer works at two scales. Per client, the loan-to-value figures are computed from the actual credit facility under collateral shocks. Across the book, four macro scenarios re-rank all twenty clients in place — a Middle East oil shock moves Lau to the top of the list. If asked: the scenario definitions are ours, and every figure quoted inside them is read from the dataset.</a:t>
             </a:r>
             <a:endParaRPr lang="en-US" dirty="0"/>
           </a:p>
@@ -5936,7 +5936,7 @@
                 <a:ea typeface="Calibri" pitchFamily="34" charset="-122"/>
                 <a:cs typeface="Calibri" pitchFamily="34" charset="-120"/>
               </a:rPr>
-              <a:t>A 5% FALL TRIGGERS THE MARGIN CALL</a:t>
+              <a:t>ONE CLIENT, AND THE WHOLE BOOK</a:t>
             </a:r>
             <a:endParaRPr lang="en-US" sz="3400" dirty="0"/>
           </a:p>
@@ -5950,8 +5950,8 @@
         </p:nvSpPr>
         <p:spPr>
           <a:xfrm>
-            <a:off x="640080" y="1874520"/>
-            <a:ext cx="4480560" cy="1188720"/>
+            <a:off x="640080" y="1828800"/>
+            <a:ext cx="4572000" cy="1005840"/>
           </a:xfrm>
           <a:prstGeom prst="rect">
             <a:avLst/>
@@ -5965,12 +5965,12 @@
           <a:p>
             <a:pPr indent="0" marL="0">
               <a:lnSpc>
-                <a:spcPts val="2600"/>
+                <a:spcPts val="2500"/>
               </a:lnSpc>
               <a:buNone/>
             </a:pPr>
             <a:r>
-              <a:rPr lang="en-US" sz="1650" dirty="0">
+              <a:rPr lang="en-US" sz="1600" dirty="0">
                 <a:solidFill>
                   <a:srgbClr val="5E6976"/>
                 </a:solidFill>
@@ -5978,19 +5978,19 @@
                 <a:ea typeface="Calibri" pitchFamily="34" charset="-122"/>
                 <a:cs typeface="Calibri" pitchFamily="34" charset="-120"/>
               </a:rPr>
-              <a:t>His loan is secured on the very thing he is concentrated in.</a:t>
-            </a:r>
-            <a:endParaRPr lang="en-US" sz="1650" dirty="0"/>
+              <a:t>Lau’s loan is secured on the very thing he is concentrated in,</a:t>
+            </a:r>
+            <a:endParaRPr lang="en-US" sz="1600" dirty="0"/>
           </a:p>
           <a:p>
             <a:pPr indent="0" marL="0">
               <a:lnSpc>
-                <a:spcPts val="2600"/>
+                <a:spcPts val="2500"/>
               </a:lnSpc>
               <a:buNone/>
             </a:pPr>
             <a:r>
-              <a:rPr lang="en-US" sz="1650" dirty="0">
+              <a:rPr lang="en-US" sz="1600" dirty="0">
                 <a:solidFill>
                   <a:srgbClr val="5E6976"/>
                 </a:solidFill>
@@ -5998,19 +5998,77 @@
                 <a:ea typeface="Calibri" pitchFamily="34" charset="-122"/>
                 <a:cs typeface="Calibri" pitchFamily="34" charset="-120"/>
               </a:rPr>
-              <a:t>So the usual remedy — sell something to raise cash — makes</a:t>
-            </a:r>
-            <a:endParaRPr lang="en-US" sz="1650" dirty="0"/>
-          </a:p>
-          <a:p>
-            <a:pPr indent="0" marL="0">
-              <a:lnSpc>
-                <a:spcPts val="2600"/>
-              </a:lnSpc>
-              <a:buNone/>
-            </a:pPr>
-            <a:r>
-              <a:rPr lang="en-US" sz="1650" dirty="0">
+              <a:t>so selling to raise cash makes the ratio worse, not better.</a:t>
+            </a:r>
+            <a:endParaRPr lang="en-US" sz="1600" dirty="0"/>
+          </a:p>
+        </p:txBody>
+      </p:sp>
+      <p:sp>
+        <p:nvSpPr>
+          <p:cNvPr id="5" name="Text 3"/>
+          <p:cNvSpPr txBox="1"/>
+          <p:nvPr/>
+        </p:nvSpPr>
+        <p:spPr>
+          <a:xfrm>
+            <a:off x="640080" y="2999232"/>
+            <a:ext cx="4572000" cy="274320"/>
+          </a:xfrm>
+          <a:prstGeom prst="rect">
+            <a:avLst/>
+          </a:prstGeom>
+          <a:noFill/>
+          <a:ln/>
+        </p:spPr>
+        <p:txBody>
+          <a:bodyPr wrap="square" lIns="0" tIns="0" rIns="0" bIns="0" rtlCol="0" anchor="ctr"/>
+          <a:lstStyle/>
+          <a:p>
+            <a:pPr indent="0" marL="0">
+              <a:buNone/>
+            </a:pPr>
+            <a:r>
+              <a:rPr lang="en-US" sz="1100" spc="200" kern="0" dirty="0">
+                <a:solidFill>
+                  <a:srgbClr val="2C6A4F"/>
+                </a:solidFill>
+                <a:latin typeface="Calibri" pitchFamily="34" charset="0"/>
+                <a:ea typeface="Calibri" pitchFamily="34" charset="-122"/>
+                <a:cs typeface="Calibri" pitchFamily="34" charset="-120"/>
+              </a:rPr>
+              <a:t>COMPUTED FROM HIS CREDIT FILE</a:t>
+            </a:r>
+            <a:endParaRPr lang="en-US" sz="1100" dirty="0"/>
+          </a:p>
+        </p:txBody>
+      </p:sp>
+      <p:sp>
+        <p:nvSpPr>
+          <p:cNvPr id="6" name="Text 4"/>
+          <p:cNvSpPr txBox="1"/>
+          <p:nvPr/>
+        </p:nvSpPr>
+        <p:spPr>
+          <a:xfrm>
+            <a:off x="640080" y="3401568"/>
+            <a:ext cx="1280160" cy="365760"/>
+          </a:xfrm>
+          <a:prstGeom prst="rect">
+            <a:avLst/>
+          </a:prstGeom>
+          <a:noFill/>
+          <a:ln/>
+        </p:spPr>
+        <p:txBody>
+          <a:bodyPr wrap="square" lIns="0" tIns="0" rIns="0" bIns="0" rtlCol="0" anchor="ctr"/>
+          <a:lstStyle/>
+          <a:p>
+            <a:pPr indent="0" marL="0">
+              <a:buNone/>
+            </a:pPr>
+            <a:r>
+              <a:rPr lang="en-US" sz="1600" dirty="0">
                 <a:solidFill>
                   <a:srgbClr val="5E6976"/>
                 </a:solidFill>
@@ -6018,45 +6076,6 @@
                 <a:ea typeface="Calibri" pitchFamily="34" charset="-122"/>
                 <a:cs typeface="Calibri" pitchFamily="34" charset="-120"/>
               </a:rPr>
-              <a:t>the ratio worse, not better.</a:t>
-            </a:r>
-            <a:endParaRPr lang="en-US" sz="1650" dirty="0"/>
-          </a:p>
-        </p:txBody>
-      </p:sp>
-      <p:sp>
-        <p:nvSpPr>
-          <p:cNvPr id="5" name="Text 3"/>
-          <p:cNvSpPr txBox="1"/>
-          <p:nvPr/>
-        </p:nvSpPr>
-        <p:spPr>
-          <a:xfrm>
-            <a:off x="640080" y="3291840"/>
-            <a:ext cx="1280160" cy="365760"/>
-          </a:xfrm>
-          <a:prstGeom prst="rect">
-            <a:avLst/>
-          </a:prstGeom>
-          <a:noFill/>
-          <a:ln/>
-        </p:spPr>
-        <p:txBody>
-          <a:bodyPr wrap="square" lIns="0" tIns="0" rIns="0" bIns="0" rtlCol="0" anchor="ctr"/>
-          <a:lstStyle/>
-          <a:p>
-            <a:pPr indent="0" marL="0">
-              <a:buNone/>
-            </a:pPr>
-            <a:r>
-              <a:rPr lang="en-US" sz="1600" dirty="0">
-                <a:solidFill>
-                  <a:srgbClr val="5E6976"/>
-                </a:solidFill>
-                <a:latin typeface="Calibri" pitchFamily="34" charset="0"/>
-                <a:ea typeface="Calibri" pitchFamily="34" charset="-122"/>
-                <a:cs typeface="Calibri" pitchFamily="34" charset="-120"/>
-              </a:rPr>
               <a:t>Today</a:t>
             </a:r>
             <a:endParaRPr lang="en-US" sz="1600" dirty="0"/>
@@ -6065,13 +6084,13 @@
       </p:sp>
       <p:sp>
         <p:nvSpPr>
-          <p:cNvPr id="6" name="Text 4"/>
-          <p:cNvSpPr txBox="1"/>
-          <p:nvPr/>
-        </p:nvSpPr>
-        <p:spPr>
-          <a:xfrm>
-            <a:off x="1874520" y="3236976"/>
+          <p:cNvPr id="7" name="Text 5"/>
+          <p:cNvSpPr txBox="1"/>
+          <p:nvPr/>
+        </p:nvSpPr>
+        <p:spPr>
+          <a:xfrm>
+            <a:off x="1874520" y="3346704"/>
             <a:ext cx="1645920" cy="457200"/>
           </a:xfrm>
           <a:prstGeom prst="rect">
@@ -6104,7 +6123,7 @@
       </p:sp>
       <p:sp>
         <p:nvSpPr>
-          <p:cNvPr id="7" name="Text 5"/>
+          <p:cNvPr id="8" name="Text 6"/>
           <p:cNvSpPr txBox="1"/>
           <p:nvPr/>
         </p:nvSpPr>
@@ -6143,7 +6162,7 @@
       </p:sp>
       <p:sp>
         <p:nvSpPr>
-          <p:cNvPr id="8" name="Text 6"/>
+          <p:cNvPr id="9" name="Text 7"/>
           <p:cNvSpPr txBox="1"/>
           <p:nvPr/>
         </p:nvSpPr>
@@ -6182,7 +6201,7 @@
       </p:sp>
       <p:sp>
         <p:nvSpPr>
-          <p:cNvPr id="9" name="Text 7"/>
+          <p:cNvPr id="10" name="Text 8"/>
           <p:cNvSpPr txBox="1"/>
           <p:nvPr/>
         </p:nvSpPr>
@@ -6221,13 +6240,13 @@
       </p:sp>
       <p:sp>
         <p:nvSpPr>
-          <p:cNvPr id="10" name="Text 8"/>
-          <p:cNvSpPr txBox="1"/>
-          <p:nvPr/>
-        </p:nvSpPr>
-        <p:spPr>
-          <a:xfrm>
-            <a:off x="640080" y="4608576"/>
+          <p:cNvPr id="11" name="Text 9"/>
+          <p:cNvSpPr txBox="1"/>
+          <p:nvPr/>
+        </p:nvSpPr>
+        <p:spPr>
+          <a:xfrm>
+            <a:off x="640080" y="4498848"/>
             <a:ext cx="1280160" cy="365760"/>
           </a:xfrm>
           <a:prstGeom prst="rect">
@@ -6260,13 +6279,13 @@
       </p:sp>
       <p:sp>
         <p:nvSpPr>
-          <p:cNvPr id="11" name="Text 9"/>
-          <p:cNvSpPr txBox="1"/>
-          <p:nvPr/>
-        </p:nvSpPr>
-        <p:spPr>
-          <a:xfrm>
-            <a:off x="1874520" y="4553712"/>
+          <p:cNvPr id="12" name="Text 10"/>
+          <p:cNvSpPr txBox="1"/>
+          <p:nvPr/>
+        </p:nvSpPr>
+        <p:spPr>
+          <a:xfrm>
+            <a:off x="1874520" y="4443984"/>
             <a:ext cx="1645920" cy="457200"/>
           </a:xfrm>
           <a:prstGeom prst="rect">
@@ -6299,13 +6318,13 @@
       </p:sp>
       <p:sp>
         <p:nvSpPr>
-          <p:cNvPr id="12" name="Text 10"/>
-          <p:cNvSpPr txBox="1"/>
-          <p:nvPr/>
-        </p:nvSpPr>
-        <p:spPr>
-          <a:xfrm>
-            <a:off x="3566160" y="4636008"/>
+          <p:cNvPr id="13" name="Text 11"/>
+          <p:cNvSpPr txBox="1"/>
+          <p:nvPr/>
+        </p:nvSpPr>
+        <p:spPr>
+          <a:xfrm>
+            <a:off x="3566160" y="4526280"/>
             <a:ext cx="1554480" cy="320040"/>
           </a:xfrm>
           <a:prstGeom prst="rect">
@@ -6338,13 +6357,13 @@
       </p:sp>
       <p:sp>
         <p:nvSpPr>
-          <p:cNvPr id="13" name="Text 11"/>
-          <p:cNvSpPr txBox="1"/>
-          <p:nvPr/>
-        </p:nvSpPr>
-        <p:spPr>
-          <a:xfrm>
-            <a:off x="640080" y="5266944"/>
+          <p:cNvPr id="14" name="Text 12"/>
+          <p:cNvSpPr txBox="1"/>
+          <p:nvPr/>
+        </p:nvSpPr>
+        <p:spPr>
+          <a:xfrm>
+            <a:off x="640080" y="5047488"/>
             <a:ext cx="1280160" cy="365760"/>
           </a:xfrm>
           <a:prstGeom prst="rect">
@@ -6377,13 +6396,13 @@
       </p:sp>
       <p:sp>
         <p:nvSpPr>
-          <p:cNvPr id="14" name="Text 12"/>
-          <p:cNvSpPr txBox="1"/>
-          <p:nvPr/>
-        </p:nvSpPr>
-        <p:spPr>
-          <a:xfrm>
-            <a:off x="1874520" y="5212080"/>
+          <p:cNvPr id="15" name="Text 13"/>
+          <p:cNvSpPr txBox="1"/>
+          <p:nvPr/>
+        </p:nvSpPr>
+        <p:spPr>
+          <a:xfrm>
+            <a:off x="1874520" y="4992624"/>
             <a:ext cx="1645920" cy="457200"/>
           </a:xfrm>
           <a:prstGeom prst="rect">
@@ -6416,13 +6435,13 @@
       </p:sp>
       <p:sp>
         <p:nvSpPr>
-          <p:cNvPr id="15" name="Text 13"/>
-          <p:cNvSpPr txBox="1"/>
-          <p:nvPr/>
-        </p:nvSpPr>
-        <p:spPr>
-          <a:xfrm>
-            <a:off x="3566160" y="5294376"/>
+          <p:cNvPr id="16" name="Text 14"/>
+          <p:cNvSpPr txBox="1"/>
+          <p:nvPr/>
+        </p:nvSpPr>
+        <p:spPr>
+          <a:xfrm>
+            <a:off x="3566160" y="5074920"/>
             <a:ext cx="1554480" cy="320040"/>
           </a:xfrm>
           <a:prstGeom prst="rect">
@@ -6455,7 +6474,7 @@
       </p:sp>
       <p:pic>
         <p:nvPicPr>
-          <p:cNvPr id="16" name="Image 0" descr="screens/c-outlook.png">    </p:cNvPr>
+          <p:cNvPr id="17" name="Image 0" descr="screens/c-simulator.png">    </p:cNvPr>
           <p:cNvPicPr>
             <a:picLocks noChangeAspect="1"/>
           </p:cNvPicPr>
@@ -6469,8 +6488,8 @@
         </p:blipFill>
         <p:spPr>
           <a:xfrm>
-            <a:off x="5623560" y="1737360"/>
-            <a:ext cx="5943600" cy="2642616"/>
+            <a:off x="5623560" y="1691640"/>
+            <a:ext cx="5943600" cy="2724912"/>
           </a:xfrm>
           <a:prstGeom prst="rect">
             <a:avLst/>
@@ -6479,30 +6498,30 @@
       </p:pic>
       <p:sp>
         <p:nvSpPr>
-          <p:cNvPr id="17" name="Text 14"/>
+          <p:cNvPr id="18" name="Text 15"/>
           <p:cNvSpPr txBox="1"/>
           <p:nvPr/>
         </p:nvSpPr>
         <p:spPr>
           <a:xfrm>
             <a:off x="5623560" y="4572000"/>
-            <a:ext cx="5943600" cy="365760"/>
-          </a:xfrm>
-          <a:prstGeom prst="rect">
-            <a:avLst/>
-          </a:prstGeom>
-          <a:noFill/>
-          <a:ln/>
-        </p:spPr>
-        <p:txBody>
-          <a:bodyPr wrap="square" lIns="0" tIns="0" rIns="0" bIns="0" rtlCol="0" anchor="ctr"/>
-          <a:lstStyle/>
-          <a:p>
-            <a:pPr indent="0" marL="0">
-              <a:buNone/>
-            </a:pPr>
-            <a:r>
-              <a:rPr lang="en-US" sz="1450" spc="100" kern="0" dirty="0">
+            <a:ext cx="5943600" cy="274320"/>
+          </a:xfrm>
+          <a:prstGeom prst="rect">
+            <a:avLst/>
+          </a:prstGeom>
+          <a:noFill/>
+          <a:ln/>
+        </p:spPr>
+        <p:txBody>
+          <a:bodyPr wrap="square" lIns="0" tIns="0" rIns="0" bIns="0" rtlCol="0" anchor="ctr"/>
+          <a:lstStyle/>
+          <a:p>
+            <a:pPr indent="0" marL="0">
+              <a:buNone/>
+            </a:pPr>
+            <a:r>
+              <a:rPr lang="en-US" sz="1100" spc="200" kern="0" dirty="0">
                 <a:solidFill>
                   <a:srgbClr val="A68430"/>
                 </a:solidFill>
@@ -6510,9 +6529,90 @@
                 <a:ea typeface="Calibri" pitchFamily="34" charset="-122"/>
                 <a:cs typeface="Calibri" pitchFamily="34" charset="-120"/>
               </a:rPr>
-              <a:t>Computed from real lending values — not typed in.</a:t>
-            </a:r>
-            <a:endParaRPr lang="en-US" sz="1450" dirty="0"/>
+              <a:t>AND THE SAME SHOCK ACROSS ALL TWENTY</a:t>
+            </a:r>
+            <a:endParaRPr lang="en-US" sz="1100" dirty="0"/>
+          </a:p>
+        </p:txBody>
+      </p:sp>
+      <p:sp>
+        <p:nvSpPr>
+          <p:cNvPr id="19" name="Text 16"/>
+          <p:cNvSpPr txBox="1"/>
+          <p:nvPr/>
+        </p:nvSpPr>
+        <p:spPr>
+          <a:xfrm>
+            <a:off x="5623560" y="4892040"/>
+            <a:ext cx="5943600" cy="822960"/>
+          </a:xfrm>
+          <a:prstGeom prst="rect">
+            <a:avLst/>
+          </a:prstGeom>
+          <a:noFill/>
+          <a:ln/>
+        </p:spPr>
+        <p:txBody>
+          <a:bodyPr wrap="square" lIns="0" tIns="0" rIns="0" bIns="0" rtlCol="0" anchor="ctr"/>
+          <a:lstStyle/>
+          <a:p>
+            <a:pPr indent="0" marL="0">
+              <a:lnSpc>
+                <a:spcPts val="2200"/>
+              </a:lnSpc>
+              <a:buNone/>
+            </a:pPr>
+            <a:r>
+              <a:rPr lang="en-US" sz="1400" dirty="0">
+                <a:solidFill>
+                  <a:srgbClr val="5E6976"/>
+                </a:solidFill>
+                <a:latin typeface="Calibri" pitchFamily="34" charset="0"/>
+                <a:ea typeface="Calibri" pitchFamily="34" charset="-122"/>
+                <a:cs typeface="Calibri" pitchFamily="34" charset="-120"/>
+              </a:rPr>
+              <a:t>Four macro scenarios re-rank the book in place. Selecting a Middle East oil shock moves Lau to the top of Priscilla’s list, and Elena with him on commodities.</a:t>
+            </a:r>
+            <a:endParaRPr lang="en-US" sz="1400" dirty="0"/>
+          </a:p>
+        </p:txBody>
+      </p:sp>
+      <p:sp>
+        <p:nvSpPr>
+          <p:cNvPr id="20" name="Text 17"/>
+          <p:cNvSpPr txBox="1"/>
+          <p:nvPr/>
+        </p:nvSpPr>
+        <p:spPr>
+          <a:xfrm>
+            <a:off x="640080" y="6355080"/>
+            <a:ext cx="10881360" cy="274320"/>
+          </a:xfrm>
+          <a:prstGeom prst="rect">
+            <a:avLst/>
+          </a:prstGeom>
+          <a:noFill/>
+          <a:ln/>
+        </p:spPr>
+        <p:txBody>
+          <a:bodyPr wrap="square" lIns="0" tIns="0" rIns="0" bIns="0" rtlCol="0" anchor="ctr"/>
+          <a:lstStyle/>
+          <a:p>
+            <a:pPr indent="0" marL="0">
+              <a:buNone/>
+            </a:pPr>
+            <a:r>
+              <a:rPr lang="en-US" sz="1150" dirty="0">
+                <a:solidFill>
+                  <a:srgbClr val="8B96A3"/>
+                </a:solidFill>
+                <a:latin typeface="Calibri" pitchFamily="34" charset="0"/>
+                <a:ea typeface="Calibri" pitchFamily="34" charset="-122"/>
+                <a:cs typeface="Calibri" pitchFamily="34" charset="-120"/>
+              </a:rPr>
+              <a:t>Left: loan-to-value computed from the credit facility under collateral shocks. Right: scenario definitions are ours; every figure quoted inside them is read from the dataset</a:t>
+            </a:r>
+            <a:endParaRPr lang="en-US" sz="1150" dirty="0"/>
           </a:p>
         </p:txBody>
       </p:sp>

--- a/docs/Foresight-RM-Pitch.pptx
+++ b/docs/Foresight-RM-Pitch.pptx
@@ -777,7 +777,7 @@
           <a:p>
             <a:r>
               <a:rPr lang="en-US" dirty="0"/>
-              <a:t>Close on these three sentences, then move to the demonstration.</a:t>
+              <a:t>Close on the three sentences, then let the four numbers sit on screen through questions. Every one of them is read from the run, not asserted: seven of twenty clients had an RM note change the answer, six findings were held with a reason and a revisit date, forty-eight findings came from six agents, and USD 8.50m of idle cash sits above mandate.</a:t>
             </a:r>
             <a:endParaRPr lang="en-US" dirty="0"/>
           </a:p>
@@ -2523,8 +2523,8 @@
         </p:nvSpPr>
         <p:spPr>
           <a:xfrm>
-            <a:off x="640080" y="1783080"/>
-            <a:ext cx="10881360" cy="731520"/>
+            <a:off x="640080" y="1737360"/>
+            <a:ext cx="10881360" cy="594360"/>
           </a:xfrm>
           <a:prstGeom prst="rect">
             <a:avLst/>
@@ -2538,39 +2538,102 @@
           <a:p>
             <a:pPr indent="0" marL="0">
               <a:lnSpc>
-                <a:spcPts val="2400"/>
+                <a:spcPts val="2600"/>
               </a:lnSpc>
               <a:buNone/>
             </a:pPr>
             <a:r>
-              <a:rPr lang="en-US" sz="1600" dirty="0">
-                <a:solidFill>
-                  <a:srgbClr val="5E6976"/>
-                </a:solidFill>
-                <a:latin typeface="Calibri" pitchFamily="34" charset="0"/>
-                <a:ea typeface="Calibri" pitchFamily="34" charset="-122"/>
-                <a:cs typeface="Calibri" pitchFamily="34" charset="-120"/>
-              </a:rPr>
-              <a:t>The tone analysis already runs. Today it reads the twenty-eight written RM notes and produces the guidance below. Point the same pipeline at a consented meeting transcript and it reads the room instead.</a:t>
-            </a:r>
-            <a:endParaRPr lang="en-US" sz="1600" dirty="0"/>
-          </a:p>
-        </p:txBody>
-      </p:sp>
-      <p:sp>
-        <p:nvSpPr>
-          <p:cNvPr id="6" name="Shape 3"/>
+              <a:rPr lang="en-US" sz="1800" dirty="0">
+                <a:solidFill>
+                  <a:srgbClr val="141E55"/>
+                </a:solidFill>
+                <a:latin typeface="Calibri" pitchFamily="34" charset="0"/>
+                <a:ea typeface="Calibri" pitchFamily="34" charset="-122"/>
+                <a:cs typeface="Calibri" pitchFamily="34" charset="-120"/>
+              </a:rPr>
+              <a:t>Every other tool summarises the meeting and files a note. Ours feeds what was said back into what may be said next.</a:t>
+            </a:r>
+            <a:endParaRPr lang="en-US" sz="1800" dirty="0"/>
+          </a:p>
+        </p:txBody>
+      </p:sp>
+      <p:sp>
+        <p:nvSpPr>
+          <p:cNvPr id="6" name="Text 3"/>
+          <p:cNvSpPr txBox="1"/>
+          <p:nvPr/>
+        </p:nvSpPr>
+        <p:spPr>
+          <a:xfrm>
+            <a:off x="640080" y="2514600"/>
+            <a:ext cx="3383280" cy="274320"/>
+          </a:xfrm>
+          <a:prstGeom prst="rect">
+            <a:avLst/>
+          </a:prstGeom>
+          <a:noFill/>
+          <a:ln/>
+        </p:spPr>
+        <p:txBody>
+          <a:bodyPr wrap="square" lIns="0" tIns="0" rIns="0" bIns="0" rtlCol="0" anchor="ctr"/>
+          <a:lstStyle/>
+          <a:p>
+            <a:pPr indent="0" marL="0">
+              <a:buNone/>
+            </a:pPr>
+            <a:r>
+              <a:rPr lang="en-US" sz="1100" spc="160" kern="0" dirty="0">
+                <a:solidFill>
+                  <a:srgbClr val="2C6A4F"/>
+                </a:solidFill>
+                <a:latin typeface="Calibri" pitchFamily="34" charset="0"/>
+                <a:ea typeface="Calibri" pitchFamily="34" charset="-122"/>
+                <a:cs typeface="Calibri" pitchFamily="34" charset="-120"/>
+              </a:rPr>
+              <a:t>BUILT TODAY · CONSENT BEFORE RECORDING</a:t>
+            </a:r>
+            <a:endParaRPr lang="en-US" sz="1100" dirty="0"/>
+          </a:p>
+        </p:txBody>
+      </p:sp>
+      <p:pic>
+        <p:nvPicPr>
+          <p:cNvPr id="7" name="Image 1" descr="screens/c-consent.png">    </p:cNvPr>
+          <p:cNvPicPr>
+            <a:picLocks noChangeAspect="1"/>
+          </p:cNvPicPr>
+          <p:nvPr/>
+        </p:nvPicPr>
+        <p:blipFill>
+          <a:blip r:embed="rId2"/>
+          <a:stretch>
+            <a:fillRect/>
+          </a:stretch>
+        </p:blipFill>
+        <p:spPr>
+          <a:xfrm>
+            <a:off x="640080" y="2788920"/>
+            <a:ext cx="2971800" cy="3337560"/>
+          </a:xfrm>
+          <a:prstGeom prst="rect">
+            <a:avLst/>
+          </a:prstGeom>
+        </p:spPr>
+      </p:pic>
+      <p:sp>
+        <p:nvSpPr>
+          <p:cNvPr id="8" name="Shape 4"/>
           <p:cNvSpPr/>
           <p:nvPr/>
         </p:nvSpPr>
         <p:spPr>
           <a:xfrm>
-            <a:off x="640080" y="2697480"/>
-            <a:ext cx="5349240" cy="2148840"/>
+            <a:off x="4114800" y="2514600"/>
+            <a:ext cx="7434072" cy="1737360"/>
           </a:xfrm>
           <a:prstGeom prst="roundRect">
             <a:avLst>
-              <a:gd name="adj" fmla="val 2553"/>
+              <a:gd name="adj" fmla="val 3158"/>
             </a:avLst>
           </a:prstGeom>
           <a:solidFill>
@@ -2586,14 +2649,14 @@
       </p:sp>
       <p:sp>
         <p:nvSpPr>
-          <p:cNvPr id="7" name="Text 4"/>
-          <p:cNvSpPr txBox="1"/>
-          <p:nvPr/>
-        </p:nvSpPr>
-        <p:spPr>
-          <a:xfrm>
-            <a:off x="914400" y="2880360"/>
-            <a:ext cx="4846320" cy="274320"/>
+          <p:cNvPr id="9" name="Text 5"/>
+          <p:cNvSpPr txBox="1"/>
+          <p:nvPr/>
+        </p:nvSpPr>
+        <p:spPr>
+          <a:xfrm>
+            <a:off x="4434840" y="2724912"/>
+            <a:ext cx="6858000" cy="274320"/>
           </a:xfrm>
           <a:prstGeom prst="rect">
             <a:avLst/>
@@ -2617,7 +2680,7 @@
                 <a:ea typeface="Calibri" pitchFamily="34" charset="-122"/>
                 <a:cs typeface="Calibri" pitchFamily="34" charset="-120"/>
               </a:rPr>
-              <a:t>LIVE TODAY  ·  FROM WRITTEN NOTES</a:t>
+              <a:t>LIVE TODAY  ·  FROM THE 28 WRITTEN RM NOTES</a:t>
             </a:r>
             <a:endParaRPr lang="en-US" sz="1250" dirty="0"/>
           </a:p>
@@ -2625,14 +2688,14 @@
       </p:sp>
       <p:sp>
         <p:nvSpPr>
-          <p:cNvPr id="8" name="Text 5"/>
-          <p:cNvSpPr txBox="1"/>
-          <p:nvPr/>
-        </p:nvSpPr>
-        <p:spPr>
-          <a:xfrm>
-            <a:off x="914400" y="3246120"/>
-            <a:ext cx="4846320" cy="1371600"/>
+          <p:cNvPr id="10" name="Text 6"/>
+          <p:cNvSpPr txBox="1"/>
+          <p:nvPr/>
+        </p:nvSpPr>
+        <p:spPr>
+          <a:xfrm>
+            <a:off x="4434840" y="3108960"/>
+            <a:ext cx="6858000" cy="960120"/>
           </a:xfrm>
           <a:prstGeom prst="rect">
             <a:avLst/>
@@ -2646,7 +2709,7 @@
           <a:p>
             <a:pPr indent="0" marL="0">
               <a:lnSpc>
-                <a:spcPts val="2200"/>
+                <a:spcPts val="2300"/>
               </a:lnSpc>
               <a:buNone/>
             </a:pPr>
@@ -2667,18 +2730,18 @@
       </p:sp>
       <p:sp>
         <p:nvSpPr>
-          <p:cNvPr id="9" name="Shape 6"/>
+          <p:cNvPr id="11" name="Shape 7"/>
           <p:cNvSpPr/>
           <p:nvPr/>
         </p:nvSpPr>
         <p:spPr>
           <a:xfrm>
-            <a:off x="6172200" y="2697480"/>
-            <a:ext cx="5349240" cy="2148840"/>
+            <a:off x="4114800" y="4389120"/>
+            <a:ext cx="7434072" cy="1737360"/>
           </a:xfrm>
           <a:prstGeom prst="roundRect">
             <a:avLst>
-              <a:gd name="adj" fmla="val 2553"/>
+              <a:gd name="adj" fmla="val 3158"/>
             </a:avLst>
           </a:prstGeom>
           <a:solidFill>
@@ -2694,14 +2757,14 @@
       </p:sp>
       <p:sp>
         <p:nvSpPr>
-          <p:cNvPr id="10" name="Text 7"/>
-          <p:cNvSpPr txBox="1"/>
-          <p:nvPr/>
-        </p:nvSpPr>
-        <p:spPr>
-          <a:xfrm>
-            <a:off x="6446520" y="2880360"/>
-            <a:ext cx="4846320" cy="274320"/>
+          <p:cNvPr id="12" name="Text 8"/>
+          <p:cNvSpPr txBox="1"/>
+          <p:nvPr/>
+        </p:nvSpPr>
+        <p:spPr>
+          <a:xfrm>
+            <a:off x="4434840" y="4599432"/>
+            <a:ext cx="6858000" cy="274320"/>
           </a:xfrm>
           <a:prstGeom prst="rect">
             <a:avLst/>
@@ -2733,14 +2796,14 @@
       </p:sp>
       <p:sp>
         <p:nvSpPr>
-          <p:cNvPr id="11" name="Text 8"/>
-          <p:cNvSpPr txBox="1"/>
-          <p:nvPr/>
-        </p:nvSpPr>
-        <p:spPr>
-          <a:xfrm>
-            <a:off x="6537960" y="3246120"/>
-            <a:ext cx="4709160" cy="1371600"/>
+          <p:cNvPr id="13" name="Text 9"/>
+          <p:cNvSpPr txBox="1"/>
+          <p:nvPr/>
+        </p:nvSpPr>
+        <p:spPr>
+          <a:xfrm>
+            <a:off x="4572000" y="4983480"/>
+            <a:ext cx="6675120" cy="1005840"/>
           </a:xfrm>
           <a:prstGeom prst="rect">
             <a:avLst/>
@@ -2753,14 +2816,17 @@
           <a:lstStyle/>
           <a:p>
             <a:pPr marL="342900" indent="-342900">
+              <a:lnSpc>
+                <a:spcPts val="1900"/>
+              </a:lnSpc>
               <a:spcAft>
-                <a:spcPts val="700"/>
+                <a:spcPts val="500"/>
               </a:spcAft>
               <a:buSzPct val="100000"/>
               <a:buChar char="•"/>
             </a:pPr>
             <a:r>
-              <a:rPr lang="en-US" sz="1250" dirty="0">
+              <a:rPr lang="en-US" sz="1300" dirty="0">
                 <a:solidFill>
                   <a:srgbClr val="5E6976"/>
                 </a:solidFill>
@@ -2770,18 +2836,21 @@
               </a:rPr>
               <a:t>Consent captured before anything records.</a:t>
             </a:r>
-            <a:endParaRPr lang="en-US" sz="1250" dirty="0"/>
+            <a:endParaRPr lang="en-US" sz="1300" dirty="0"/>
           </a:p>
           <a:p>
             <a:pPr marL="342900" indent="-342900">
+              <a:lnSpc>
+                <a:spcPts val="1900"/>
+              </a:lnSpc>
               <a:spcAft>
-                <a:spcPts val="700"/>
+                <a:spcPts val="500"/>
               </a:spcAft>
               <a:buSzPct val="100000"/>
               <a:buChar char="•"/>
             </a:pPr>
             <a:r>
-              <a:rPr lang="en-US" sz="1250" dirty="0">
+              <a:rPr lang="en-US" sz="1300" dirty="0">
                 <a:solidFill>
                   <a:srgbClr val="5E6976"/>
                 </a:solidFill>
@@ -2791,18 +2860,21 @@
               </a:rPr>
               <a:t>Tone and concerns extracted from the meeting.</a:t>
             </a:r>
-            <a:endParaRPr lang="en-US" sz="1250" dirty="0"/>
+            <a:endParaRPr lang="en-US" sz="1300" dirty="0"/>
           </a:p>
           <a:p>
             <a:pPr marL="342900" indent="-342900">
+              <a:lnSpc>
+                <a:spcPts val="1900"/>
+              </a:lnSpc>
               <a:spcAft>
-                <a:spcPts val="700"/>
+                <a:spcPts val="500"/>
               </a:spcAft>
               <a:buSzPct val="100000"/>
               <a:buChar char="•"/>
             </a:pPr>
             <a:r>
-              <a:rPr lang="en-US" sz="1250" dirty="0">
+              <a:rPr lang="en-US" sz="1300" dirty="0">
                 <a:solidFill>
                   <a:srgbClr val="5E6976"/>
                 </a:solidFill>
@@ -2810,163 +2882,15 @@
                 <a:ea typeface="Calibri" pitchFamily="34" charset="-122"/>
                 <a:cs typeface="Calibri" pitchFamily="34" charset="-120"/>
               </a:rPr>
-              <a:t>Those become constraints — so the gate holds a</a:t>
-            </a:r>
-            <a:endParaRPr lang="en-US" sz="1250" dirty="0"/>
-          </a:p>
-          <a:p>
-            <a:pPr indent="0" marL="0">
-              <a:spcAft>
-                <a:spcPts val="700"/>
-              </a:spcAft>
-              <a:buNone/>
-            </a:pPr>
-            <a:r>
-              <a:rPr lang="en-US" sz="1250" dirty="0">
-                <a:solidFill>
-                  <a:srgbClr val="5E6976"/>
-                </a:solidFill>
-                <a:latin typeface="Calibri" pitchFamily="34" charset="0"/>
-                <a:ea typeface="Calibri" pitchFamily="34" charset="-122"/>
-                <a:cs typeface="Calibri" pitchFamily="34" charset="-120"/>
-              </a:rPr>
-              <a:t>    recommendation the client is not ready to hear.</a:t>
-            </a:r>
-            <a:endParaRPr lang="en-US" sz="1250" dirty="0"/>
-          </a:p>
-        </p:txBody>
-      </p:sp>
-      <p:pic>
-        <p:nvPicPr>
-          <p:cNvPr id="12" name="Image 1" descr="screens/c-recorder.png">    </p:cNvPr>
-          <p:cNvPicPr>
-            <a:picLocks noChangeAspect="1"/>
-          </p:cNvPicPr>
-          <p:nvPr/>
-        </p:nvPicPr>
-        <p:blipFill>
-          <a:blip r:embed="rId2"/>
-          <a:stretch>
-            <a:fillRect/>
-          </a:stretch>
-        </p:blipFill>
-        <p:spPr>
-          <a:xfrm>
-            <a:off x="640080" y="5029200"/>
-            <a:ext cx="941832" cy="1188720"/>
-          </a:xfrm>
-          <a:prstGeom prst="rect">
-            <a:avLst/>
-          </a:prstGeom>
-        </p:spPr>
-      </p:pic>
-      <p:sp>
-        <p:nvSpPr>
-          <p:cNvPr id="13" name="Text 9"/>
-          <p:cNvSpPr txBox="1"/>
-          <p:nvPr/>
-        </p:nvSpPr>
-        <p:spPr>
-          <a:xfrm>
-            <a:off x="1783080" y="5074920"/>
-            <a:ext cx="4023360" cy="548640"/>
-          </a:xfrm>
-          <a:prstGeom prst="rect">
-            <a:avLst/>
-          </a:prstGeom>
-          <a:noFill/>
-          <a:ln/>
-        </p:spPr>
-        <p:txBody>
-          <a:bodyPr wrap="square" lIns="0" tIns="0" rIns="0" bIns="0" rtlCol="0" anchor="ctr"/>
-          <a:lstStyle/>
-          <a:p>
-            <a:pPr indent="0" marL="0">
-              <a:lnSpc>
-                <a:spcPts val="2000"/>
-              </a:lnSpc>
-              <a:buNone/>
-            </a:pPr>
-            <a:r>
-              <a:rPr lang="en-US" sz="1350" dirty="0">
-                <a:solidFill>
-                  <a:srgbClr val="5E6976"/>
-                </a:solidFill>
-                <a:latin typeface="Calibri" pitchFamily="34" charset="0"/>
-                <a:ea typeface="Calibri" pitchFamily="34" charset="-122"/>
-                <a:cs typeface="Calibri" pitchFamily="34" charset="-120"/>
-              </a:rPr>
-              <a:t>Consent is captured and logged before the microphone opens.</a:t>
-            </a:r>
-            <a:endParaRPr lang="en-US" sz="1350" dirty="0"/>
+              <a:t>Those become constraints — so the gate holds a recommendation the client is not ready to hear.</a:t>
+            </a:r>
+            <a:endParaRPr lang="en-US" sz="1300" dirty="0"/>
           </a:p>
         </p:txBody>
       </p:sp>
       <p:sp>
         <p:nvSpPr>
           <p:cNvPr id="14" name="Text 10"/>
-          <p:cNvSpPr txBox="1"/>
-          <p:nvPr/>
-        </p:nvSpPr>
-        <p:spPr>
-          <a:xfrm>
-            <a:off x="6035040" y="5029200"/>
-            <a:ext cx="5486400" cy="914400"/>
-          </a:xfrm>
-          <a:prstGeom prst="rect">
-            <a:avLst/>
-          </a:prstGeom>
-          <a:noFill/>
-          <a:ln/>
-        </p:spPr>
-        <p:txBody>
-          <a:bodyPr wrap="square" lIns="0" tIns="0" rIns="0" bIns="0" rtlCol="0" anchor="ctr"/>
-          <a:lstStyle/>
-          <a:p>
-            <a:pPr indent="0" marL="0">
-              <a:lnSpc>
-                <a:spcPts val="2600"/>
-              </a:lnSpc>
-              <a:buNone/>
-            </a:pPr>
-            <a:r>
-              <a:rPr lang="en-US" sz="1650" dirty="0">
-                <a:solidFill>
-                  <a:srgbClr val="141E55"/>
-                </a:solidFill>
-                <a:latin typeface="Calibri" pitchFamily="34" charset="0"/>
-                <a:ea typeface="Calibri" pitchFamily="34" charset="-122"/>
-                <a:cs typeface="Calibri" pitchFamily="34" charset="-120"/>
-              </a:rPr>
-              <a:t>Every other tool summarises the meeting and files a note.</a:t>
-            </a:r>
-            <a:endParaRPr lang="en-US" sz="1650" dirty="0"/>
-          </a:p>
-          <a:p>
-            <a:pPr indent="0" marL="0">
-              <a:lnSpc>
-                <a:spcPts val="2600"/>
-              </a:lnSpc>
-              <a:buNone/>
-            </a:pPr>
-            <a:r>
-              <a:rPr lang="en-US" sz="1650" dirty="0">
-                <a:solidFill>
-                  <a:srgbClr val="141E55"/>
-                </a:solidFill>
-                <a:latin typeface="Calibri" pitchFamily="34" charset="0"/>
-                <a:ea typeface="Calibri" pitchFamily="34" charset="-122"/>
-                <a:cs typeface="Calibri" pitchFamily="34" charset="-120"/>
-              </a:rPr>
-              <a:t>Ours feeds what was said back into what may be said next.</a:t>
-            </a:r>
-            <a:endParaRPr lang="en-US" sz="1650" dirty="0"/>
-          </a:p>
-        </p:txBody>
-      </p:sp>
-      <p:sp>
-        <p:nvSpPr>
-          <p:cNvPr id="15" name="Text 11"/>
           <p:cNvSpPr txBox="1"/>
           <p:nvPr/>
         </p:nvSpPr>
@@ -2997,7 +2921,7 @@
                 <a:ea typeface="Calibri" pitchFamily="34" charset="-122"/>
                 <a:cs typeface="Calibri" pitchFamily="34" charset="-120"/>
               </a:rPr>
-              <a:t>No transcript exists in the supplied dataset, so none was fabricated — the analysis runs on the real notes instead</a:t>
+              <a:t>The tone analysis runs live on the written notes. No transcript exists in the supplied dataset, so none was fabricated</a:t>
             </a:r>
             <a:endParaRPr lang="en-US" sz="1150" dirty="0"/>
           </a:p>
@@ -3043,7 +2967,7 @@
         </p:nvSpPr>
         <p:spPr>
           <a:xfrm>
-            <a:off x="822960" y="685800"/>
+            <a:off x="822960" y="640080"/>
             <a:ext cx="8229600" cy="256032"/>
           </a:xfrm>
           <a:prstGeom prst="rect">
@@ -3082,8 +3006,8 @@
         </p:nvSpPr>
         <p:spPr>
           <a:xfrm>
-            <a:off x="822960" y="1691640"/>
-            <a:ext cx="10515600" cy="3291840"/>
+            <a:off x="822960" y="1325880"/>
+            <a:ext cx="10515600" cy="960120"/>
           </a:xfrm>
           <a:prstGeom prst="rect">
             <a:avLst/>
@@ -3097,12 +3021,12 @@
           <a:p>
             <a:pPr indent="0" marL="0">
               <a:lnSpc>
-                <a:spcPts val="4000"/>
+                <a:spcPts val="3600"/>
               </a:lnSpc>
               <a:buNone/>
             </a:pPr>
             <a:r>
-              <a:rPr lang="en-US" sz="2500" dirty="0">
+              <a:rPr lang="en-US" sz="2400" dirty="0">
                 <a:solidFill>
                   <a:srgbClr val="FFFFFF"/>
                 </a:solidFill>
@@ -3112,17 +3036,17 @@
               </a:rPr>
               <a:t>Lau’s flat, shares, bond, derivative, job and loan are one bet —</a:t>
             </a:r>
-            <a:endParaRPr lang="en-US" sz="2500" dirty="0"/>
+            <a:endParaRPr lang="en-US" sz="2400" dirty="0"/>
           </a:p>
           <a:p>
             <a:pPr indent="0" marL="0">
               <a:lnSpc>
-                <a:spcPts val="4000"/>
+                <a:spcPts val="3600"/>
               </a:lnSpc>
               <a:buNone/>
             </a:pPr>
             <a:r>
-              <a:rPr lang="en-US" sz="2500" dirty="0">
+              <a:rPr lang="en-US" sz="2400" dirty="0">
                 <a:solidFill>
                   <a:srgbClr val="FFFFFF"/>
                 </a:solidFill>
@@ -3132,17 +3056,39 @@
               </a:rPr>
               <a:t>and no system in the bank could see it.</a:t>
             </a:r>
-            <a:endParaRPr lang="en-US" sz="2500" dirty="0"/>
-          </a:p>
+            <a:endParaRPr lang="en-US" sz="2400" dirty="0"/>
+          </a:p>
+        </p:txBody>
+      </p:sp>
+      <p:sp>
+        <p:nvSpPr>
+          <p:cNvPr id="4" name="Text 2"/>
+          <p:cNvSpPr txBox="1"/>
+          <p:nvPr/>
+        </p:nvSpPr>
+        <p:spPr>
+          <a:xfrm>
+            <a:off x="822960" y="2487168"/>
+            <a:ext cx="10515600" cy="960120"/>
+          </a:xfrm>
+          <a:prstGeom prst="rect">
+            <a:avLst/>
+          </a:prstGeom>
+          <a:noFill/>
+          <a:ln/>
+        </p:spPr>
+        <p:txBody>
+          <a:bodyPr wrap="square" lIns="0" tIns="0" rIns="0" bIns="0" rtlCol="0" anchor="ctr"/>
+          <a:lstStyle/>
           <a:p>
             <a:pPr indent="0" marL="0">
               <a:lnSpc>
-                <a:spcPts val="4000"/>
+                <a:spcPts val="3600"/>
               </a:lnSpc>
               <a:buNone/>
             </a:pPr>
             <a:r>
-              <a:rPr lang="en-US" sz="2500" dirty="0">
+              <a:rPr lang="en-US" sz="2400" dirty="0">
                 <a:solidFill>
                   <a:srgbClr val="FFFFFF"/>
                 </a:solidFill>
@@ -3150,19 +3096,19 @@
                 <a:ea typeface="Calibri" pitchFamily="34" charset="-122"/>
                 <a:cs typeface="Calibri" pitchFamily="34" charset="-120"/>
               </a:rPr>
-              <a:t> </a:t>
-            </a:r>
-            <a:endParaRPr lang="en-US" sz="2500" dirty="0"/>
+              <a:t>Priscilla worked it out in March and typed it into a note.</a:t>
+            </a:r>
+            <a:endParaRPr lang="en-US" sz="2400" dirty="0"/>
           </a:p>
           <a:p>
             <a:pPr indent="0" marL="0">
               <a:lnSpc>
-                <a:spcPts val="4000"/>
+                <a:spcPts val="3600"/>
               </a:lnSpc>
               <a:buNone/>
             </a:pPr>
             <a:r>
-              <a:rPr lang="en-US" sz="2500" dirty="0">
+              <a:rPr lang="en-US" sz="2400" dirty="0">
                 <a:solidFill>
                   <a:srgbClr val="FFFFFF"/>
                 </a:solidFill>
@@ -3170,19 +3116,41 @@
                 <a:ea typeface="Calibri" pitchFamily="34" charset="-122"/>
                 <a:cs typeface="Calibri" pitchFamily="34" charset="-120"/>
               </a:rPr>
-              <a:t>Priscilla worked it out in March and typed it into a note.</a:t>
-            </a:r>
-            <a:endParaRPr lang="en-US" sz="2500" dirty="0"/>
-          </a:p>
+              <a:t>Nothing read it.</a:t>
+            </a:r>
+            <a:endParaRPr lang="en-US" sz="2400" dirty="0"/>
+          </a:p>
+        </p:txBody>
+      </p:sp>
+      <p:sp>
+        <p:nvSpPr>
+          <p:cNvPr id="5" name="Text 3"/>
+          <p:cNvSpPr txBox="1"/>
+          <p:nvPr/>
+        </p:nvSpPr>
+        <p:spPr>
+          <a:xfrm>
+            <a:off x="822960" y="3648456"/>
+            <a:ext cx="10515600" cy="960120"/>
+          </a:xfrm>
+          <a:prstGeom prst="rect">
+            <a:avLst/>
+          </a:prstGeom>
+          <a:noFill/>
+          <a:ln/>
+        </p:spPr>
+        <p:txBody>
+          <a:bodyPr wrap="square" lIns="0" tIns="0" rIns="0" bIns="0" rtlCol="0" anchor="ctr"/>
+          <a:lstStyle/>
           <a:p>
             <a:pPr indent="0" marL="0">
               <a:lnSpc>
-                <a:spcPts val="4000"/>
+                <a:spcPts val="3600"/>
               </a:lnSpc>
               <a:buNone/>
             </a:pPr>
             <a:r>
-              <a:rPr lang="en-US" sz="2500" dirty="0">
+              <a:rPr lang="en-US" sz="2400" dirty="0">
                 <a:solidFill>
                   <a:srgbClr val="FFFFFF"/>
                 </a:solidFill>
@@ -3190,19 +3158,19 @@
                 <a:ea typeface="Calibri" pitchFamily="34" charset="-122"/>
                 <a:cs typeface="Calibri" pitchFamily="34" charset="-120"/>
               </a:rPr>
-              <a:t>Nothing read it.</a:t>
-            </a:r>
-            <a:endParaRPr lang="en-US" sz="2500" dirty="0"/>
+              <a:t>We read the notes with the numbers — and we know when the</a:t>
+            </a:r>
+            <a:endParaRPr lang="en-US" sz="2400" dirty="0"/>
           </a:p>
           <a:p>
             <a:pPr indent="0" marL="0">
               <a:lnSpc>
-                <a:spcPts val="4000"/>
+                <a:spcPts val="3600"/>
               </a:lnSpc>
               <a:buNone/>
             </a:pPr>
             <a:r>
-              <a:rPr lang="en-US" sz="2500" dirty="0">
+              <a:rPr lang="en-US" sz="2400" dirty="0">
                 <a:solidFill>
                   <a:srgbClr val="FFFFFF"/>
                 </a:solidFill>
@@ -3210,19 +3178,179 @@
                 <a:ea typeface="Calibri" pitchFamily="34" charset="-122"/>
                 <a:cs typeface="Calibri" pitchFamily="34" charset="-120"/>
               </a:rPr>
-              <a:t> </a:t>
-            </a:r>
-            <a:endParaRPr lang="en-US" sz="2500" dirty="0"/>
-          </a:p>
+              <a:t>right answer is still the wrong thing to say.</a:t>
+            </a:r>
+            <a:endParaRPr lang="en-US" sz="2400" dirty="0"/>
+          </a:p>
+        </p:txBody>
+      </p:sp>
+      <p:sp>
+        <p:nvSpPr>
+          <p:cNvPr id="6" name="Shape 4"/>
+          <p:cNvSpPr/>
+          <p:nvPr/>
+        </p:nvSpPr>
+        <p:spPr>
+          <a:xfrm>
+            <a:off x="822960" y="4846320"/>
+            <a:ext cx="10789920" cy="12802"/>
+          </a:xfrm>
+          <a:prstGeom prst="rect">
+            <a:avLst/>
+          </a:prstGeom>
+          <a:solidFill>
+            <a:srgbClr val="C9A94A"/>
+          </a:solidFill>
+          <a:ln/>
+        </p:spPr>
+      </p:sp>
+      <p:sp>
+        <p:nvSpPr>
+          <p:cNvPr id="7" name="Shape 5"/>
+          <p:cNvSpPr/>
+          <p:nvPr/>
+        </p:nvSpPr>
+        <p:spPr>
+          <a:xfrm>
+            <a:off x="822960" y="5102352"/>
+            <a:ext cx="457200" cy="10973"/>
+          </a:xfrm>
+          <a:prstGeom prst="rect">
+            <a:avLst/>
+          </a:prstGeom>
+          <a:solidFill>
+            <a:srgbClr val="C9A94A"/>
+          </a:solidFill>
+          <a:ln/>
+        </p:spPr>
+      </p:sp>
+      <p:sp>
+        <p:nvSpPr>
+          <p:cNvPr id="8" name="Text 6"/>
+          <p:cNvSpPr txBox="1"/>
+          <p:nvPr/>
+        </p:nvSpPr>
+        <p:spPr>
+          <a:xfrm>
+            <a:off x="822960" y="5230368"/>
+            <a:ext cx="2560320" cy="457200"/>
+          </a:xfrm>
+          <a:prstGeom prst="rect">
+            <a:avLst/>
+          </a:prstGeom>
+          <a:noFill/>
+          <a:ln/>
+        </p:spPr>
+        <p:txBody>
+          <a:bodyPr wrap="square" lIns="0" tIns="0" rIns="0" bIns="0" rtlCol="0" anchor="ctr"/>
+          <a:lstStyle/>
+          <a:p>
+            <a:pPr indent="0" marL="0">
+              <a:buNone/>
+            </a:pPr>
+            <a:r>
+              <a:rPr lang="en-US" sz="2900" spc="100" kern="0" dirty="0">
+                <a:solidFill>
+                  <a:srgbClr val="FFFFFF"/>
+                </a:solidFill>
+                <a:latin typeface="Calibri" pitchFamily="34" charset="0"/>
+                <a:ea typeface="Calibri" pitchFamily="34" charset="-122"/>
+                <a:cs typeface="Calibri" pitchFamily="34" charset="-120"/>
+              </a:rPr>
+              <a:t>7 of 20</a:t>
+            </a:r>
+            <a:endParaRPr lang="en-US" sz="2900" dirty="0"/>
+          </a:p>
+        </p:txBody>
+      </p:sp>
+      <p:sp>
+        <p:nvSpPr>
+          <p:cNvPr id="9" name="Text 7"/>
+          <p:cNvSpPr txBox="1"/>
+          <p:nvPr/>
+        </p:nvSpPr>
+        <p:spPr>
+          <a:xfrm>
+            <a:off x="822960" y="5724144"/>
+            <a:ext cx="2468880" cy="548640"/>
+          </a:xfrm>
+          <a:prstGeom prst="rect">
+            <a:avLst/>
+          </a:prstGeom>
+          <a:noFill/>
+          <a:ln/>
+        </p:spPr>
+        <p:txBody>
+          <a:bodyPr wrap="square" lIns="0" tIns="0" rIns="0" bIns="0" rtlCol="0" anchor="ctr"/>
+          <a:lstStyle/>
           <a:p>
             <a:pPr indent="0" marL="0">
               <a:lnSpc>
-                <a:spcPts val="4000"/>
+                <a:spcPts val="1600"/>
               </a:lnSpc>
               <a:buNone/>
             </a:pPr>
             <a:r>
-              <a:rPr lang="en-US" sz="2500" dirty="0">
+              <a:rPr lang="en-US" sz="1200" dirty="0">
+                <a:solidFill>
+                  <a:srgbClr val="9AAAE0"/>
+                </a:solidFill>
+                <a:latin typeface="Calibri" pitchFamily="34" charset="0"/>
+                <a:ea typeface="Calibri" pitchFamily="34" charset="-122"/>
+                <a:cs typeface="Calibri" pitchFamily="34" charset="-120"/>
+              </a:rPr>
+              <a:t>Clients where an RM note changed the answer</a:t>
+            </a:r>
+            <a:endParaRPr lang="en-US" sz="1200" dirty="0"/>
+          </a:p>
+        </p:txBody>
+      </p:sp>
+      <p:sp>
+        <p:nvSpPr>
+          <p:cNvPr id="10" name="Shape 8"/>
+          <p:cNvSpPr/>
+          <p:nvPr/>
+        </p:nvSpPr>
+        <p:spPr>
+          <a:xfrm>
+            <a:off x="3547872" y="5102352"/>
+            <a:ext cx="457200" cy="10973"/>
+          </a:xfrm>
+          <a:prstGeom prst="rect">
+            <a:avLst/>
+          </a:prstGeom>
+          <a:solidFill>
+            <a:srgbClr val="C9A94A"/>
+          </a:solidFill>
+          <a:ln/>
+        </p:spPr>
+      </p:sp>
+      <p:sp>
+        <p:nvSpPr>
+          <p:cNvPr id="11" name="Text 9"/>
+          <p:cNvSpPr txBox="1"/>
+          <p:nvPr/>
+        </p:nvSpPr>
+        <p:spPr>
+          <a:xfrm>
+            <a:off x="3547872" y="5230368"/>
+            <a:ext cx="2560320" cy="457200"/>
+          </a:xfrm>
+          <a:prstGeom prst="rect">
+            <a:avLst/>
+          </a:prstGeom>
+          <a:noFill/>
+          <a:ln/>
+        </p:spPr>
+        <p:txBody>
+          <a:bodyPr wrap="square" lIns="0" tIns="0" rIns="0" bIns="0" rtlCol="0" anchor="ctr"/>
+          <a:lstStyle/>
+          <a:p>
+            <a:pPr indent="0" marL="0">
+              <a:buNone/>
+            </a:pPr>
+            <a:r>
+              <a:rPr lang="en-US" sz="2900" spc="100" kern="0" dirty="0">
                 <a:solidFill>
                   <a:srgbClr val="FFFFFF"/>
                 </a:solidFill>
@@ -3230,19 +3358,100 @@
                 <a:ea typeface="Calibri" pitchFamily="34" charset="-122"/>
                 <a:cs typeface="Calibri" pitchFamily="34" charset="-120"/>
               </a:rPr>
-              <a:t>We read the notes with the numbers — and we know when the</a:t>
-            </a:r>
-            <a:endParaRPr lang="en-US" sz="2500" dirty="0"/>
-          </a:p>
+              <a:t>6</a:t>
+            </a:r>
+            <a:endParaRPr lang="en-US" sz="2900" dirty="0"/>
+          </a:p>
+        </p:txBody>
+      </p:sp>
+      <p:sp>
+        <p:nvSpPr>
+          <p:cNvPr id="12" name="Text 10"/>
+          <p:cNvSpPr txBox="1"/>
+          <p:nvPr/>
+        </p:nvSpPr>
+        <p:spPr>
+          <a:xfrm>
+            <a:off x="3547872" y="5724144"/>
+            <a:ext cx="2468880" cy="548640"/>
+          </a:xfrm>
+          <a:prstGeom prst="rect">
+            <a:avLst/>
+          </a:prstGeom>
+          <a:noFill/>
+          <a:ln/>
+        </p:spPr>
+        <p:txBody>
+          <a:bodyPr wrap="square" lIns="0" tIns="0" rIns="0" bIns="0" rtlCol="0" anchor="ctr"/>
+          <a:lstStyle/>
           <a:p>
             <a:pPr indent="0" marL="0">
               <a:lnSpc>
-                <a:spcPts val="4000"/>
+                <a:spcPts val="1600"/>
               </a:lnSpc>
               <a:buNone/>
             </a:pPr>
             <a:r>
-              <a:rPr lang="en-US" sz="2500" dirty="0">
+              <a:rPr lang="en-US" sz="1200" dirty="0">
+                <a:solidFill>
+                  <a:srgbClr val="9AAAE0"/>
+                </a:solidFill>
+                <a:latin typeface="Calibri" pitchFamily="34" charset="0"/>
+                <a:ea typeface="Calibri" pitchFamily="34" charset="-122"/>
+                <a:cs typeface="Calibri" pitchFamily="34" charset="-120"/>
+              </a:rPr>
+              <a:t>Findings held, each with a reason and a revisit date</a:t>
+            </a:r>
+            <a:endParaRPr lang="en-US" sz="1200" dirty="0"/>
+          </a:p>
+        </p:txBody>
+      </p:sp>
+      <p:sp>
+        <p:nvSpPr>
+          <p:cNvPr id="13" name="Shape 11"/>
+          <p:cNvSpPr/>
+          <p:nvPr/>
+        </p:nvSpPr>
+        <p:spPr>
+          <a:xfrm>
+            <a:off x="6272784" y="5102352"/>
+            <a:ext cx="457200" cy="10973"/>
+          </a:xfrm>
+          <a:prstGeom prst="rect">
+            <a:avLst/>
+          </a:prstGeom>
+          <a:solidFill>
+            <a:srgbClr val="C9A94A"/>
+          </a:solidFill>
+          <a:ln/>
+        </p:spPr>
+      </p:sp>
+      <p:sp>
+        <p:nvSpPr>
+          <p:cNvPr id="14" name="Text 12"/>
+          <p:cNvSpPr txBox="1"/>
+          <p:nvPr/>
+        </p:nvSpPr>
+        <p:spPr>
+          <a:xfrm>
+            <a:off x="6272784" y="5230368"/>
+            <a:ext cx="2560320" cy="457200"/>
+          </a:xfrm>
+          <a:prstGeom prst="rect">
+            <a:avLst/>
+          </a:prstGeom>
+          <a:noFill/>
+          <a:ln/>
+        </p:spPr>
+        <p:txBody>
+          <a:bodyPr wrap="square" lIns="0" tIns="0" rIns="0" bIns="0" rtlCol="0" anchor="ctr"/>
+          <a:lstStyle/>
+          <a:p>
+            <a:pPr indent="0" marL="0">
+              <a:buNone/>
+            </a:pPr>
+            <a:r>
+              <a:rPr lang="en-US" sz="2900" spc="100" kern="0" dirty="0">
                 <a:solidFill>
                   <a:srgbClr val="FFFFFF"/>
                 </a:solidFill>
@@ -3250,40 +3459,183 @@
                 <a:ea typeface="Calibri" pitchFamily="34" charset="-122"/>
                 <a:cs typeface="Calibri" pitchFamily="34" charset="-120"/>
               </a:rPr>
-              <a:t>right answer is still the wrong thing to say.</a:t>
-            </a:r>
-            <a:endParaRPr lang="en-US" sz="2500" dirty="0"/>
-          </a:p>
-        </p:txBody>
-      </p:sp>
-      <p:sp>
-        <p:nvSpPr>
-          <p:cNvPr id="4" name="Text 2"/>
-          <p:cNvSpPr txBox="1"/>
-          <p:nvPr/>
-        </p:nvSpPr>
-        <p:spPr>
-          <a:xfrm>
-            <a:off x="822960" y="5669280"/>
-            <a:ext cx="10515600" cy="365760"/>
-          </a:xfrm>
-          <a:prstGeom prst="rect">
-            <a:avLst/>
-          </a:prstGeom>
-          <a:noFill/>
-          <a:ln/>
-        </p:spPr>
-        <p:txBody>
-          <a:bodyPr wrap="square" lIns="0" tIns="0" rIns="0" bIns="0" rtlCol="0" anchor="ctr"/>
-          <a:lstStyle/>
-          <a:p>
-            <a:pPr indent="0" marL="0">
-              <a:buNone/>
-            </a:pPr>
-            <a:r>
-              <a:rPr lang="en-US" sz="1450" dirty="0">
-                <a:solidFill>
-                  <a:srgbClr val="7186D3"/>
+              <a:t>48</a:t>
+            </a:r>
+            <a:endParaRPr lang="en-US" sz="2900" dirty="0"/>
+          </a:p>
+        </p:txBody>
+      </p:sp>
+      <p:sp>
+        <p:nvSpPr>
+          <p:cNvPr id="15" name="Text 13"/>
+          <p:cNvSpPr txBox="1"/>
+          <p:nvPr/>
+        </p:nvSpPr>
+        <p:spPr>
+          <a:xfrm>
+            <a:off x="6272784" y="5724144"/>
+            <a:ext cx="2468880" cy="548640"/>
+          </a:xfrm>
+          <a:prstGeom prst="rect">
+            <a:avLst/>
+          </a:prstGeom>
+          <a:noFill/>
+          <a:ln/>
+        </p:spPr>
+        <p:txBody>
+          <a:bodyPr wrap="square" lIns="0" tIns="0" rIns="0" bIns="0" rtlCol="0" anchor="ctr"/>
+          <a:lstStyle/>
+          <a:p>
+            <a:pPr indent="0" marL="0">
+              <a:lnSpc>
+                <a:spcPts val="1600"/>
+              </a:lnSpc>
+              <a:buNone/>
+            </a:pPr>
+            <a:r>
+              <a:rPr lang="en-US" sz="1200" dirty="0">
+                <a:solidFill>
+                  <a:srgbClr val="9AAAE0"/>
+                </a:solidFill>
+                <a:latin typeface="Calibri" pitchFamily="34" charset="0"/>
+                <a:ea typeface="Calibri" pitchFamily="34" charset="-122"/>
+                <a:cs typeface="Calibri" pitchFamily="34" charset="-120"/>
+              </a:rPr>
+              <a:t>Findings this cycle, produced by six agents</a:t>
+            </a:r>
+            <a:endParaRPr lang="en-US" sz="1200" dirty="0"/>
+          </a:p>
+        </p:txBody>
+      </p:sp>
+      <p:sp>
+        <p:nvSpPr>
+          <p:cNvPr id="16" name="Shape 14"/>
+          <p:cNvSpPr/>
+          <p:nvPr/>
+        </p:nvSpPr>
+        <p:spPr>
+          <a:xfrm>
+            <a:off x="8997696" y="5102352"/>
+            <a:ext cx="457200" cy="10973"/>
+          </a:xfrm>
+          <a:prstGeom prst="rect">
+            <a:avLst/>
+          </a:prstGeom>
+          <a:solidFill>
+            <a:srgbClr val="C9A94A"/>
+          </a:solidFill>
+          <a:ln/>
+        </p:spPr>
+      </p:sp>
+      <p:sp>
+        <p:nvSpPr>
+          <p:cNvPr id="17" name="Text 15"/>
+          <p:cNvSpPr txBox="1"/>
+          <p:nvPr/>
+        </p:nvSpPr>
+        <p:spPr>
+          <a:xfrm>
+            <a:off x="8997696" y="5230368"/>
+            <a:ext cx="2560320" cy="457200"/>
+          </a:xfrm>
+          <a:prstGeom prst="rect">
+            <a:avLst/>
+          </a:prstGeom>
+          <a:noFill/>
+          <a:ln/>
+        </p:spPr>
+        <p:txBody>
+          <a:bodyPr wrap="square" lIns="0" tIns="0" rIns="0" bIns="0" rtlCol="0" anchor="ctr"/>
+          <a:lstStyle/>
+          <a:p>
+            <a:pPr indent="0" marL="0">
+              <a:buNone/>
+            </a:pPr>
+            <a:r>
+              <a:rPr lang="en-US" sz="2900" spc="100" kern="0" dirty="0">
+                <a:solidFill>
+                  <a:srgbClr val="FFFFFF"/>
+                </a:solidFill>
+                <a:latin typeface="Calibri" pitchFamily="34" charset="0"/>
+                <a:ea typeface="Calibri" pitchFamily="34" charset="-122"/>
+                <a:cs typeface="Calibri" pitchFamily="34" charset="-120"/>
+              </a:rPr>
+              <a:t>USD 8.50m</a:t>
+            </a:r>
+            <a:endParaRPr lang="en-US" sz="2900" dirty="0"/>
+          </a:p>
+        </p:txBody>
+      </p:sp>
+      <p:sp>
+        <p:nvSpPr>
+          <p:cNvPr id="18" name="Text 16"/>
+          <p:cNvSpPr txBox="1"/>
+          <p:nvPr/>
+        </p:nvSpPr>
+        <p:spPr>
+          <a:xfrm>
+            <a:off x="8997696" y="5724144"/>
+            <a:ext cx="2468880" cy="548640"/>
+          </a:xfrm>
+          <a:prstGeom prst="rect">
+            <a:avLst/>
+          </a:prstGeom>
+          <a:noFill/>
+          <a:ln/>
+        </p:spPr>
+        <p:txBody>
+          <a:bodyPr wrap="square" lIns="0" tIns="0" rIns="0" bIns="0" rtlCol="0" anchor="ctr"/>
+          <a:lstStyle/>
+          <a:p>
+            <a:pPr indent="0" marL="0">
+              <a:lnSpc>
+                <a:spcPts val="1600"/>
+              </a:lnSpc>
+              <a:buNone/>
+            </a:pPr>
+            <a:r>
+              <a:rPr lang="en-US" sz="1200" dirty="0">
+                <a:solidFill>
+                  <a:srgbClr val="9AAAE0"/>
+                </a:solidFill>
+                <a:latin typeface="Calibri" pitchFamily="34" charset="0"/>
+                <a:ea typeface="Calibri" pitchFamily="34" charset="-122"/>
+                <a:cs typeface="Calibri" pitchFamily="34" charset="-120"/>
+              </a:rPr>
+              <a:t>Idle cash above mandate, deployable today</a:t>
+            </a:r>
+            <a:endParaRPr lang="en-US" sz="1200" dirty="0"/>
+          </a:p>
+        </p:txBody>
+      </p:sp>
+      <p:sp>
+        <p:nvSpPr>
+          <p:cNvPr id="19" name="Text 17"/>
+          <p:cNvSpPr txBox="1"/>
+          <p:nvPr/>
+        </p:nvSpPr>
+        <p:spPr>
+          <a:xfrm>
+            <a:off x="822960" y="6382512"/>
+            <a:ext cx="10515600" cy="310896"/>
+          </a:xfrm>
+          <a:prstGeom prst="rect">
+            <a:avLst/>
+          </a:prstGeom>
+          <a:noFill/>
+          <a:ln/>
+        </p:spPr>
+        <p:txBody>
+          <a:bodyPr wrap="square" lIns="0" tIns="0" rIns="0" bIns="0" rtlCol="0" anchor="ctr"/>
+          <a:lstStyle/>
+          <a:p>
+            <a:pPr indent="0" marL="0">
+              <a:buNone/>
+            </a:pPr>
+            <a:r>
+              <a:rPr lang="en-US" sz="1350" dirty="0">
+                <a:solidFill>
+                  <a:srgbClr val="6E86D8"/>
                 </a:solidFill>
                 <a:latin typeface="Calibri" pitchFamily="34" charset="0"/>
                 <a:ea typeface="Calibri" pitchFamily="34" charset="-122"/>
@@ -3291,7 +3643,7 @@
               </a:rPr>
               <a:t>github.com/jvvinoth/Foresight-RM</a:t>
             </a:r>
-            <a:endParaRPr lang="en-US" sz="1450" dirty="0"/>
+            <a:endParaRPr lang="en-US" sz="1350" dirty="0"/>
           </a:p>
         </p:txBody>
       </p:sp>

--- a/docs/Foresight-RM-Pitch.pptx
+++ b/docs/Foresight-RM-Pitch.pptx
@@ -953,7 +953,7 @@
           <a:p>
             <a:r>
               <a:rPr lang="en-US" dirty="0"/>
-              <a:t>One click resolves the six positions into a single correlated bet: 49.0% of wealth against a 10% single-position limit, plus three exposures held outside the portfolio entirely. Pause after the limit figure.</a:t>
+              <a:t>One click resolves the six positions into a single correlated bet. His mandate is Balanced, so the single-position limit is 12% (mandates.csv, BAL) — and three positions already breach it: the Mid-Levels apartment at 19.58%, a Pacific Rim Bank perpetual at 17.57%, and the Golden Harbour perpetual at 12.87%. The 49% is the aggregate across four correlated positions, which no mandate rule measures at all. That gap is the point. Pause after the limit figure.</a:t>
             </a:r>
             <a:endParaRPr lang="en-US" dirty="0"/>
           </a:p>
@@ -4228,24 +4228,27 @@
         </p:nvSpPr>
         <p:spPr>
           <a:xfrm>
-            <a:off x="5623560" y="3977640"/>
-            <a:ext cx="5943600" cy="365760"/>
-          </a:xfrm>
-          <a:prstGeom prst="rect">
-            <a:avLst/>
-          </a:prstGeom>
-          <a:noFill/>
-          <a:ln/>
-        </p:spPr>
-        <p:txBody>
-          <a:bodyPr wrap="square" lIns="0" tIns="0" rIns="0" bIns="0" rtlCol="0" anchor="ctr"/>
-          <a:lstStyle/>
-          <a:p>
-            <a:pPr indent="0" marL="0">
-              <a:buNone/>
-            </a:pPr>
-            <a:r>
-              <a:rPr lang="en-US" sz="1450" spc="100" kern="0" dirty="0">
+            <a:off x="5623560" y="3931920"/>
+            <a:ext cx="5943600" cy="685800"/>
+          </a:xfrm>
+          <a:prstGeom prst="rect">
+            <a:avLst/>
+          </a:prstGeom>
+          <a:noFill/>
+          <a:ln/>
+        </p:spPr>
+        <p:txBody>
+          <a:bodyPr wrap="square" lIns="0" tIns="0" rIns="0" bIns="0" rtlCol="0" anchor="ctr"/>
+          <a:lstStyle/>
+          <a:p>
+            <a:pPr indent="0" marL="0">
+              <a:lnSpc>
+                <a:spcPts val="2200"/>
+              </a:lnSpc>
+              <a:buNone/>
+            </a:pPr>
+            <a:r>
+              <a:rPr lang="en-US" sz="1450" spc="80" kern="0" dirty="0">
                 <a:solidFill>
                   <a:srgbClr val="C9A94A"/>
                 </a:solidFill>
@@ -4253,7 +4256,7 @@
                 <a:ea typeface="Calibri" pitchFamily="34" charset="-122"/>
                 <a:cs typeface="Calibri" pitchFamily="34" charset="-120"/>
               </a:rPr>
-              <a:t>Mandate limit for a single position: 10%</a:t>
+              <a:t>Three positions already breach the 12% single-position limit — and no mandate rule measures the other 49%</a:t>
             </a:r>
             <a:endParaRPr lang="en-US" sz="1450" dirty="0"/>
           </a:p>

--- a/docs/Foresight-RM-Pitch.pptx
+++ b/docs/Foresight-RM-Pitch.pptx
@@ -777,7 +777,7 @@
           <a:p>
             <a:r>
               <a:rPr lang="en-US" dirty="0"/>
-              <a:t>Close on the three sentences, then let the four numbers sit on screen through questions. Every one of them is read from the run, not asserted: seven of twenty clients had an RM note change the answer, six findings were held with a reason and a revisit date, forty-eight findings came from six agents, and USD 8.50m of idle cash sits above mandate.</a:t>
+              <a:t>Close on the three sentences, then let the four numbers sit on screen through questions. Every one of them is read from the run, not asserted: seven of twenty clients had an RM note change the answer, six findings were held with a reason and a dated RM note, forty-eight findings came from six agents, and USD 8.50m of idle cash sits above mandate.</a:t>
             </a:r>
             <a:endParaRPr lang="en-US" dirty="0"/>
           </a:p>
@@ -1217,7 +1217,7 @@
           <a:p>
             <a:r>
               <a:rPr lang="en-US" dirty="0"/>
-              <a:t>Suitability correctly identifies a critical breach. The Relationship agent objects on a dated client instruction, and the gate holds the finding with a reason and a revisit date. The system can overrule its own analysis when a human fact requires it.</a:t>
+              <a:t>Suitability correctly identifies a critical breach. The Relationship agent objects on a dated client instruction, and the gate holds the finding with a reason and a dated note. Only some holds carry a revisit date; this one does not, because the instruction was open-ended. The system can overrule its own analysis when a human fact requires it.</a:t>
             </a:r>
             <a:endParaRPr lang="en-US" dirty="0"/>
           </a:p>
@@ -3400,7 +3400,7 @@
                 <a:ea typeface="Calibri" pitchFamily="34" charset="-122"/>
                 <a:cs typeface="Calibri" pitchFamily="34" charset="-120"/>
               </a:rPr>
-              <a:t>Findings held, each with a reason and a revisit date</a:t>
+              <a:t>Findings held, each with a reason and a dated RM note</a:t>
             </a:r>
             <a:endParaRPr lang="en-US" sz="1200" dirty="0"/>
           </a:p>
